--- a/report/260811_Kobo_ZHT_RA6080_SPcomFailI_improved.pptx
+++ b/report/260811_Kobo_ZHT_RA6080_SPcomFailI_improved.pptx
@@ -13,12 +13,17 @@
   <p:sldIdLst>
     <p:sldId id="256" r:id="rId2"/>
     <p:sldId id="543" r:id="rId3"/>
-    <p:sldId id="546" r:id="rId13"/>
     <p:sldId id="545" r:id="rId4"/>
     <p:sldId id="544" r:id="rId5"/>
+    <p:sldId id="540" r:id="rId6"/>
+    <p:sldId id="546" r:id="rId13"/>
     <p:sldId id="547" r:id="rId14"/>
     <p:sldId id="548" r:id="rId15"/>
-    <p:sldId id="540" r:id="rId6"/>
+    <p:sldId id="549" r:id="rId16"/>
+    <p:sldId id="550" r:id="rId17"/>
+    <p:sldId id="551" r:id="rId18"/>
+    <p:sldId id="552" r:id="rId19"/>
+    <p:sldId id="553" r:id="rId20"/>
   </p:sldIdLst>
   <p:sldSz cx="9144000" cy="6858000" type="screen4x3"/>
   <p:notesSz cx="6797675" cy="9926638"/>
@@ -4495,6 +4500,2651 @@
                 </a:outerShdw>
               </a:effectLst>
             </a:endParaRPr>
+          </a:p>
+        </p:txBody>
+      </p:sp>
+    </p:spTree>
+  </p:cSld>
+  <p:clrMapOvr>
+    <a:masterClrMapping/>
+  </p:clrMapOvr>
+</p:sld>
+</file>
+
+<file path=ppt/slides/slide10.xml><?xml version="1.0" encoding="utf-8"?>
+<p:sld xmlns:a="http://schemas.openxmlformats.org/drawingml/2006/main" xmlns:p="http://schemas.openxmlformats.org/presentationml/2006/main" xmlns:r="http://schemas.openxmlformats.org/officeDocument/2006/relationships">
+  <p:cSld>
+    <p:spTree>
+      <p:nvGrpSpPr>
+        <p:cNvPr id="1" name=""/>
+        <p:cNvGrpSpPr/>
+        <p:nvPr/>
+      </p:nvGrpSpPr>
+      <p:grpSpPr/>
+      <p:sp>
+        <p:nvSpPr>
+          <p:cNvPr id="2" name="Vertical Title 1"/>
+          <p:cNvSpPr>
+            <a:spLocks noGrp="1"/>
+          </p:cNvSpPr>
+          <p:nvPr>
+            <p:ph type="title" orient="vert"/>
+          </p:nvPr>
+        </p:nvSpPr>
+        <p:spPr/>
+        <p:txBody>
+          <a:bodyPr/>
+          <a:lstStyle/>
+          <a:p>
+            <a:r>
+              <a:t>根因驗證及統計分析</a:t>
+            </a:r>
+          </a:p>
+        </p:txBody>
+      </p:sp>
+      <p:sp>
+        <p:nvSpPr>
+          <p:cNvPr id="3" name="Vertical Text Placeholder 2"/>
+          <p:cNvSpPr>
+            <a:spLocks noGrp="1"/>
+          </p:cNvSpPr>
+          <p:nvPr>
+            <p:ph type="body" idx="1" orient="vert"/>
+          </p:nvPr>
+        </p:nvSpPr>
+        <p:spPr/>
+        <p:txBody>
+          <a:bodyPr/>
+          <a:lstStyle/>
+          <a:p>
+            <a:pPr>
+              <a:defRPr b="1" sz="1800">
+                <a:solidFill>
+                  <a:srgbClr val="0070C0"/>
+                </a:solidFill>
+              </a:defRPr>
+            </a:pPr>
+            <a:r>
+              <a:t>針對問題點之深度分析建議:</a:t>
+            </a:r>
+          </a:p>
+          <a:p>
+            <a:pPr>
+              <a:defRPr sz="1400"/>
+            </a:pPr>
+            <a:r>
+              <a:t>採用了排除法(移除TVS、移除IC)進行初步分析，邏輯尚屬合理，但缺乏更深層的物理分析(如SEM或X-ray)來確認IC內部的損傷機制。</a:t>
+            </a:r>
+          </a:p>
+          <a:p>
+            <a:pPr>
+              <a:defRPr sz="1400"/>
+            </a:pPr>
+            <a:r>
+              <a:t>結論僅停留在「推測」為I/O損傷，缺乏因果關係的深度分析。未說明為何會造成損傷(如ESD、過電壓或生產製程問題)，未應用5-Why分析。</a:t>
+            </a:r>
+          </a:p>
+          <a:p>
+            <a:br/>
+            <a:pPr>
+              <a:defRPr b="1"/>
+            </a:pPr>
+            <a:r>
+              <a:t>[建議執行動作]</a:t>
+            </a:r>
+          </a:p>
+          <a:p>
+            <a:pPr>
+              <a:defRPr sz="1200"/>
+            </a:pPr>
+            <a:r>
+              <a:t>• 設定 DVT 正常品 vs PVT 異常品之對照組</a:t>
+            </a:r>
+          </a:p>
+          <a:p>
+            <a:pPr>
+              <a:defRPr sz="1200"/>
+            </a:pPr>
+            <a:r>
+              <a:t>• 使用獨立樣本 t 檢定驗證參數顯著性 (p &lt; 0.05)</a:t>
+            </a:r>
+          </a:p>
+          <a:p>
+            <a:pPr>
+              <a:defRPr sz="1200"/>
+            </a:pPr>
+            <a:r>
+              <a:t>• 確保統計證據支持最終提到的根本原因</a:t>
+            </a:r>
+          </a:p>
+        </p:txBody>
+      </p:sp>
+    </p:spTree>
+  </p:cSld>
+  <p:clrMapOvr>
+    <a:masterClrMapping/>
+  </p:clrMapOvr>
+</p:sld>
+</file>
+
+<file path=ppt/slides/slide11.xml><?xml version="1.0" encoding="utf-8"?>
+<p:sld xmlns:a="http://schemas.openxmlformats.org/drawingml/2006/main" xmlns:p="http://schemas.openxmlformats.org/presentationml/2006/main" xmlns:r="http://schemas.openxmlformats.org/officeDocument/2006/relationships">
+  <p:cSld>
+    <p:spTree>
+      <p:nvGrpSpPr>
+        <p:cNvPr id="1" name=""/>
+        <p:cNvGrpSpPr/>
+        <p:nvPr/>
+      </p:nvGrpSpPr>
+      <p:grpSpPr/>
+      <p:sp>
+        <p:nvSpPr>
+          <p:cNvPr id="2" name="Vertical Title 1"/>
+          <p:cNvSpPr>
+            <a:spLocks noGrp="1"/>
+          </p:cNvSpPr>
+          <p:nvPr>
+            <p:ph type="title" orient="vert"/>
+          </p:nvPr>
+        </p:nvSpPr>
+        <p:spPr/>
+        <p:txBody>
+          <a:bodyPr/>
+          <a:lstStyle/>
+          <a:p>
+            <a:r>
+              <a:t>長期預防措施與改善對策</a:t>
+            </a:r>
+          </a:p>
+        </p:txBody>
+      </p:sp>
+      <p:sp>
+        <p:nvSpPr>
+          <p:cNvPr id="3" name="Vertical Text Placeholder 2"/>
+          <p:cNvSpPr>
+            <a:spLocks noGrp="1"/>
+          </p:cNvSpPr>
+          <p:nvPr>
+            <p:ph type="body" idx="1" orient="vert"/>
+          </p:nvPr>
+        </p:nvSpPr>
+        <p:spPr/>
+        <p:txBody>
+          <a:bodyPr/>
+          <a:lstStyle/>
+          <a:p>
+            <a:pPr>
+              <a:defRPr b="1" sz="1800">
+                <a:solidFill>
+                  <a:srgbClr val="0070C0"/>
+                </a:solidFill>
+              </a:defRPr>
+            </a:pPr>
+            <a:r>
+              <a:t>擬議改善對策項目:</a:t>
+            </a:r>
+          </a:p>
+          <a:p>
+            <a:pPr>
+              <a:defRPr sz="1400"/>
+            </a:pPr>
+            <a:r>
+              <a:t>提供了產品型號、日期與準備者，但缺乏具體的批號(Lot No.)、失效數量(Failure Quantity)以及明確的客戶名稱。</a:t>
+            </a:r>
+          </a:p>
+          <a:p>
+            <a:pPr>
+              <a:defRPr sz="1400"/>
+            </a:pPr>
+            <a:r>
+              <a:t>失效現象描述清楚(SPI無法通訊)，並提供了金手指對地的量測數據，但缺乏失效率(Failure Rate)的統計數據。</a:t>
+            </a:r>
+          </a:p>
+          <a:p>
+            <a:pPr>
+              <a:defRPr sz="1400"/>
+            </a:pPr>
+            <a:r>
+              <a:t>採用了排除法(移除TVS、移除IC)進行初步分析，邏輯尚屬合理，但缺乏更深層的物理分析(如SEM或X-ray)來確認IC內部的損傷機制。</a:t>
+            </a:r>
+          </a:p>
+          <a:p>
+            <a:br/>
+            <a:pPr>
+              <a:defRPr b="1"/>
+            </a:pPr>
+            <a:r>
+              <a:t>[標準化與監測計畫]</a:t>
+            </a:r>
+          </a:p>
+          <a:p>
+            <a:pPr>
+              <a:defRPr sz="1200"/>
+            </a:pPr>
+            <a:r>
+              <a:t>• 建立入料檢驗 (IQC) SOP 與測試閾值</a:t>
+            </a:r>
+          </a:p>
+          <a:p>
+            <a:pPr>
+              <a:defRPr sz="1200"/>
+            </a:pPr>
+            <a:r>
+              <a:t>• 導入自動化監測設備於生產線</a:t>
+            </a:r>
+          </a:p>
+          <a:p>
+            <a:pPr>
+              <a:defRPr sz="1200"/>
+            </a:pPr>
+            <a:r>
+              <a:t>• 將此案例納入知識管理資料庫以利後續追蹤</a:t>
+            </a:r>
+          </a:p>
+        </p:txBody>
+      </p:sp>
+      <p:sp>
+        <p:nvSpPr>
+          <p:cNvPr id="4" name="Rectangle 3"/>
+          <p:cNvSpPr/>
+          <p:nvPr/>
+        </p:nvSpPr>
+        <p:spPr>
+          <a:xfrm>
+            <a:off x="457200" y="5669280"/>
+            <a:ext cx="8229600" cy="91440"/>
+          </a:xfrm>
+          <a:prstGeom prst="rect">
+            <a:avLst/>
+          </a:prstGeom>
+          <a:solidFill>
+            <a:srgbClr val="808080"/>
+          </a:solidFill>
+          <a:ln>
+            <a:noFill/>
+          </a:ln>
+        </p:spPr>
+        <p:style>
+          <a:lnRef idx="1">
+            <a:schemeClr val="accent1"/>
+          </a:lnRef>
+          <a:fillRef idx="3">
+            <a:schemeClr val="accent1"/>
+          </a:fillRef>
+          <a:effectRef idx="2">
+            <a:schemeClr val="accent1"/>
+          </a:effectRef>
+          <a:fontRef idx="minor">
+            <a:schemeClr val="lt1"/>
+          </a:fontRef>
+        </p:style>
+        <p:txBody>
+          <a:bodyPr rtlCol="0" anchor="ctr"/>
+          <a:lstStyle/>
+          <a:p>
+            <a:pPr algn="ctr"/>
+          </a:p>
+        </p:txBody>
+      </p:sp>
+      <p:sp>
+        <p:nvSpPr>
+          <p:cNvPr id="5" name="Oval 4"/>
+          <p:cNvSpPr/>
+          <p:nvPr/>
+        </p:nvSpPr>
+        <p:spPr>
+          <a:xfrm>
+            <a:off x="1645920" y="5532120"/>
+            <a:ext cx="365760" cy="365760"/>
+          </a:xfrm>
+          <a:prstGeom prst="ellipse">
+            <a:avLst/>
+          </a:prstGeom>
+          <a:solidFill>
+            <a:srgbClr val="ED7D31"/>
+          </a:solidFill>
+          <a:ln>
+            <a:solidFill>
+              <a:srgbClr val="ED7D31"/>
+            </a:solidFill>
+          </a:ln>
+        </p:spPr>
+        <p:style>
+          <a:lnRef idx="1">
+            <a:schemeClr val="accent1"/>
+          </a:lnRef>
+          <a:fillRef idx="3">
+            <a:schemeClr val="accent1"/>
+          </a:fillRef>
+          <a:effectRef idx="2">
+            <a:schemeClr val="accent1"/>
+          </a:effectRef>
+          <a:fontRef idx="minor">
+            <a:schemeClr val="lt1"/>
+          </a:fontRef>
+        </p:style>
+        <p:txBody>
+          <a:bodyPr rtlCol="0" anchor="ctr" wrap="square" lIns="45720" rIns="45720" tIns="18288" bIns="18288"/>
+          <a:lstStyle/>
+          <a:p>
+            <a:pPr algn="ctr"/>
+            <a:r>
+              <a:rPr sz="1400" b="1">
+                <a:solidFill>
+                  <a:srgbClr val="FFFFFF"/>
+                </a:solidFill>
+              </a:rPr>
+              <a:t>1</a:t>
+            </a:r>
+          </a:p>
+        </p:txBody>
+      </p:sp>
+      <p:sp>
+        <p:nvSpPr>
+          <p:cNvPr id="6" name="TextBox 5"/>
+          <p:cNvSpPr txBox="1"/>
+          <p:nvPr/>
+        </p:nvSpPr>
+        <p:spPr>
+          <a:xfrm>
+            <a:off x="457200" y="5943600"/>
+            <a:ext cx="2743200" cy="365760"/>
+          </a:xfrm>
+          <a:prstGeom prst="rect">
+            <a:avLst/>
+          </a:prstGeom>
+          <a:noFill/>
+        </p:spPr>
+        <p:txBody>
+          <a:bodyPr wrap="square">
+            <a:spAutoFit/>
+          </a:bodyPr>
+          <a:lstStyle/>
+          <a:p>
+            <a:pPr algn="ctr"/>
+            <a:r>
+              <a:rPr sz="1100" b="1">
+                <a:solidFill>
+                  <a:srgbClr val="ED7D31"/>
+                </a:solidFill>
+              </a:rPr>
+              <a:t>短期 (&lt; 1 個月)</a:t>
+            </a:r>
+          </a:p>
+        </p:txBody>
+      </p:sp>
+      <p:sp>
+        <p:nvSpPr>
+          <p:cNvPr id="7" name="TextBox 6"/>
+          <p:cNvSpPr txBox="1"/>
+          <p:nvPr/>
+        </p:nvSpPr>
+        <p:spPr>
+          <a:xfrm>
+            <a:off x="457200" y="6217920"/>
+            <a:ext cx="2743200" cy="274320"/>
+          </a:xfrm>
+          <a:prstGeom prst="rect">
+            <a:avLst/>
+          </a:prstGeom>
+          <a:noFill/>
+        </p:spPr>
+        <p:txBody>
+          <a:bodyPr wrap="square">
+            <a:spAutoFit/>
+          </a:bodyPr>
+          <a:lstStyle/>
+          <a:p>
+            <a:pPr algn="ctr"/>
+            <a:r>
+              <a:rPr sz="900">
+                <a:solidFill>
+                  <a:srgbClr val="808080"/>
+                </a:solidFill>
+              </a:rPr>
+              <a:t>D+0 ~ D+30</a:t>
+            </a:r>
+          </a:p>
+        </p:txBody>
+      </p:sp>
+      <p:sp>
+        <p:nvSpPr>
+          <p:cNvPr id="8" name="Oval 7"/>
+          <p:cNvSpPr/>
+          <p:nvPr/>
+        </p:nvSpPr>
+        <p:spPr>
+          <a:xfrm>
+            <a:off x="4389120" y="5532120"/>
+            <a:ext cx="365760" cy="365760"/>
+          </a:xfrm>
+          <a:prstGeom prst="ellipse">
+            <a:avLst/>
+          </a:prstGeom>
+          <a:solidFill>
+            <a:srgbClr val="1F4E79"/>
+          </a:solidFill>
+          <a:ln>
+            <a:solidFill>
+              <a:srgbClr val="1F4E79"/>
+            </a:solidFill>
+          </a:ln>
+        </p:spPr>
+        <p:style>
+          <a:lnRef idx="1">
+            <a:schemeClr val="accent1"/>
+          </a:lnRef>
+          <a:fillRef idx="3">
+            <a:schemeClr val="accent1"/>
+          </a:fillRef>
+          <a:effectRef idx="2">
+            <a:schemeClr val="accent1"/>
+          </a:effectRef>
+          <a:fontRef idx="minor">
+            <a:schemeClr val="lt1"/>
+          </a:fontRef>
+        </p:style>
+        <p:txBody>
+          <a:bodyPr rtlCol="0" anchor="ctr" wrap="square" lIns="45720" rIns="45720" tIns="18288" bIns="18288"/>
+          <a:lstStyle/>
+          <a:p>
+            <a:pPr algn="ctr"/>
+            <a:r>
+              <a:rPr sz="1400" b="1">
+                <a:solidFill>
+                  <a:srgbClr val="FFFFFF"/>
+                </a:solidFill>
+              </a:rPr>
+              <a:t>2</a:t>
+            </a:r>
+          </a:p>
+        </p:txBody>
+      </p:sp>
+      <p:sp>
+        <p:nvSpPr>
+          <p:cNvPr id="9" name="TextBox 8"/>
+          <p:cNvSpPr txBox="1"/>
+          <p:nvPr/>
+        </p:nvSpPr>
+        <p:spPr>
+          <a:xfrm>
+            <a:off x="3200400" y="5943600"/>
+            <a:ext cx="2743200" cy="365760"/>
+          </a:xfrm>
+          <a:prstGeom prst="rect">
+            <a:avLst/>
+          </a:prstGeom>
+          <a:noFill/>
+        </p:spPr>
+        <p:txBody>
+          <a:bodyPr wrap="square">
+            <a:spAutoFit/>
+          </a:bodyPr>
+          <a:lstStyle/>
+          <a:p>
+            <a:pPr algn="ctr"/>
+            <a:r>
+              <a:rPr sz="1100" b="1">
+                <a:solidFill>
+                  <a:srgbClr val="1F4E79"/>
+                </a:solidFill>
+              </a:rPr>
+              <a:t>中期 (1-3 個月)</a:t>
+            </a:r>
+          </a:p>
+        </p:txBody>
+      </p:sp>
+      <p:sp>
+        <p:nvSpPr>
+          <p:cNvPr id="10" name="TextBox 9"/>
+          <p:cNvSpPr txBox="1"/>
+          <p:nvPr/>
+        </p:nvSpPr>
+        <p:spPr>
+          <a:xfrm>
+            <a:off x="3200400" y="6217920"/>
+            <a:ext cx="2743200" cy="274320"/>
+          </a:xfrm>
+          <a:prstGeom prst="rect">
+            <a:avLst/>
+          </a:prstGeom>
+          <a:noFill/>
+        </p:spPr>
+        <p:txBody>
+          <a:bodyPr wrap="square">
+            <a:spAutoFit/>
+          </a:bodyPr>
+          <a:lstStyle/>
+          <a:p>
+            <a:pPr algn="ctr"/>
+            <a:r>
+              <a:rPr sz="900">
+                <a:solidFill>
+                  <a:srgbClr val="808080"/>
+                </a:solidFill>
+              </a:rPr>
+              <a:t>D+30 ~ D+90</a:t>
+            </a:r>
+          </a:p>
+        </p:txBody>
+      </p:sp>
+      <p:sp>
+        <p:nvSpPr>
+          <p:cNvPr id="11" name="Oval 10"/>
+          <p:cNvSpPr/>
+          <p:nvPr/>
+        </p:nvSpPr>
+        <p:spPr>
+          <a:xfrm>
+            <a:off x="7132320" y="5532120"/>
+            <a:ext cx="365760" cy="365760"/>
+          </a:xfrm>
+          <a:prstGeom prst="ellipse">
+            <a:avLst/>
+          </a:prstGeom>
+          <a:solidFill>
+            <a:srgbClr val="70AD47"/>
+          </a:solidFill>
+          <a:ln>
+            <a:solidFill>
+              <a:srgbClr val="70AD47"/>
+            </a:solidFill>
+          </a:ln>
+        </p:spPr>
+        <p:style>
+          <a:lnRef idx="1">
+            <a:schemeClr val="accent1"/>
+          </a:lnRef>
+          <a:fillRef idx="3">
+            <a:schemeClr val="accent1"/>
+          </a:fillRef>
+          <a:effectRef idx="2">
+            <a:schemeClr val="accent1"/>
+          </a:effectRef>
+          <a:fontRef idx="minor">
+            <a:schemeClr val="lt1"/>
+          </a:fontRef>
+        </p:style>
+        <p:txBody>
+          <a:bodyPr rtlCol="0" anchor="ctr" wrap="square" lIns="45720" rIns="45720" tIns="18288" bIns="18288"/>
+          <a:lstStyle/>
+          <a:p>
+            <a:pPr algn="ctr"/>
+            <a:r>
+              <a:rPr sz="1400" b="1">
+                <a:solidFill>
+                  <a:srgbClr val="FFFFFF"/>
+                </a:solidFill>
+              </a:rPr>
+              <a:t>3</a:t>
+            </a:r>
+          </a:p>
+        </p:txBody>
+      </p:sp>
+      <p:sp>
+        <p:nvSpPr>
+          <p:cNvPr id="12" name="TextBox 11"/>
+          <p:cNvSpPr txBox="1"/>
+          <p:nvPr/>
+        </p:nvSpPr>
+        <p:spPr>
+          <a:xfrm>
+            <a:off x="5943600" y="5943600"/>
+            <a:ext cx="2743200" cy="365760"/>
+          </a:xfrm>
+          <a:prstGeom prst="rect">
+            <a:avLst/>
+          </a:prstGeom>
+          <a:noFill/>
+        </p:spPr>
+        <p:txBody>
+          <a:bodyPr wrap="square">
+            <a:spAutoFit/>
+          </a:bodyPr>
+          <a:lstStyle/>
+          <a:p>
+            <a:pPr algn="ctr"/>
+            <a:r>
+              <a:rPr sz="1100" b="1">
+                <a:solidFill>
+                  <a:srgbClr val="70AD47"/>
+                </a:solidFill>
+              </a:rPr>
+              <a:t>長期 (&gt; 3 個月)</a:t>
+            </a:r>
+          </a:p>
+        </p:txBody>
+      </p:sp>
+      <p:sp>
+        <p:nvSpPr>
+          <p:cNvPr id="13" name="TextBox 12"/>
+          <p:cNvSpPr txBox="1"/>
+          <p:nvPr/>
+        </p:nvSpPr>
+        <p:spPr>
+          <a:xfrm>
+            <a:off x="5943600" y="6217920"/>
+            <a:ext cx="2743200" cy="274320"/>
+          </a:xfrm>
+          <a:prstGeom prst="rect">
+            <a:avLst/>
+          </a:prstGeom>
+          <a:noFill/>
+        </p:spPr>
+        <p:txBody>
+          <a:bodyPr wrap="square">
+            <a:spAutoFit/>
+          </a:bodyPr>
+          <a:lstStyle/>
+          <a:p>
+            <a:pPr algn="ctr"/>
+            <a:r>
+              <a:rPr sz="900">
+                <a:solidFill>
+                  <a:srgbClr val="808080"/>
+                </a:solidFill>
+              </a:rPr>
+              <a:t>D+90 ~ D+180</a:t>
+            </a:r>
+          </a:p>
+        </p:txBody>
+      </p:sp>
+    </p:spTree>
+  </p:cSld>
+  <p:clrMapOvr>
+    <a:masterClrMapping/>
+  </p:clrMapOvr>
+</p:sld>
+</file>
+
+<file path=ppt/slides/slide12.xml><?xml version="1.0" encoding="utf-8"?>
+<p:sld xmlns:a="http://schemas.openxmlformats.org/drawingml/2006/main" xmlns:p="http://schemas.openxmlformats.org/presentationml/2006/main" xmlns:r="http://schemas.openxmlformats.org/officeDocument/2006/relationships">
+  <p:cSld>
+    <p:spTree>
+      <p:nvGrpSpPr>
+        <p:cNvPr id="1" name=""/>
+        <p:cNvGrpSpPr/>
+        <p:nvPr/>
+      </p:nvGrpSpPr>
+      <p:grpSpPr/>
+      <p:sp>
+        <p:nvSpPr>
+          <p:cNvPr id="2" name="Vertical Title 1"/>
+          <p:cNvSpPr>
+            <a:spLocks noGrp="1"/>
+          </p:cNvSpPr>
+          <p:nvPr>
+            <p:ph type="title" orient="vert"/>
+          </p:nvPr>
+        </p:nvSpPr>
+        <p:spPr/>
+        <p:txBody>
+          <a:bodyPr/>
+          <a:lstStyle/>
+          <a:p>
+            <a:r>
+              <a:t>IQC 入料檢驗標準</a:t>
+            </a:r>
+          </a:p>
+        </p:txBody>
+      </p:sp>
+      <p:sp>
+        <p:nvSpPr>
+          <p:cNvPr id="3" name="Vertical Text Placeholder 2"/>
+          <p:cNvSpPr>
+            <a:spLocks noGrp="1"/>
+          </p:cNvSpPr>
+          <p:nvPr>
+            <p:ph type="body" idx="1" orient="vert"/>
+          </p:nvPr>
+        </p:nvSpPr>
+        <p:spPr/>
+        <p:txBody>
+          <a:bodyPr/>
+          <a:lstStyle/>
+          <a:p/>
+        </p:txBody>
+      </p:sp>
+      <p:graphicFrame>
+        <p:nvGraphicFramePr>
+          <p:cNvPr id="4" name="Table 3"/>
+          <p:cNvGraphicFramePr>
+            <a:graphicFrameLocks noGrp="1"/>
+          </p:cNvGraphicFramePr>
+          <p:nvPr/>
+        </p:nvGraphicFramePr>
+        <p:xfrm>
+          <a:off x="457200" y="1280160"/>
+          <a:ext cx="8229600" cy="4114800"/>
+        </p:xfrm>
+        <a:graphic>
+          <a:graphicData uri="http://schemas.openxmlformats.org/drawingml/2006/table">
+            <a:tbl>
+              <a:tblPr firstRow="1" bandRow="1">
+                <a:tableStyleId>{5C22544A-7EE6-4342-B048-85BDC9FD1C3A}</a:tableStyleId>
+              </a:tblPr>
+              <a:tblGrid>
+                <a:gridCol w="2057400"/>
+                <a:gridCol w="2057400"/>
+                <a:gridCol w="2057400"/>
+                <a:gridCol w="2057400"/>
+              </a:tblGrid>
+              <a:tr h="685800">
+                <a:tc>
+                  <a:txBody>
+                    <a:bodyPr/>
+                    <a:lstStyle/>
+                    <a:p>
+                      <a:r>
+                        <a:rPr b="1" sz="1100">
+                          <a:solidFill>
+                            <a:srgbClr val="FFFFFF"/>
+                          </a:solidFill>
+                        </a:rPr>
+                        <a:t>檢驗項目</a:t>
+                      </a:r>
+                    </a:p>
+                  </a:txBody>
+                  <a:tcPr>
+                    <a:solidFill>
+                      <a:srgbClr val="1F4E79"/>
+                    </a:solidFill>
+                  </a:tcPr>
+                </a:tc>
+                <a:tc>
+                  <a:txBody>
+                    <a:bodyPr/>
+                    <a:lstStyle/>
+                    <a:p>
+                      <a:r>
+                        <a:rPr b="1" sz="1100">
+                          <a:solidFill>
+                            <a:srgbClr val="FFFFFF"/>
+                          </a:solidFill>
+                        </a:rPr>
+                        <a:t>抽驗比例</a:t>
+                      </a:r>
+                    </a:p>
+                  </a:txBody>
+                  <a:tcPr>
+                    <a:solidFill>
+                      <a:srgbClr val="1F4E79"/>
+                    </a:solidFill>
+                  </a:tcPr>
+                </a:tc>
+                <a:tc>
+                  <a:txBody>
+                    <a:bodyPr/>
+                    <a:lstStyle/>
+                    <a:p>
+                      <a:r>
+                        <a:rPr b="1" sz="1100">
+                          <a:solidFill>
+                            <a:srgbClr val="FFFFFF"/>
+                          </a:solidFill>
+                        </a:rPr>
+                        <a:t>允收標準 (AQL)</a:t>
+                      </a:r>
+                    </a:p>
+                  </a:txBody>
+                  <a:tcPr>
+                    <a:solidFill>
+                      <a:srgbClr val="1F4E79"/>
+                    </a:solidFill>
+                  </a:tcPr>
+                </a:tc>
+                <a:tc>
+                  <a:txBody>
+                    <a:bodyPr/>
+                    <a:lstStyle/>
+                    <a:p>
+                      <a:r>
+                        <a:rPr b="1" sz="1100">
+                          <a:solidFill>
+                            <a:srgbClr val="FFFFFF"/>
+                          </a:solidFill>
+                        </a:rPr>
+                        <a:t>不合格處置</a:t>
+                      </a:r>
+                    </a:p>
+                  </a:txBody>
+                  <a:tcPr>
+                    <a:solidFill>
+                      <a:srgbClr val="1F4E79"/>
+                    </a:solidFill>
+                  </a:tcPr>
+                </a:tc>
+              </a:tr>
+              <a:tr h="685800">
+                <a:tc>
+                  <a:txBody>
+                    <a:bodyPr/>
+                    <a:lstStyle/>
+                    <a:p>
+                      <a:r>
+                        <a:rPr sz="1000"/>
+                        <a:t>外觀檢查</a:t>
+                      </a:r>
+                    </a:p>
+                  </a:txBody>
+                  <a:tcPr/>
+                </a:tc>
+                <a:tc>
+                  <a:txBody>
+                    <a:bodyPr/>
+                    <a:lstStyle/>
+                    <a:p>
+                      <a:r>
+                        <a:rPr sz="1000"/>
+                        <a:t>AQL 1.0</a:t>
+                      </a:r>
+                    </a:p>
+                  </a:txBody>
+                  <a:tcPr/>
+                </a:tc>
+                <a:tc>
+                  <a:txBody>
+                    <a:bodyPr/>
+                    <a:lstStyle/>
+                    <a:p>
+                      <a:r>
+                        <a:rPr sz="1000"/>
+                        <a:t>MIL-STD-105E Level II</a:t>
+                      </a:r>
+                    </a:p>
+                  </a:txBody>
+                  <a:tcPr/>
+                </a:tc>
+                <a:tc>
+                  <a:txBody>
+                    <a:bodyPr/>
+                    <a:lstStyle/>
+                    <a:p>
+                      <a:r>
+                        <a:rPr sz="1000"/>
+                        <a:t>退貨重工</a:t>
+                      </a:r>
+                    </a:p>
+                  </a:txBody>
+                  <a:tcPr/>
+                </a:tc>
+              </a:tr>
+              <a:tr h="685800">
+                <a:tc>
+                  <a:txBody>
+                    <a:bodyPr/>
+                    <a:lstStyle/>
+                    <a:p>
+                      <a:r>
+                        <a:rPr sz="1000"/>
+                        <a:t>尺寸量測</a:t>
+                      </a:r>
+                    </a:p>
+                  </a:txBody>
+                  <a:tcPr/>
+                </a:tc>
+                <a:tc>
+                  <a:txBody>
+                    <a:bodyPr/>
+                    <a:lstStyle/>
+                    <a:p>
+                      <a:r>
+                        <a:rPr sz="1000"/>
+                        <a:t>5%</a:t>
+                      </a:r>
+                    </a:p>
+                  </a:txBody>
+                  <a:tcPr/>
+                </a:tc>
+                <a:tc>
+                  <a:txBody>
+                    <a:bodyPr/>
+                    <a:lstStyle/>
+                    <a:p>
+                      <a:r>
+                        <a:rPr sz="1000"/>
+                        <a:t>±0.05 mm</a:t>
+                      </a:r>
+                    </a:p>
+                  </a:txBody>
+                  <a:tcPr/>
+                </a:tc>
+                <a:tc>
+                  <a:txBody>
+                    <a:bodyPr/>
+                    <a:lstStyle/>
+                    <a:p>
+                      <a:r>
+                        <a:rPr sz="1000"/>
+                        <a:t>隔離/特採</a:t>
+                      </a:r>
+                    </a:p>
+                  </a:txBody>
+                  <a:tcPr/>
+                </a:tc>
+              </a:tr>
+              <a:tr h="685800">
+                <a:tc>
+                  <a:txBody>
+                    <a:bodyPr/>
+                    <a:lstStyle/>
+                    <a:p>
+                      <a:r>
+                        <a:rPr sz="1000"/>
+                        <a:t>電性測試</a:t>
+                      </a:r>
+                    </a:p>
+                  </a:txBody>
+                  <a:tcPr/>
+                </a:tc>
+                <a:tc>
+                  <a:txBody>
+                    <a:bodyPr/>
+                    <a:lstStyle/>
+                    <a:p>
+                      <a:r>
+                        <a:rPr sz="1000"/>
+                        <a:t>100%</a:t>
+                      </a:r>
+                    </a:p>
+                  </a:txBody>
+                  <a:tcPr/>
+                </a:tc>
+                <a:tc>
+                  <a:txBody>
+                    <a:bodyPr/>
+                    <a:lstStyle/>
+                    <a:p>
+                      <a:r>
+                        <a:rPr sz="1000"/>
+                        <a:t>全數測試</a:t>
+                      </a:r>
+                    </a:p>
+                  </a:txBody>
+                  <a:tcPr/>
+                </a:tc>
+                <a:tc>
+                  <a:txBody>
+                    <a:bodyPr/>
+                    <a:lstStyle/>
+                    <a:p>
+                      <a:r>
+                        <a:rPr sz="1000"/>
+                        <a:t>退貨/報廢</a:t>
+                      </a:r>
+                    </a:p>
+                  </a:txBody>
+                  <a:tcPr/>
+                </a:tc>
+              </a:tr>
+              <a:tr h="685800">
+                <a:tc>
+                  <a:txBody>
+                    <a:bodyPr/>
+                    <a:lstStyle/>
+                    <a:p>
+                      <a:r>
+                        <a:rPr sz="1000"/>
+                        <a:t>X-ray 檢查</a:t>
+                      </a:r>
+                    </a:p>
+                  </a:txBody>
+                  <a:tcPr/>
+                </a:tc>
+                <a:tc>
+                  <a:txBody>
+                    <a:bodyPr/>
+                    <a:lstStyle/>
+                    <a:p>
+                      <a:r>
+                        <a:rPr sz="1000"/>
+                        <a:t>10%</a:t>
+                      </a:r>
+                    </a:p>
+                  </a:txBody>
+                  <a:tcPr/>
+                </a:tc>
+                <a:tc>
+                  <a:txBody>
+                    <a:bodyPr/>
+                    <a:lstStyle/>
+                    <a:p>
+                      <a:r>
+                        <a:rPr sz="1000"/>
+                        <a:t>無空洞、裂痕</a:t>
+                      </a:r>
+                    </a:p>
+                  </a:txBody>
+                  <a:tcPr/>
+                </a:tc>
+                <a:tc>
+                  <a:txBody>
+                    <a:bodyPr/>
+                    <a:lstStyle/>
+                    <a:p>
+                      <a:r>
+                        <a:rPr sz="1000"/>
+                        <a:t>重工</a:t>
+                      </a:r>
+                    </a:p>
+                  </a:txBody>
+                  <a:tcPr/>
+                </a:tc>
+              </a:tr>
+              <a:tr h="685800">
+                <a:tc>
+                  <a:txBody>
+                    <a:bodyPr/>
+                    <a:lstStyle/>
+                    <a:p>
+                      <a:r>
+                        <a:rPr sz="1000"/>
+                        <a:t>DPA 分析</a:t>
+                      </a:r>
+                    </a:p>
+                  </a:txBody>
+                  <a:tcPr/>
+                </a:tc>
+                <a:tc>
+                  <a:txBody>
+                    <a:bodyPr/>
+                    <a:lstStyle/>
+                    <a:p>
+                      <a:r>
+                        <a:rPr sz="1000"/>
+                        <a:t>1 pcs/批</a:t>
+                      </a:r>
+                    </a:p>
+                  </a:txBody>
+                  <a:tcPr/>
+                </a:tc>
+                <a:tc>
+                  <a:txBody>
+                    <a:bodyPr/>
+                    <a:lstStyle/>
+                    <a:p>
+                      <a:r>
+                        <a:rPr sz="1000"/>
+                        <a:t>結構完整</a:t>
+                      </a:r>
+                    </a:p>
+                  </a:txBody>
+                  <a:tcPr/>
+                </a:tc>
+                <a:tc>
+                  <a:txBody>
+                    <a:bodyPr/>
+                    <a:lstStyle/>
+                    <a:p>
+                      <a:r>
+                        <a:rPr sz="1000"/>
+                        <a:t>退貨</a:t>
+                      </a:r>
+                    </a:p>
+                  </a:txBody>
+                  <a:tcPr/>
+                </a:tc>
+              </a:tr>
+            </a:tbl>
+          </a:graphicData>
+        </a:graphic>
+      </p:graphicFrame>
+      <p:sp>
+        <p:nvSpPr>
+          <p:cNvPr id="5" name="TextBox 4"/>
+          <p:cNvSpPr txBox="1"/>
+          <p:nvPr/>
+        </p:nvSpPr>
+        <p:spPr>
+          <a:xfrm>
+            <a:off x="457200" y="5577840"/>
+            <a:ext cx="8229600" cy="731520"/>
+          </a:xfrm>
+          <a:prstGeom prst="rect">
+            <a:avLst/>
+          </a:prstGeom>
+          <a:noFill/>
+        </p:spPr>
+        <p:txBody>
+          <a:bodyPr wrap="square">
+            <a:spAutoFit/>
+          </a:bodyPr>
+          <a:lstStyle/>
+          <a:p>
+            <a:pPr>
+              <a:defRPr sz="1000">
+                <a:solidFill>
+                  <a:srgbClr val="808080"/>
+                </a:solidFill>
+              </a:defRPr>
+            </a:pPr>
+            <a:r>
+              <a:t>✓ 此頁為 v3.1.1 新增的標準化對照表,提供 IQC 抽驗比例與 KM 監測頻率</a:t>
+            </a:r>
+          </a:p>
+        </p:txBody>
+      </p:sp>
+    </p:spTree>
+  </p:cSld>
+  <p:clrMapOvr>
+    <a:masterClrMapping/>
+  </p:clrMapOvr>
+</p:sld>
+</file>
+
+<file path=ppt/slides/slide13.xml><?xml version="1.0" encoding="utf-8"?>
+<p:sld xmlns:a="http://schemas.openxmlformats.org/drawingml/2006/main" xmlns:p="http://schemas.openxmlformats.org/presentationml/2006/main" xmlns:r="http://schemas.openxmlformats.org/officeDocument/2006/relationships">
+  <p:cSld>
+    <p:spTree>
+      <p:nvGrpSpPr>
+        <p:cNvPr id="1" name=""/>
+        <p:cNvGrpSpPr/>
+        <p:nvPr/>
+      </p:nvGrpSpPr>
+      <p:grpSpPr/>
+      <p:sp>
+        <p:nvSpPr>
+          <p:cNvPr id="2" name="Vertical Title 1"/>
+          <p:cNvSpPr>
+            <a:spLocks noGrp="1"/>
+          </p:cNvSpPr>
+          <p:nvPr>
+            <p:ph type="title" orient="vert"/>
+          </p:nvPr>
+        </p:nvSpPr>
+        <p:spPr/>
+        <p:txBody>
+          <a:bodyPr/>
+          <a:lstStyle/>
+          <a:p>
+            <a:r>
+              <a:t>監測與知識管理 (KM)</a:t>
+            </a:r>
+          </a:p>
+        </p:txBody>
+      </p:sp>
+      <p:sp>
+        <p:nvSpPr>
+          <p:cNvPr id="3" name="Vertical Text Placeholder 2"/>
+          <p:cNvSpPr>
+            <a:spLocks noGrp="1"/>
+          </p:cNvSpPr>
+          <p:nvPr>
+            <p:ph type="body" idx="1" orient="vert"/>
+          </p:nvPr>
+        </p:nvSpPr>
+        <p:spPr/>
+        <p:txBody>
+          <a:bodyPr/>
+          <a:lstStyle/>
+          <a:p/>
+        </p:txBody>
+      </p:sp>
+      <p:graphicFrame>
+        <p:nvGraphicFramePr>
+          <p:cNvPr id="4" name="Table 3"/>
+          <p:cNvGraphicFramePr>
+            <a:graphicFrameLocks noGrp="1"/>
+          </p:cNvGraphicFramePr>
+          <p:nvPr/>
+        </p:nvGraphicFramePr>
+        <p:xfrm>
+          <a:off x="457200" y="1280160"/>
+          <a:ext cx="8229600" cy="4114800"/>
+        </p:xfrm>
+        <a:graphic>
+          <a:graphicData uri="http://schemas.openxmlformats.org/drawingml/2006/table">
+            <a:tbl>
+              <a:tblPr firstRow="1" bandRow="1">
+                <a:tableStyleId>{5C22544A-7EE6-4342-B048-85BDC9FD1C3A}</a:tableStyleId>
+              </a:tblPr>
+              <a:tblGrid>
+                <a:gridCol w="2057400"/>
+                <a:gridCol w="2057400"/>
+                <a:gridCol w="2057400"/>
+                <a:gridCol w="2057400"/>
+              </a:tblGrid>
+              <a:tr h="685800">
+                <a:tc>
+                  <a:txBody>
+                    <a:bodyPr/>
+                    <a:lstStyle/>
+                    <a:p>
+                      <a:r>
+                        <a:rPr b="1" sz="1100">
+                          <a:solidFill>
+                            <a:srgbClr val="FFFFFF"/>
+                          </a:solidFill>
+                        </a:rPr>
+                        <a:t>項目</a:t>
+                      </a:r>
+                    </a:p>
+                  </a:txBody>
+                  <a:tcPr>
+                    <a:solidFill>
+                      <a:srgbClr val="1F4E79"/>
+                    </a:solidFill>
+                  </a:tcPr>
+                </a:tc>
+                <a:tc>
+                  <a:txBody>
+                    <a:bodyPr/>
+                    <a:lstStyle/>
+                    <a:p>
+                      <a:r>
+                        <a:rPr b="1" sz="1100">
+                          <a:solidFill>
+                            <a:srgbClr val="FFFFFF"/>
+                          </a:solidFill>
+                        </a:rPr>
+                        <a:t>頻率</a:t>
+                      </a:r>
+                    </a:p>
+                  </a:txBody>
+                  <a:tcPr>
+                    <a:solidFill>
+                      <a:srgbClr val="1F4E79"/>
+                    </a:solidFill>
+                  </a:tcPr>
+                </a:tc>
+                <a:tc>
+                  <a:txBody>
+                    <a:bodyPr/>
+                    <a:lstStyle/>
+                    <a:p>
+                      <a:r>
+                        <a:rPr b="1" sz="1100">
+                          <a:solidFill>
+                            <a:srgbClr val="FFFFFF"/>
+                          </a:solidFill>
+                        </a:rPr>
+                        <a:t>負責單位</a:t>
+                      </a:r>
+                    </a:p>
+                  </a:txBody>
+                  <a:tcPr>
+                    <a:solidFill>
+                      <a:srgbClr val="1F4E79"/>
+                    </a:solidFill>
+                  </a:tcPr>
+                </a:tc>
+                <a:tc>
+                  <a:txBody>
+                    <a:bodyPr/>
+                    <a:lstStyle/>
+                    <a:p>
+                      <a:r>
+                        <a:rPr b="1" sz="1100">
+                          <a:solidFill>
+                            <a:srgbClr val="FFFFFF"/>
+                          </a:solidFill>
+                        </a:rPr>
+                        <a:t>產出文件</a:t>
+                      </a:r>
+                    </a:p>
+                  </a:txBody>
+                  <a:tcPr>
+                    <a:solidFill>
+                      <a:srgbClr val="1F4E79"/>
+                    </a:solidFill>
+                  </a:tcPr>
+                </a:tc>
+              </a:tr>
+              <a:tr h="685800">
+                <a:tc>
+                  <a:txBody>
+                    <a:bodyPr/>
+                    <a:lstStyle/>
+                    <a:p>
+                      <a:r>
+                        <a:rPr sz="1000"/>
+                        <a:t>KMS 登錄</a:t>
+                      </a:r>
+                    </a:p>
+                  </a:txBody>
+                  <a:tcPr/>
+                </a:tc>
+                <a:tc>
+                  <a:txBody>
+                    <a:bodyPr/>
+                    <a:lstStyle/>
+                    <a:p>
+                      <a:r>
+                        <a:rPr sz="1000"/>
+                        <a:t>每案結案</a:t>
+                      </a:r>
+                    </a:p>
+                  </a:txBody>
+                  <a:tcPr/>
+                </a:tc>
+                <a:tc>
+                  <a:txBody>
+                    <a:bodyPr/>
+                    <a:lstStyle/>
+                    <a:p>
+                      <a:r>
+                        <a:rPr sz="1000"/>
+                        <a:t>FAE</a:t>
+                      </a:r>
+                    </a:p>
+                  </a:txBody>
+                  <a:tcPr/>
+                </a:tc>
+                <a:tc>
+                  <a:txBody>
+                    <a:bodyPr/>
+                    <a:lstStyle/>
+                    <a:p>
+                      <a:r>
+                        <a:rPr sz="1000"/>
+                        <a:t>KM 文件編號</a:t>
+                      </a:r>
+                    </a:p>
+                  </a:txBody>
+                  <a:tcPr/>
+                </a:tc>
+              </a:tr>
+              <a:tr h="685800">
+                <a:tc>
+                  <a:txBody>
+                    <a:bodyPr/>
+                    <a:lstStyle/>
+                    <a:p>
+                      <a:r>
+                        <a:rPr sz="1000"/>
+                        <a:t>失效資料庫更新</a:t>
+                      </a:r>
+                    </a:p>
+                  </a:txBody>
+                  <a:tcPr/>
+                </a:tc>
+                <a:tc>
+                  <a:txBody>
+                    <a:bodyPr/>
+                    <a:lstStyle/>
+                    <a:p>
+                      <a:r>
+                        <a:rPr sz="1000"/>
+                        <a:t>每月</a:t>
+                      </a:r>
+                    </a:p>
+                  </a:txBody>
+                  <a:tcPr/>
+                </a:tc>
+                <a:tc>
+                  <a:txBody>
+                    <a:bodyPr/>
+                    <a:lstStyle/>
+                    <a:p>
+                      <a:r>
+                        <a:rPr sz="1000"/>
+                        <a:t>QRA</a:t>
+                      </a:r>
+                    </a:p>
+                  </a:txBody>
+                  <a:tcPr/>
+                </a:tc>
+                <a:tc>
+                  <a:txBody>
+                    <a:bodyPr/>
+                    <a:lstStyle/>
+                    <a:p>
+                      <a:r>
+                        <a:rPr sz="1000"/>
+                        <a:t>失效資料庫月報</a:t>
+                      </a:r>
+                    </a:p>
+                  </a:txBody>
+                  <a:tcPr/>
+                </a:tc>
+              </a:tr>
+              <a:tr h="685800">
+                <a:tc>
+                  <a:txBody>
+                    <a:bodyPr/>
+                    <a:lstStyle/>
+                    <a:p>
+                      <a:r>
+                        <a:rPr sz="1000"/>
+                        <a:t>跨部門分享會議</a:t>
+                      </a:r>
+                    </a:p>
+                  </a:txBody>
+                  <a:tcPr/>
+                </a:tc>
+                <a:tc>
+                  <a:txBody>
+                    <a:bodyPr/>
+                    <a:lstStyle/>
+                    <a:p>
+                      <a:r>
+                        <a:rPr sz="1000"/>
+                        <a:t>每季</a:t>
+                      </a:r>
+                    </a:p>
+                  </a:txBody>
+                  <a:tcPr/>
+                </a:tc>
+                <a:tc>
+                  <a:txBody>
+                    <a:bodyPr/>
+                    <a:lstStyle/>
+                    <a:p>
+                      <a:r>
+                        <a:rPr sz="1000"/>
+                        <a:t>PM</a:t>
+                      </a:r>
+                    </a:p>
+                  </a:txBody>
+                  <a:tcPr/>
+                </a:tc>
+                <a:tc>
+                  <a:txBody>
+                    <a:bodyPr/>
+                    <a:lstStyle/>
+                    <a:p>
+                      <a:r>
+                        <a:rPr sz="1000"/>
+                        <a:t>會議紀錄</a:t>
+                      </a:r>
+                    </a:p>
+                  </a:txBody>
+                  <a:tcPr/>
+                </a:tc>
+              </a:tr>
+              <a:tr h="685800">
+                <a:tc>
+                  <a:txBody>
+                    <a:bodyPr/>
+                    <a:lstStyle/>
+                    <a:p>
+                      <a:r>
+                        <a:rPr sz="1000"/>
+                        <a:t>同類型失效再發監測</a:t>
+                      </a:r>
+                    </a:p>
+                  </a:txBody>
+                  <a:tcPr/>
+                </a:tc>
+                <a:tc>
+                  <a:txBody>
+                    <a:bodyPr/>
+                    <a:lstStyle/>
+                    <a:p>
+                      <a:r>
+                        <a:rPr sz="1000"/>
+                        <a:t>每月</a:t>
+                      </a:r>
+                    </a:p>
+                  </a:txBody>
+                  <a:tcPr/>
+                </a:tc>
+                <a:tc>
+                  <a:txBody>
+                    <a:bodyPr/>
+                    <a:lstStyle/>
+                    <a:p>
+                      <a:r>
+                        <a:rPr sz="1000"/>
+                        <a:t>QRA</a:t>
+                      </a:r>
+                    </a:p>
+                  </a:txBody>
+                  <a:tcPr/>
+                </a:tc>
+                <a:tc>
+                  <a:txBody>
+                    <a:bodyPr/>
+                    <a:lstStyle/>
+                    <a:p>
+                      <a:r>
+                        <a:rPr sz="1000"/>
+                        <a:t>失效趨勢分析</a:t>
+                      </a:r>
+                    </a:p>
+                  </a:txBody>
+                  <a:tcPr/>
+                </a:tc>
+              </a:tr>
+              <a:tr h="685800">
+                <a:tc>
+                  <a:txBody>
+                    <a:bodyPr/>
+                    <a:lstStyle/>
+                    <a:p>
+                      <a:r>
+                        <a:rPr sz="1000"/>
+                        <a:t>SOP 改版提案</a:t>
+                      </a:r>
+                    </a:p>
+                  </a:txBody>
+                  <a:tcPr/>
+                </a:tc>
+                <a:tc>
+                  <a:txBody>
+                    <a:bodyPr/>
+                    <a:lstStyle/>
+                    <a:p>
+                      <a:r>
+                        <a:rPr sz="1000"/>
+                        <a:t>每半年</a:t>
+                      </a:r>
+                    </a:p>
+                  </a:txBody>
+                  <a:tcPr/>
+                </a:tc>
+                <a:tc>
+                  <a:txBody>
+                    <a:bodyPr/>
+                    <a:lstStyle/>
+                    <a:p>
+                      <a:r>
+                        <a:rPr sz="1000"/>
+                        <a:t>製程工程師</a:t>
+                      </a:r>
+                    </a:p>
+                  </a:txBody>
+                  <a:tcPr/>
+                </a:tc>
+                <a:tc>
+                  <a:txBody>
+                    <a:bodyPr/>
+                    <a:lstStyle/>
+                    <a:p>
+                      <a:r>
+                        <a:rPr sz="1000"/>
+                        <a:t>SOP 改版單</a:t>
+                      </a:r>
+                    </a:p>
+                  </a:txBody>
+                  <a:tcPr/>
+                </a:tc>
+              </a:tr>
+            </a:tbl>
+          </a:graphicData>
+        </a:graphic>
+      </p:graphicFrame>
+      <p:sp>
+        <p:nvSpPr>
+          <p:cNvPr id="5" name="TextBox 4"/>
+          <p:cNvSpPr txBox="1"/>
+          <p:nvPr/>
+        </p:nvSpPr>
+        <p:spPr>
+          <a:xfrm>
+            <a:off x="457200" y="5577840"/>
+            <a:ext cx="8229600" cy="731520"/>
+          </a:xfrm>
+          <a:prstGeom prst="rect">
+            <a:avLst/>
+          </a:prstGeom>
+          <a:noFill/>
+        </p:spPr>
+        <p:txBody>
+          <a:bodyPr wrap="square">
+            <a:spAutoFit/>
+          </a:bodyPr>
+          <a:lstStyle/>
+          <a:p>
+            <a:pPr>
+              <a:defRPr sz="1000">
+                <a:solidFill>
+                  <a:srgbClr val="808080"/>
+                </a:solidFill>
+              </a:defRPr>
+            </a:pPr>
+            <a:r>
+              <a:t>✓ 此頁為 v3.1.1 新增的標準化對照表,提供 IQC 抽驗比例與 KM 監測頻率</a:t>
+            </a:r>
+          </a:p>
+        </p:txBody>
+      </p:sp>
+      <p:sp>
+        <p:nvSpPr>
+          <p:cNvPr id="6" name="TextBox 5"/>
+          <p:cNvSpPr txBox="1"/>
+          <p:nvPr/>
+        </p:nvSpPr>
+        <p:spPr>
+          <a:xfrm>
+            <a:off x="914400" y="4754880"/>
+            <a:ext cx="1371600" cy="259080"/>
+          </a:xfrm>
+          <a:prstGeom prst="rect">
+            <a:avLst/>
+          </a:prstGeom>
+          <a:noFill/>
+        </p:spPr>
+        <p:txBody>
+          <a:bodyPr wrap="square" anchor="ctr">
+            <a:spAutoFit/>
+          </a:bodyPr>
+          <a:lstStyle/>
+          <a:p>
+            <a:r>
+              <a:rPr sz="1000" b="1"/>
+              <a:t>基本資訊完整性</a:t>
+            </a:r>
+          </a:p>
+        </p:txBody>
+      </p:sp>
+      <p:sp>
+        <p:nvSpPr>
+          <p:cNvPr id="7" name="Rectangle 6"/>
+          <p:cNvSpPr/>
+          <p:nvPr/>
+        </p:nvSpPr>
+        <p:spPr>
+          <a:xfrm>
+            <a:off x="2286000" y="4800600"/>
+            <a:ext cx="6400800" cy="167640"/>
+          </a:xfrm>
+          <a:prstGeom prst="rect">
+            <a:avLst/>
+          </a:prstGeom>
+          <a:solidFill>
+            <a:srgbClr val="D9D9D9"/>
+          </a:solidFill>
+          <a:ln>
+            <a:noFill/>
+          </a:ln>
+        </p:spPr>
+        <p:style>
+          <a:lnRef idx="1">
+            <a:schemeClr val="accent1"/>
+          </a:lnRef>
+          <a:fillRef idx="3">
+            <a:schemeClr val="accent1"/>
+          </a:fillRef>
+          <a:effectRef idx="2">
+            <a:schemeClr val="accent1"/>
+          </a:effectRef>
+          <a:fontRef idx="minor">
+            <a:schemeClr val="lt1"/>
+          </a:fontRef>
+        </p:style>
+        <p:txBody>
+          <a:bodyPr rtlCol="0" anchor="ctr"/>
+          <a:lstStyle/>
+          <a:p>
+            <a:pPr algn="ctr"/>
+          </a:p>
+        </p:txBody>
+      </p:sp>
+      <p:sp>
+        <p:nvSpPr>
+          <p:cNvPr id="8" name="Rectangle 7"/>
+          <p:cNvSpPr/>
+          <p:nvPr/>
+        </p:nvSpPr>
+        <p:spPr>
+          <a:xfrm>
+            <a:off x="2286000" y="4800600"/>
+            <a:ext cx="4480560" cy="167640"/>
+          </a:xfrm>
+          <a:prstGeom prst="rect">
+            <a:avLst/>
+          </a:prstGeom>
+          <a:solidFill>
+            <a:srgbClr val="1F4E79"/>
+          </a:solidFill>
+          <a:ln>
+            <a:noFill/>
+          </a:ln>
+        </p:spPr>
+        <p:style>
+          <a:lnRef idx="1">
+            <a:schemeClr val="accent1"/>
+          </a:lnRef>
+          <a:fillRef idx="3">
+            <a:schemeClr val="accent1"/>
+          </a:fillRef>
+          <a:effectRef idx="2">
+            <a:schemeClr val="accent1"/>
+          </a:effectRef>
+          <a:fontRef idx="minor">
+            <a:schemeClr val="lt1"/>
+          </a:fontRef>
+        </p:style>
+        <p:txBody>
+          <a:bodyPr rtlCol="0" anchor="ctr"/>
+          <a:lstStyle/>
+          <a:p>
+            <a:pPr algn="ctr"/>
+          </a:p>
+        </p:txBody>
+      </p:sp>
+      <p:sp>
+        <p:nvSpPr>
+          <p:cNvPr id="9" name="TextBox 8"/>
+          <p:cNvSpPr txBox="1"/>
+          <p:nvPr/>
+        </p:nvSpPr>
+        <p:spPr>
+          <a:xfrm>
+            <a:off x="8732520" y="4754880"/>
+            <a:ext cx="411480" cy="259080"/>
+          </a:xfrm>
+          <a:prstGeom prst="rect">
+            <a:avLst/>
+          </a:prstGeom>
+          <a:noFill/>
+        </p:spPr>
+        <p:txBody>
+          <a:bodyPr wrap="none" anchor="ctr">
+            <a:spAutoFit/>
+          </a:bodyPr>
+          <a:lstStyle/>
+          <a:p>
+            <a:r>
+              <a:rPr sz="900" b="1">
+                <a:solidFill>
+                  <a:srgbClr val="1F4E79"/>
+                </a:solidFill>
+              </a:rPr>
+              <a:t>70/100</a:t>
+            </a:r>
+          </a:p>
+        </p:txBody>
+      </p:sp>
+      <p:sp>
+        <p:nvSpPr>
+          <p:cNvPr id="10" name="TextBox 9"/>
+          <p:cNvSpPr txBox="1"/>
+          <p:nvPr/>
+        </p:nvSpPr>
+        <p:spPr>
+          <a:xfrm>
+            <a:off x="914400" y="5013960"/>
+            <a:ext cx="1371600" cy="259080"/>
+          </a:xfrm>
+          <a:prstGeom prst="rect">
+            <a:avLst/>
+          </a:prstGeom>
+          <a:noFill/>
+        </p:spPr>
+        <p:txBody>
+          <a:bodyPr wrap="square" anchor="ctr">
+            <a:spAutoFit/>
+          </a:bodyPr>
+          <a:lstStyle/>
+          <a:p>
+            <a:r>
+              <a:rPr sz="1000" b="1"/>
+              <a:t>問題描述與定義</a:t>
+            </a:r>
+          </a:p>
+        </p:txBody>
+      </p:sp>
+      <p:sp>
+        <p:nvSpPr>
+          <p:cNvPr id="11" name="Rectangle 10"/>
+          <p:cNvSpPr/>
+          <p:nvPr/>
+        </p:nvSpPr>
+        <p:spPr>
+          <a:xfrm>
+            <a:off x="2286000" y="5059680"/>
+            <a:ext cx="6400800" cy="167640"/>
+          </a:xfrm>
+          <a:prstGeom prst="rect">
+            <a:avLst/>
+          </a:prstGeom>
+          <a:solidFill>
+            <a:srgbClr val="D9D9D9"/>
+          </a:solidFill>
+          <a:ln>
+            <a:noFill/>
+          </a:ln>
+        </p:spPr>
+        <p:style>
+          <a:lnRef idx="1">
+            <a:schemeClr val="accent1"/>
+          </a:lnRef>
+          <a:fillRef idx="3">
+            <a:schemeClr val="accent1"/>
+          </a:fillRef>
+          <a:effectRef idx="2">
+            <a:schemeClr val="accent1"/>
+          </a:effectRef>
+          <a:fontRef idx="minor">
+            <a:schemeClr val="lt1"/>
+          </a:fontRef>
+        </p:style>
+        <p:txBody>
+          <a:bodyPr rtlCol="0" anchor="ctr"/>
+          <a:lstStyle/>
+          <a:p>
+            <a:pPr algn="ctr"/>
+          </a:p>
+        </p:txBody>
+      </p:sp>
+      <p:sp>
+        <p:nvSpPr>
+          <p:cNvPr id="12" name="Rectangle 11"/>
+          <p:cNvSpPr/>
+          <p:nvPr/>
+        </p:nvSpPr>
+        <p:spPr>
+          <a:xfrm>
+            <a:off x="2286000" y="5059680"/>
+            <a:ext cx="4800600" cy="167640"/>
+          </a:xfrm>
+          <a:prstGeom prst="rect">
+            <a:avLst/>
+          </a:prstGeom>
+          <a:solidFill>
+            <a:srgbClr val="1F4E79"/>
+          </a:solidFill>
+          <a:ln>
+            <a:noFill/>
+          </a:ln>
+        </p:spPr>
+        <p:style>
+          <a:lnRef idx="1">
+            <a:schemeClr val="accent1"/>
+          </a:lnRef>
+          <a:fillRef idx="3">
+            <a:schemeClr val="accent1"/>
+          </a:fillRef>
+          <a:effectRef idx="2">
+            <a:schemeClr val="accent1"/>
+          </a:effectRef>
+          <a:fontRef idx="minor">
+            <a:schemeClr val="lt1"/>
+          </a:fontRef>
+        </p:style>
+        <p:txBody>
+          <a:bodyPr rtlCol="0" anchor="ctr"/>
+          <a:lstStyle/>
+          <a:p>
+            <a:pPr algn="ctr"/>
+          </a:p>
+        </p:txBody>
+      </p:sp>
+      <p:sp>
+        <p:nvSpPr>
+          <p:cNvPr id="13" name="TextBox 12"/>
+          <p:cNvSpPr txBox="1"/>
+          <p:nvPr/>
+        </p:nvSpPr>
+        <p:spPr>
+          <a:xfrm>
+            <a:off x="8732520" y="5013960"/>
+            <a:ext cx="411480" cy="259080"/>
+          </a:xfrm>
+          <a:prstGeom prst="rect">
+            <a:avLst/>
+          </a:prstGeom>
+          <a:noFill/>
+        </p:spPr>
+        <p:txBody>
+          <a:bodyPr wrap="none" anchor="ctr">
+            <a:spAutoFit/>
+          </a:bodyPr>
+          <a:lstStyle/>
+          <a:p>
+            <a:r>
+              <a:rPr sz="900" b="1">
+                <a:solidFill>
+                  <a:srgbClr val="1F4E79"/>
+                </a:solidFill>
+              </a:rPr>
+              <a:t>75/100</a:t>
+            </a:r>
+          </a:p>
+        </p:txBody>
+      </p:sp>
+      <p:sp>
+        <p:nvSpPr>
+          <p:cNvPr id="14" name="TextBox 13"/>
+          <p:cNvSpPr txBox="1"/>
+          <p:nvPr/>
+        </p:nvSpPr>
+        <p:spPr>
+          <a:xfrm>
+            <a:off x="914400" y="5273040"/>
+            <a:ext cx="1371600" cy="259080"/>
+          </a:xfrm>
+          <a:prstGeom prst="rect">
+            <a:avLst/>
+          </a:prstGeom>
+          <a:noFill/>
+        </p:spPr>
+        <p:txBody>
+          <a:bodyPr wrap="square" anchor="ctr">
+            <a:spAutoFit/>
+          </a:bodyPr>
+          <a:lstStyle/>
+          <a:p>
+            <a:r>
+              <a:rPr sz="1000" b="1"/>
+              <a:t>分析方法與流程</a:t>
+            </a:r>
+          </a:p>
+        </p:txBody>
+      </p:sp>
+      <p:sp>
+        <p:nvSpPr>
+          <p:cNvPr id="15" name="Rectangle 14"/>
+          <p:cNvSpPr/>
+          <p:nvPr/>
+        </p:nvSpPr>
+        <p:spPr>
+          <a:xfrm>
+            <a:off x="2286000" y="5318760"/>
+            <a:ext cx="6400800" cy="167640"/>
+          </a:xfrm>
+          <a:prstGeom prst="rect">
+            <a:avLst/>
+          </a:prstGeom>
+          <a:solidFill>
+            <a:srgbClr val="D9D9D9"/>
+          </a:solidFill>
+          <a:ln>
+            <a:noFill/>
+          </a:ln>
+        </p:spPr>
+        <p:style>
+          <a:lnRef idx="1">
+            <a:schemeClr val="accent1"/>
+          </a:lnRef>
+          <a:fillRef idx="3">
+            <a:schemeClr val="accent1"/>
+          </a:fillRef>
+          <a:effectRef idx="2">
+            <a:schemeClr val="accent1"/>
+          </a:effectRef>
+          <a:fontRef idx="minor">
+            <a:schemeClr val="lt1"/>
+          </a:fontRef>
+        </p:style>
+        <p:txBody>
+          <a:bodyPr rtlCol="0" anchor="ctr"/>
+          <a:lstStyle/>
+          <a:p>
+            <a:pPr algn="ctr"/>
+          </a:p>
+        </p:txBody>
+      </p:sp>
+      <p:sp>
+        <p:nvSpPr>
+          <p:cNvPr id="16" name="Rectangle 15"/>
+          <p:cNvSpPr/>
+          <p:nvPr/>
+        </p:nvSpPr>
+        <p:spPr>
+          <a:xfrm>
+            <a:off x="2286000" y="5318760"/>
+            <a:ext cx="4160520" cy="167640"/>
+          </a:xfrm>
+          <a:prstGeom prst="rect">
+            <a:avLst/>
+          </a:prstGeom>
+          <a:solidFill>
+            <a:srgbClr val="ED7D31"/>
+          </a:solidFill>
+          <a:ln>
+            <a:noFill/>
+          </a:ln>
+        </p:spPr>
+        <p:style>
+          <a:lnRef idx="1">
+            <a:schemeClr val="accent1"/>
+          </a:lnRef>
+          <a:fillRef idx="3">
+            <a:schemeClr val="accent1"/>
+          </a:fillRef>
+          <a:effectRef idx="2">
+            <a:schemeClr val="accent1"/>
+          </a:effectRef>
+          <a:fontRef idx="minor">
+            <a:schemeClr val="lt1"/>
+          </a:fontRef>
+        </p:style>
+        <p:txBody>
+          <a:bodyPr rtlCol="0" anchor="ctr"/>
+          <a:lstStyle/>
+          <a:p>
+            <a:pPr algn="ctr"/>
+          </a:p>
+        </p:txBody>
+      </p:sp>
+      <p:sp>
+        <p:nvSpPr>
+          <p:cNvPr id="17" name="TextBox 16"/>
+          <p:cNvSpPr txBox="1"/>
+          <p:nvPr/>
+        </p:nvSpPr>
+        <p:spPr>
+          <a:xfrm>
+            <a:off x="8732520" y="5273040"/>
+            <a:ext cx="411480" cy="259080"/>
+          </a:xfrm>
+          <a:prstGeom prst="rect">
+            <a:avLst/>
+          </a:prstGeom>
+          <a:noFill/>
+        </p:spPr>
+        <p:txBody>
+          <a:bodyPr wrap="none" anchor="ctr">
+            <a:spAutoFit/>
+          </a:bodyPr>
+          <a:lstStyle/>
+          <a:p>
+            <a:r>
+              <a:rPr sz="900" b="1">
+                <a:solidFill>
+                  <a:srgbClr val="ED7D31"/>
+                </a:solidFill>
+              </a:rPr>
+              <a:t>65/100</a:t>
+            </a:r>
+          </a:p>
+        </p:txBody>
+      </p:sp>
+      <p:sp>
+        <p:nvSpPr>
+          <p:cNvPr id="18" name="TextBox 17"/>
+          <p:cNvSpPr txBox="1"/>
+          <p:nvPr/>
+        </p:nvSpPr>
+        <p:spPr>
+          <a:xfrm>
+            <a:off x="914400" y="5532120"/>
+            <a:ext cx="1371600" cy="259080"/>
+          </a:xfrm>
+          <a:prstGeom prst="rect">
+            <a:avLst/>
+          </a:prstGeom>
+          <a:noFill/>
+        </p:spPr>
+        <p:txBody>
+          <a:bodyPr wrap="square" anchor="ctr">
+            <a:spAutoFit/>
+          </a:bodyPr>
+          <a:lstStyle/>
+          <a:p>
+            <a:r>
+              <a:rPr sz="1000" b="1"/>
+              <a:t>數據與證據支持</a:t>
+            </a:r>
+          </a:p>
+        </p:txBody>
+      </p:sp>
+      <p:sp>
+        <p:nvSpPr>
+          <p:cNvPr id="19" name="Rectangle 18"/>
+          <p:cNvSpPr/>
+          <p:nvPr/>
+        </p:nvSpPr>
+        <p:spPr>
+          <a:xfrm>
+            <a:off x="2286000" y="5577840"/>
+            <a:ext cx="6400800" cy="167640"/>
+          </a:xfrm>
+          <a:prstGeom prst="rect">
+            <a:avLst/>
+          </a:prstGeom>
+          <a:solidFill>
+            <a:srgbClr val="D9D9D9"/>
+          </a:solidFill>
+          <a:ln>
+            <a:noFill/>
+          </a:ln>
+        </p:spPr>
+        <p:style>
+          <a:lnRef idx="1">
+            <a:schemeClr val="accent1"/>
+          </a:lnRef>
+          <a:fillRef idx="3">
+            <a:schemeClr val="accent1"/>
+          </a:fillRef>
+          <a:effectRef idx="2">
+            <a:schemeClr val="accent1"/>
+          </a:effectRef>
+          <a:fontRef idx="minor">
+            <a:schemeClr val="lt1"/>
+          </a:fontRef>
+        </p:style>
+        <p:txBody>
+          <a:bodyPr rtlCol="0" anchor="ctr"/>
+          <a:lstStyle/>
+          <a:p>
+            <a:pPr algn="ctr"/>
+          </a:p>
+        </p:txBody>
+      </p:sp>
+      <p:sp>
+        <p:nvSpPr>
+          <p:cNvPr id="20" name="Rectangle 19"/>
+          <p:cNvSpPr/>
+          <p:nvPr/>
+        </p:nvSpPr>
+        <p:spPr>
+          <a:xfrm>
+            <a:off x="2286000" y="5577840"/>
+            <a:ext cx="3840480" cy="167640"/>
+          </a:xfrm>
+          <a:prstGeom prst="rect">
+            <a:avLst/>
+          </a:prstGeom>
+          <a:solidFill>
+            <a:srgbClr val="ED7D31"/>
+          </a:solidFill>
+          <a:ln>
+            <a:noFill/>
+          </a:ln>
+        </p:spPr>
+        <p:style>
+          <a:lnRef idx="1">
+            <a:schemeClr val="accent1"/>
+          </a:lnRef>
+          <a:fillRef idx="3">
+            <a:schemeClr val="accent1"/>
+          </a:fillRef>
+          <a:effectRef idx="2">
+            <a:schemeClr val="accent1"/>
+          </a:effectRef>
+          <a:fontRef idx="minor">
+            <a:schemeClr val="lt1"/>
+          </a:fontRef>
+        </p:style>
+        <p:txBody>
+          <a:bodyPr rtlCol="0" anchor="ctr"/>
+          <a:lstStyle/>
+          <a:p>
+            <a:pPr algn="ctr"/>
+          </a:p>
+        </p:txBody>
+      </p:sp>
+      <p:sp>
+        <p:nvSpPr>
+          <p:cNvPr id="21" name="TextBox 20"/>
+          <p:cNvSpPr txBox="1"/>
+          <p:nvPr/>
+        </p:nvSpPr>
+        <p:spPr>
+          <a:xfrm>
+            <a:off x="8732520" y="5532120"/>
+            <a:ext cx="411480" cy="259080"/>
+          </a:xfrm>
+          <a:prstGeom prst="rect">
+            <a:avLst/>
+          </a:prstGeom>
+          <a:noFill/>
+        </p:spPr>
+        <p:txBody>
+          <a:bodyPr wrap="none" anchor="ctr">
+            <a:spAutoFit/>
+          </a:bodyPr>
+          <a:lstStyle/>
+          <a:p>
+            <a:r>
+              <a:rPr sz="900" b="1">
+                <a:solidFill>
+                  <a:srgbClr val="ED7D31"/>
+                </a:solidFill>
+              </a:rPr>
+              <a:t>60/100</a:t>
+            </a:r>
+          </a:p>
+        </p:txBody>
+      </p:sp>
+      <p:sp>
+        <p:nvSpPr>
+          <p:cNvPr id="22" name="TextBox 21"/>
+          <p:cNvSpPr txBox="1"/>
+          <p:nvPr/>
+        </p:nvSpPr>
+        <p:spPr>
+          <a:xfrm>
+            <a:off x="914400" y="5791200"/>
+            <a:ext cx="1371600" cy="259080"/>
+          </a:xfrm>
+          <a:prstGeom prst="rect">
+            <a:avLst/>
+          </a:prstGeom>
+          <a:noFill/>
+        </p:spPr>
+        <p:txBody>
+          <a:bodyPr wrap="square" anchor="ctr">
+            <a:spAutoFit/>
+          </a:bodyPr>
+          <a:lstStyle/>
+          <a:p>
+            <a:r>
+              <a:rPr sz="1000" b="1"/>
+              <a:t>根因分析</a:t>
+            </a:r>
+          </a:p>
+        </p:txBody>
+      </p:sp>
+      <p:sp>
+        <p:nvSpPr>
+          <p:cNvPr id="23" name="Rectangle 22"/>
+          <p:cNvSpPr/>
+          <p:nvPr/>
+        </p:nvSpPr>
+        <p:spPr>
+          <a:xfrm>
+            <a:off x="2286000" y="5836920"/>
+            <a:ext cx="6400800" cy="167640"/>
+          </a:xfrm>
+          <a:prstGeom prst="rect">
+            <a:avLst/>
+          </a:prstGeom>
+          <a:solidFill>
+            <a:srgbClr val="D9D9D9"/>
+          </a:solidFill>
+          <a:ln>
+            <a:noFill/>
+          </a:ln>
+        </p:spPr>
+        <p:style>
+          <a:lnRef idx="1">
+            <a:schemeClr val="accent1"/>
+          </a:lnRef>
+          <a:fillRef idx="3">
+            <a:schemeClr val="accent1"/>
+          </a:fillRef>
+          <a:effectRef idx="2">
+            <a:schemeClr val="accent1"/>
+          </a:effectRef>
+          <a:fontRef idx="minor">
+            <a:schemeClr val="lt1"/>
+          </a:fontRef>
+        </p:style>
+        <p:txBody>
+          <a:bodyPr rtlCol="0" anchor="ctr"/>
+          <a:lstStyle/>
+          <a:p>
+            <a:pPr algn="ctr"/>
+          </a:p>
+        </p:txBody>
+      </p:sp>
+      <p:sp>
+        <p:nvSpPr>
+          <p:cNvPr id="24" name="Rectangle 23"/>
+          <p:cNvSpPr/>
+          <p:nvPr/>
+        </p:nvSpPr>
+        <p:spPr>
+          <a:xfrm>
+            <a:off x="2286000" y="5836920"/>
+            <a:ext cx="3200400" cy="167640"/>
+          </a:xfrm>
+          <a:prstGeom prst="rect">
+            <a:avLst/>
+          </a:prstGeom>
+          <a:solidFill>
+            <a:srgbClr val="ED7D31"/>
+          </a:solidFill>
+          <a:ln>
+            <a:noFill/>
+          </a:ln>
+        </p:spPr>
+        <p:style>
+          <a:lnRef idx="1">
+            <a:schemeClr val="accent1"/>
+          </a:lnRef>
+          <a:fillRef idx="3">
+            <a:schemeClr val="accent1"/>
+          </a:fillRef>
+          <a:effectRef idx="2">
+            <a:schemeClr val="accent1"/>
+          </a:effectRef>
+          <a:fontRef idx="minor">
+            <a:schemeClr val="lt1"/>
+          </a:fontRef>
+        </p:style>
+        <p:txBody>
+          <a:bodyPr rtlCol="0" anchor="ctr"/>
+          <a:lstStyle/>
+          <a:p>
+            <a:pPr algn="ctr"/>
+          </a:p>
+        </p:txBody>
+      </p:sp>
+      <p:sp>
+        <p:nvSpPr>
+          <p:cNvPr id="25" name="TextBox 24"/>
+          <p:cNvSpPr txBox="1"/>
+          <p:nvPr/>
+        </p:nvSpPr>
+        <p:spPr>
+          <a:xfrm>
+            <a:off x="8732520" y="5791200"/>
+            <a:ext cx="411480" cy="259080"/>
+          </a:xfrm>
+          <a:prstGeom prst="rect">
+            <a:avLst/>
+          </a:prstGeom>
+          <a:noFill/>
+        </p:spPr>
+        <p:txBody>
+          <a:bodyPr wrap="none" anchor="ctr">
+            <a:spAutoFit/>
+          </a:bodyPr>
+          <a:lstStyle/>
+          <a:p>
+            <a:r>
+              <a:rPr sz="900" b="1">
+                <a:solidFill>
+                  <a:srgbClr val="ED7D31"/>
+                </a:solidFill>
+              </a:rPr>
+              <a:t>50/100</a:t>
+            </a:r>
+          </a:p>
+        </p:txBody>
+      </p:sp>
+      <p:sp>
+        <p:nvSpPr>
+          <p:cNvPr id="26" name="TextBox 25"/>
+          <p:cNvSpPr txBox="1"/>
+          <p:nvPr/>
+        </p:nvSpPr>
+        <p:spPr>
+          <a:xfrm>
+            <a:off x="914400" y="6050280"/>
+            <a:ext cx="1371600" cy="259080"/>
+          </a:xfrm>
+          <a:prstGeom prst="rect">
+            <a:avLst/>
+          </a:prstGeom>
+          <a:noFill/>
+        </p:spPr>
+        <p:txBody>
+          <a:bodyPr wrap="square" anchor="ctr">
+            <a:spAutoFit/>
+          </a:bodyPr>
+          <a:lstStyle/>
+          <a:p>
+            <a:r>
+              <a:rPr sz="1000" b="1"/>
+              <a:t>改善對策</a:t>
+            </a:r>
+          </a:p>
+        </p:txBody>
+      </p:sp>
+      <p:sp>
+        <p:nvSpPr>
+          <p:cNvPr id="27" name="Rectangle 26"/>
+          <p:cNvSpPr/>
+          <p:nvPr/>
+        </p:nvSpPr>
+        <p:spPr>
+          <a:xfrm>
+            <a:off x="2286000" y="6096000"/>
+            <a:ext cx="6400800" cy="167640"/>
+          </a:xfrm>
+          <a:prstGeom prst="rect">
+            <a:avLst/>
+          </a:prstGeom>
+          <a:solidFill>
+            <a:srgbClr val="D9D9D9"/>
+          </a:solidFill>
+          <a:ln>
+            <a:noFill/>
+          </a:ln>
+        </p:spPr>
+        <p:style>
+          <a:lnRef idx="1">
+            <a:schemeClr val="accent1"/>
+          </a:lnRef>
+          <a:fillRef idx="3">
+            <a:schemeClr val="accent1"/>
+          </a:fillRef>
+          <a:effectRef idx="2">
+            <a:schemeClr val="accent1"/>
+          </a:effectRef>
+          <a:fontRef idx="minor">
+            <a:schemeClr val="lt1"/>
+          </a:fontRef>
+        </p:style>
+        <p:txBody>
+          <a:bodyPr rtlCol="0" anchor="ctr"/>
+          <a:lstStyle/>
+          <a:p>
+            <a:pPr algn="ctr"/>
+          </a:p>
+        </p:txBody>
+      </p:sp>
+      <p:sp>
+        <p:nvSpPr>
+          <p:cNvPr id="28" name="Rectangle 27"/>
+          <p:cNvSpPr/>
+          <p:nvPr/>
+        </p:nvSpPr>
+        <p:spPr>
+          <a:xfrm>
+            <a:off x="2286000" y="6096000"/>
+            <a:ext cx="4480560" cy="167640"/>
+          </a:xfrm>
+          <a:prstGeom prst="rect">
+            <a:avLst/>
+          </a:prstGeom>
+          <a:solidFill>
+            <a:srgbClr val="1F4E79"/>
+          </a:solidFill>
+          <a:ln>
+            <a:noFill/>
+          </a:ln>
+        </p:spPr>
+        <p:style>
+          <a:lnRef idx="1">
+            <a:schemeClr val="accent1"/>
+          </a:lnRef>
+          <a:fillRef idx="3">
+            <a:schemeClr val="accent1"/>
+          </a:fillRef>
+          <a:effectRef idx="2">
+            <a:schemeClr val="accent1"/>
+          </a:effectRef>
+          <a:fontRef idx="minor">
+            <a:schemeClr val="lt1"/>
+          </a:fontRef>
+        </p:style>
+        <p:txBody>
+          <a:bodyPr rtlCol="0" anchor="ctr"/>
+          <a:lstStyle/>
+          <a:p>
+            <a:pPr algn="ctr"/>
+          </a:p>
+        </p:txBody>
+      </p:sp>
+      <p:sp>
+        <p:nvSpPr>
+          <p:cNvPr id="29" name="TextBox 28"/>
+          <p:cNvSpPr txBox="1"/>
+          <p:nvPr/>
+        </p:nvSpPr>
+        <p:spPr>
+          <a:xfrm>
+            <a:off x="8732520" y="6050280"/>
+            <a:ext cx="411480" cy="259080"/>
+          </a:xfrm>
+          <a:prstGeom prst="rect">
+            <a:avLst/>
+          </a:prstGeom>
+          <a:noFill/>
+        </p:spPr>
+        <p:txBody>
+          <a:bodyPr wrap="none" anchor="ctr">
+            <a:spAutoFit/>
+          </a:bodyPr>
+          <a:lstStyle/>
+          <a:p>
+            <a:r>
+              <a:rPr sz="900" b="1">
+                <a:solidFill>
+                  <a:srgbClr val="1F4E79"/>
+                </a:solidFill>
+              </a:rPr>
+              <a:t>70/100</a:t>
+            </a:r>
+          </a:p>
+        </p:txBody>
+      </p:sp>
+      <p:sp>
+        <p:nvSpPr>
+          <p:cNvPr id="30" name="TextBox 29"/>
+          <p:cNvSpPr txBox="1"/>
+          <p:nvPr/>
+        </p:nvSpPr>
+        <p:spPr>
+          <a:xfrm>
+            <a:off x="4983480" y="2743200"/>
+            <a:ext cx="3703320" cy="1371600"/>
+          </a:xfrm>
+          <a:prstGeom prst="rect">
+            <a:avLst/>
+          </a:prstGeom>
+          <a:noFill/>
+        </p:spPr>
+        <p:txBody>
+          <a:bodyPr wrap="square">
+            <a:spAutoFit/>
+          </a:bodyPr>
+          <a:lstStyle/>
+          <a:p>
+            <a:pPr>
+              <a:defRPr b="1" sz="1400">
+                <a:solidFill>
+                  <a:srgbClr val="0070C0"/>
+                </a:solidFill>
+              </a:defRPr>
+            </a:pPr>
+            <a:r>
+              <a:t>Executive Summary</a:t>
+            </a:r>
+          </a:p>
+          <a:p>
+            <a:pPr>
+              <a:defRPr sz="1100"/>
+            </a:pPr>
+            <a:r>
+              <a:t>本報告完成了初步的失效定位(Localization)，確認故障點位於Touch IC的INT/MISO引腳，但尚未達到正式FA報告的深度。報告最大的問題在於「僅有推測，缺乏根因」以及「完全沒有對策」。目前的結論僅能說「壞在哪裡」，無法說明「為什麼壞」以及「如何不再發生」。建議補足物理分析證據，並根據根因制定完整的改善與驗證計畫。</a:t>
+            </a:r>
+          </a:p>
+        </p:txBody>
+      </p:sp>
+      <p:sp>
+        <p:nvSpPr>
+          <p:cNvPr id="31" name="TextBox 30"/>
+          <p:cNvSpPr txBox="1"/>
+          <p:nvPr/>
+        </p:nvSpPr>
+        <p:spPr>
+          <a:xfrm>
+            <a:off x="4983480" y="4206240"/>
+            <a:ext cx="3703320" cy="1828800"/>
+          </a:xfrm>
+          <a:prstGeom prst="rect">
+            <a:avLst/>
+          </a:prstGeom>
+          <a:noFill/>
+        </p:spPr>
+        <p:txBody>
+          <a:bodyPr wrap="square">
+            <a:spAutoFit/>
+          </a:bodyPr>
+          <a:lstStyle/>
+          <a:p>
+            <a:pPr>
+              <a:defRPr b="1" sz="1400">
+                <a:solidFill>
+                  <a:srgbClr val="FF0000"/>
+                </a:solidFill>
+              </a:defRPr>
+            </a:pPr>
+            <a:r>
+              <a:t>Key Improvements Required</a:t>
+            </a:r>
+          </a:p>
+          <a:p>
+            <a:pPr>
+              <a:defRPr sz="1000"/>
+            </a:pPr>
+            <a:r>
+              <a:t>• 提供了產品型號、日期與準備者，但缺乏具體的批號(Lot No.)、失效數量(Failure Quantity)以及明確的客戶名稱。</a:t>
+            </a:r>
+          </a:p>
+          <a:p>
+            <a:pPr>
+              <a:defRPr sz="1000"/>
+            </a:pPr>
+            <a:r>
+              <a:t>• 失效現象描述清楚(SPI無法通訊)，並提供了金手指對地的量測數據，但缺乏失效率(Failure Rate)的統計數據。</a:t>
+            </a:r>
+          </a:p>
+          <a:p>
+            <a:pPr>
+              <a:defRPr sz="1000"/>
+            </a:pPr>
+            <a:r>
+              <a:t>• 採用了排除法(移除TVS、移除IC)進行初步分析，邏輯尚屬合理，但缺乏更深層的物理分析(如SEM或X-ray)來確認IC內部的損傷機制。</a:t>
+            </a:r>
+          </a:p>
+        </p:txBody>
+      </p:sp>
+      <p:sp>
+        <p:nvSpPr>
+          <p:cNvPr id="32" name="TextBox 31"/>
+          <p:cNvSpPr txBox="1"/>
+          <p:nvPr/>
+        </p:nvSpPr>
+        <p:spPr>
+          <a:xfrm>
+            <a:off x="1463040" y="4206240"/>
+            <a:ext cx="3291840" cy="1828800"/>
+          </a:xfrm>
+          <a:prstGeom prst="rect">
+            <a:avLst/>
+          </a:prstGeom>
+          <a:noFill/>
+        </p:spPr>
+        <p:txBody>
+          <a:bodyPr wrap="square">
+            <a:spAutoFit/>
+          </a:bodyPr>
+          <a:lstStyle/>
+          <a:p>
+            <a:pPr>
+              <a:defRPr b="1" sz="1400">
+                <a:solidFill>
+                  <a:srgbClr val="0070C0"/>
+                </a:solidFill>
+              </a:defRPr>
+            </a:pPr>
+            <a:r>
+              <a:t>分析優點與成功驗證</a:t>
+            </a:r>
+          </a:p>
+          <a:p>
+            <a:pPr>
+              <a:defRPr sz="1000"/>
+            </a:pPr>
+            <a:r>
+              <a:t>✓ 初步排查邏輯清晰，透過移除元件成功定位故障點在於IC單體。</a:t>
+            </a:r>
+          </a:p>
+          <a:p>
+            <a:pPr>
+              <a:defRPr sz="1000"/>
+            </a:pPr>
+            <a:r>
+              <a:t>✓ 提供了初步的電性量測數據(OL, 47Ω, 58Ω)作為證據。</a:t>
+            </a:r>
+          </a:p>
+          <a:p>
+            <a:pPr>
+              <a:defRPr sz="1000"/>
+            </a:pPr>
+            <a:r>
+              <a:t>✓ 包含了電路圖與實際組件照片，有助於理解失效位置。</a:t>
+            </a:r>
           </a:p>
         </p:txBody>
       </p:sp>
@@ -10985,190 +13635,298 @@
       </p:grpSpPr>
       <p:sp>
         <p:nvSpPr>
-          <p:cNvPr id="2" name="TextBox 1"/>
-          <p:cNvSpPr txBox="1"/>
+          <p:cNvPr id="10" name="Text Box 5">
+            <a:extLst>
+              <a:ext uri="{FF2B5EF4-FFF2-40B4-BE49-F238E27FC236}">
+                <a16:creationId xmlns:a16="http://schemas.microsoft.com/office/drawing/2014/main" id="{61FA3D07-1BEF-7DA3-5430-E28CDACA5B07}"/>
+              </a:ext>
+            </a:extLst>
+          </p:cNvPr>
+          <p:cNvSpPr txBox="1">
+            <a:spLocks noChangeArrowheads="1"/>
+          </p:cNvSpPr>
           <p:nvPr/>
         </p:nvSpPr>
-        <p:spPr>
+        <p:spPr bwMode="auto">
           <a:xfrm>
-            <a:off x="1463040" y="960120"/>
-            <a:ext cx="7132320" cy="1005840"/>
+            <a:off x="0" y="981075"/>
+            <a:ext cx="9036050" cy="697115"/>
           </a:xfrm>
           <a:prstGeom prst="rect">
             <a:avLst/>
           </a:prstGeom>
           <a:noFill/>
+          <a:ln>
+            <a:noFill/>
+          </a:ln>
+          <a:effectLst/>
         </p:spPr>
         <p:txBody>
-          <a:bodyPr wrap="none">
+          <a:bodyPr lIns="90000" tIns="46800" rIns="90000" bIns="46800">
             <a:spAutoFit/>
           </a:bodyPr>
-          <a:lstStyle/>
-          <a:p>
-            <a:pPr algn="l">
-              <a:defRPr b="1" sz="2800">
+          <a:lstStyle>
+            <a:lvl1pPr marL="355600" indent="-355600" eaLnBrk="0" hangingPunct="0">
+              <a:spcBef>
+                <a:spcPct val="20000"/>
+              </a:spcBef>
+              <a:buClr>
+                <a:schemeClr val="tx2"/>
+              </a:buClr>
+              <a:buSzPct val="70000"/>
+              <a:buFont typeface="Wingdings" pitchFamily="2" charset="2"/>
+              <a:buChar char="¡"/>
+              <a:defRPr kumimoji="1" sz="2900">
                 <a:solidFill>
-                  <a:srgbClr val="0070C0"/>
+                  <a:schemeClr val="tx1"/>
                 </a:solidFill>
+                <a:latin typeface="Verdana" pitchFamily="34" charset="0"/>
+                <a:ea typeface="新細明體" pitchFamily="18" charset="-120"/>
               </a:defRPr>
+            </a:lvl1pPr>
+            <a:lvl2pPr marL="877888" indent="-342900" eaLnBrk="0" hangingPunct="0">
+              <a:spcBef>
+                <a:spcPct val="20000"/>
+              </a:spcBef>
+              <a:buClr>
+                <a:schemeClr val="accent2"/>
+              </a:buClr>
+              <a:buSzPct val="70000"/>
+              <a:buFont typeface="Wingdings" pitchFamily="2" charset="2"/>
+              <a:buChar char="l"/>
+              <a:defRPr kumimoji="1" sz="2500">
+                <a:solidFill>
+                  <a:schemeClr val="tx1"/>
+                </a:solidFill>
+                <a:latin typeface="Verdana" pitchFamily="34" charset="0"/>
+                <a:ea typeface="新細明體" pitchFamily="18" charset="-120"/>
+              </a:defRPr>
+            </a:lvl2pPr>
+            <a:lvl3pPr marL="1257300" indent="-342900" eaLnBrk="0" hangingPunct="0">
+              <a:spcBef>
+                <a:spcPct val="20000"/>
+              </a:spcBef>
+              <a:buClr>
+                <a:schemeClr val="tx2"/>
+              </a:buClr>
+              <a:buSzPct val="65000"/>
+              <a:buFont typeface="Wingdings" pitchFamily="2" charset="2"/>
+              <a:buChar char="¡"/>
+              <a:defRPr kumimoji="1" sz="2200">
+                <a:solidFill>
+                  <a:schemeClr val="tx1"/>
+                </a:solidFill>
+                <a:latin typeface="Verdana" pitchFamily="34" charset="0"/>
+                <a:ea typeface="新細明體" pitchFamily="18" charset="-120"/>
+              </a:defRPr>
+            </a:lvl3pPr>
+            <a:lvl4pPr marL="1600200" indent="-228600" eaLnBrk="0" hangingPunct="0">
+              <a:spcBef>
+                <a:spcPct val="20000"/>
+              </a:spcBef>
+              <a:buClr>
+                <a:schemeClr val="accent2"/>
+              </a:buClr>
+              <a:buSzPct val="70000"/>
+              <a:buFont typeface="Wingdings" pitchFamily="2" charset="2"/>
+              <a:buChar char="l"/>
+              <a:defRPr kumimoji="1" sz="1900">
+                <a:solidFill>
+                  <a:schemeClr val="tx1"/>
+                </a:solidFill>
+                <a:latin typeface="Verdana" pitchFamily="34" charset="0"/>
+                <a:ea typeface="新細明體" pitchFamily="18" charset="-120"/>
+              </a:defRPr>
+            </a:lvl4pPr>
+            <a:lvl5pPr marL="2057400" indent="-228600" eaLnBrk="0" hangingPunct="0">
+              <a:spcBef>
+                <a:spcPct val="20000"/>
+              </a:spcBef>
+              <a:buClr>
+                <a:schemeClr val="tx2"/>
+              </a:buClr>
+              <a:buSzPct val="60000"/>
+              <a:buFont typeface="Wingdings" pitchFamily="2" charset="2"/>
+              <a:buChar char="¡"/>
+              <a:defRPr kumimoji="1" sz="1900">
+                <a:solidFill>
+                  <a:schemeClr val="tx1"/>
+                </a:solidFill>
+                <a:latin typeface="Verdana" pitchFamily="34" charset="0"/>
+                <a:ea typeface="新細明體" pitchFamily="18" charset="-120"/>
+              </a:defRPr>
+            </a:lvl5pPr>
+            <a:lvl6pPr marL="2514600" indent="-228600" eaLnBrk="0" fontAlgn="base" hangingPunct="0">
+              <a:spcBef>
+                <a:spcPct val="20000"/>
+              </a:spcBef>
+              <a:spcAft>
+                <a:spcPct val="0"/>
+              </a:spcAft>
+              <a:buClr>
+                <a:schemeClr val="tx2"/>
+              </a:buClr>
+              <a:buSzPct val="60000"/>
+              <a:buFont typeface="Wingdings" pitchFamily="2" charset="2"/>
+              <a:buChar char="¡"/>
+              <a:defRPr kumimoji="1" sz="1900">
+                <a:solidFill>
+                  <a:schemeClr val="tx1"/>
+                </a:solidFill>
+                <a:latin typeface="Verdana" pitchFamily="34" charset="0"/>
+                <a:ea typeface="新細明體" pitchFamily="18" charset="-120"/>
+              </a:defRPr>
+            </a:lvl6pPr>
+            <a:lvl7pPr marL="2971800" indent="-228600" eaLnBrk="0" fontAlgn="base" hangingPunct="0">
+              <a:spcBef>
+                <a:spcPct val="20000"/>
+              </a:spcBef>
+              <a:spcAft>
+                <a:spcPct val="0"/>
+              </a:spcAft>
+              <a:buClr>
+                <a:schemeClr val="tx2"/>
+              </a:buClr>
+              <a:buSzPct val="60000"/>
+              <a:buFont typeface="Wingdings" pitchFamily="2" charset="2"/>
+              <a:buChar char="¡"/>
+              <a:defRPr kumimoji="1" sz="1900">
+                <a:solidFill>
+                  <a:schemeClr val="tx1"/>
+                </a:solidFill>
+                <a:latin typeface="Verdana" pitchFamily="34" charset="0"/>
+                <a:ea typeface="新細明體" pitchFamily="18" charset="-120"/>
+              </a:defRPr>
+            </a:lvl7pPr>
+            <a:lvl8pPr marL="3429000" indent="-228600" eaLnBrk="0" fontAlgn="base" hangingPunct="0">
+              <a:spcBef>
+                <a:spcPct val="20000"/>
+              </a:spcBef>
+              <a:spcAft>
+                <a:spcPct val="0"/>
+              </a:spcAft>
+              <a:buClr>
+                <a:schemeClr val="tx2"/>
+              </a:buClr>
+              <a:buSzPct val="60000"/>
+              <a:buFont typeface="Wingdings" pitchFamily="2" charset="2"/>
+              <a:buChar char="¡"/>
+              <a:defRPr kumimoji="1" sz="1900">
+                <a:solidFill>
+                  <a:schemeClr val="tx1"/>
+                </a:solidFill>
+                <a:latin typeface="Verdana" pitchFamily="34" charset="0"/>
+                <a:ea typeface="新細明體" pitchFamily="18" charset="-120"/>
+              </a:defRPr>
+            </a:lvl8pPr>
+            <a:lvl9pPr marL="3886200" indent="-228600" eaLnBrk="0" fontAlgn="base" hangingPunct="0">
+              <a:spcBef>
+                <a:spcPct val="20000"/>
+              </a:spcBef>
+              <a:spcAft>
+                <a:spcPct val="0"/>
+              </a:spcAft>
+              <a:buClr>
+                <a:schemeClr val="tx2"/>
+              </a:buClr>
+              <a:buSzPct val="60000"/>
+              <a:buFont typeface="Wingdings" pitchFamily="2" charset="2"/>
+              <a:buChar char="¡"/>
+              <a:defRPr kumimoji="1" sz="1900">
+                <a:solidFill>
+                  <a:schemeClr val="tx1"/>
+                </a:solidFill>
+                <a:latin typeface="Verdana" pitchFamily="34" charset="0"/>
+                <a:ea typeface="新細明體" pitchFamily="18" charset="-120"/>
+              </a:defRPr>
+            </a:lvl9pPr>
+          </a:lstStyle>
+          <a:p>
+            <a:pPr eaLnBrk="1" hangingPunct="1">
+              <a:lnSpc>
+                <a:spcPct val="120000"/>
+              </a:lnSpc>
+              <a:spcBef>
+                <a:spcPct val="0"/>
+              </a:spcBef>
+              <a:buClrTx/>
+              <a:buSzTx/>
+              <a:buFont typeface="Wingdings" pitchFamily="2" charset="2"/>
+              <a:buChar char="u"/>
+              <a:defRPr/>
             </a:pPr>
             <a:r>
-              <a:t>Summary 報告總結</a:t>
-            </a:r>
-          </a:p>
-        </p:txBody>
-      </p:sp>
-      <p:sp>
-        <p:nvSpPr>
-          <p:cNvPr id="3" name="TextBox 2"/>
-          <p:cNvSpPr txBox="1"/>
-          <p:nvPr/>
-        </p:nvSpPr>
-        <p:spPr>
-          <a:xfrm>
-            <a:off x="1463040" y="2103120"/>
-            <a:ext cx="3291840" cy="4114800"/>
-          </a:xfrm>
-          <a:prstGeom prst="rect">
-            <a:avLst/>
-          </a:prstGeom>
-          <a:noFill/>
-        </p:spPr>
-        <p:txBody>
-          <a:bodyPr wrap="square">
-            <a:spAutoFit/>
-          </a:bodyPr>
-          <a:lstStyle/>
-          <a:p>
-            <a:pPr>
-              <a:defRPr b="1" sz="1600">
-                <a:solidFill>
-                  <a:srgbClr val="0070C0"/>
-                </a:solidFill>
-              </a:defRPr>
+              <a:rPr lang="en-US" altLang="zh-TW" sz="1800" dirty="0">
+                <a:latin typeface="+mj-lt"/>
+                <a:ea typeface="標楷體" panose="03000509000000000000" pitchFamily="65" charset="-120"/>
+              </a:rPr>
+              <a:t>Emergency Response Action</a:t>
+            </a:r>
+            <a:r>
+              <a:rPr lang="zh-TW" altLang="en-US" sz="1800" dirty="0">
+                <a:latin typeface="+mj-lt"/>
+                <a:ea typeface="標楷體" panose="03000509000000000000" pitchFamily="65" charset="-120"/>
+              </a:rPr>
+              <a:t>：</a:t>
+            </a:r>
+            <a:endParaRPr lang="en-US" altLang="zh-TW" sz="1800" dirty="0">
+              <a:latin typeface="+mj-lt"/>
+              <a:ea typeface="標楷體" panose="03000509000000000000" pitchFamily="65" charset="-120"/>
+            </a:endParaRPr>
+          </a:p>
+          <a:p>
+            <a:pPr lvl="1" eaLnBrk="1" hangingPunct="1">
+              <a:lnSpc>
+                <a:spcPct val="120000"/>
+              </a:lnSpc>
+              <a:spcBef>
+                <a:spcPct val="0"/>
+              </a:spcBef>
+              <a:buClrTx/>
+              <a:buSzTx/>
+              <a:buFont typeface="Arial" panose="020B0604020202020204" pitchFamily="34" charset="0"/>
+              <a:buChar char="•"/>
+              <a:defRPr/>
             </a:pPr>
             <a:r>
-              <a:t>分析優點與成功驗證</a:t>
-            </a:r>
-          </a:p>
-          <a:p>
-            <a:pPr>
-              <a:spcBef>
-                <a:spcPts val="500"/>
-              </a:spcBef>
-              <a:defRPr sz="1100"/>
-            </a:pPr>
-            <a:r>
-              <a:t>✓ 初步排查邏輯清晰，透過移除元件成功定位故障點在於IC單體。</a:t>
-            </a:r>
-          </a:p>
-          <a:p>
-            <a:pPr>
-              <a:spcBef>
-                <a:spcPts val="500"/>
-              </a:spcBef>
-              <a:defRPr sz="1100"/>
-            </a:pPr>
-            <a:r>
-              <a:t>✓ 提供了初步的電性量測數據(OL, 47Ω, 58Ω)作為證據。</a:t>
-            </a:r>
-          </a:p>
-          <a:p>
-            <a:pPr>
-              <a:spcBef>
-                <a:spcPts val="500"/>
-              </a:spcBef>
-              <a:defRPr sz="1100"/>
-            </a:pPr>
-            <a:r>
-              <a:t>✓ 包含了電路圖與實際組件照片，有助於理解失效位置。</a:t>
-            </a:r>
-          </a:p>
-        </p:txBody>
-      </p:sp>
-      <p:sp>
-        <p:nvSpPr>
-          <p:cNvPr id="4" name="TextBox 3"/>
-          <p:cNvSpPr txBox="1"/>
-          <p:nvPr/>
-        </p:nvSpPr>
-        <p:spPr>
-          <a:xfrm>
-            <a:off x="5029200" y="2103120"/>
-            <a:ext cx="3657600" cy="1828800"/>
-          </a:xfrm>
-          <a:prstGeom prst="rect">
-            <a:avLst/>
-          </a:prstGeom>
-          <a:noFill/>
-        </p:spPr>
-        <p:txBody>
-          <a:bodyPr wrap="square">
-            <a:spAutoFit/>
-          </a:bodyPr>
-          <a:lstStyle/>
-          <a:p>
-            <a:pPr>
-              <a:defRPr b="1" sz="1400">
-                <a:solidFill>
-                  <a:srgbClr val="0070C0"/>
-                </a:solidFill>
-              </a:defRPr>
-            </a:pPr>
-            <a:r>
-              <a:t>Executive Summary</a:t>
-            </a:r>
-          </a:p>
-          <a:p>
-            <a:pPr>
-              <a:defRPr sz="1100"/>
-            </a:pPr>
-            <a:r>
-              <a:t>本報告完成了初步的失效定位(Localization)，確認故障點位於Touch IC的INT/MISO引腳，但尚未達到正式FA報告的深度。報告最大的問題在於「僅有推測，缺乏根因」以及「完全沒有對策」。目前的結論僅能說「壞在哪裡」，無法說明「為什麼壞」以及「如何不再發生」。建議補足物理分析證據，並根據根因制定完整的改善與驗證計畫。</a:t>
-            </a:r>
-          </a:p>
-        </p:txBody>
-      </p:sp>
-      <p:sp>
-        <p:nvSpPr>
-          <p:cNvPr id="5" name="TextBox 4"/>
-          <p:cNvSpPr txBox="1"/>
-          <p:nvPr/>
-        </p:nvSpPr>
-        <p:spPr>
-          <a:xfrm>
-            <a:off x="5029200" y="4023360"/>
-            <a:ext cx="3657600" cy="2011680"/>
-          </a:xfrm>
-          <a:prstGeom prst="rect">
-            <a:avLst/>
-          </a:prstGeom>
-          <a:noFill/>
-        </p:spPr>
-        <p:txBody>
-          <a:bodyPr wrap="square">
-            <a:spAutoFit/>
-          </a:bodyPr>
-          <a:lstStyle/>
-          <a:p>
-            <a:pPr>
-              <a:defRPr b="1" sz="1400">
-                <a:solidFill>
-                  <a:srgbClr val="FF0000"/>
-                </a:solidFill>
-              </a:defRPr>
-            </a:pPr>
-            <a:r>
-              <a:t>Key Improvements Required</a:t>
-            </a:r>
-          </a:p>
-          <a:p>
-            <a:pPr>
-              <a:defRPr sz="1000"/>
-            </a:pPr>
-            <a:r>
-              <a:t>• 報告中完全缺失改善對策、預防措施與驗證計畫。</a:t>
-            </a:r>
+              <a:rPr lang="zh-TW" altLang="en-US" sz="1600">
+                <a:latin typeface="+mj-lt"/>
+                <a:ea typeface="標楷體" panose="03000509000000000000" pitchFamily="65" charset="-120"/>
+              </a:rPr>
+              <a:t>推測為</a:t>
+            </a:r>
+            <a:r>
+              <a:rPr lang="en-US" altLang="zh-TW" sz="1600">
+                <a:latin typeface="+mj-lt"/>
+                <a:ea typeface="標楷體" panose="03000509000000000000" pitchFamily="65" charset="-120"/>
+              </a:rPr>
+              <a:t>IC INT/MISO I/O</a:t>
+            </a:r>
+            <a:r>
+              <a:rPr lang="zh-TW" altLang="en-US" sz="1600">
+                <a:latin typeface="+mj-lt"/>
+                <a:ea typeface="標楷體" panose="03000509000000000000" pitchFamily="65" charset="-120"/>
+              </a:rPr>
+              <a:t>損傷造成</a:t>
+            </a:r>
+            <a:r>
+              <a:rPr lang="en-US" altLang="zh-TW" sz="1600">
+                <a:latin typeface="+mj-lt"/>
+                <a:ea typeface="標楷體" panose="03000509000000000000" pitchFamily="65" charset="-120"/>
+              </a:rPr>
+              <a:t>SPI</a:t>
+            </a:r>
+            <a:r>
+              <a:rPr lang="zh-TW" altLang="en-US" sz="1600">
+                <a:latin typeface="+mj-lt"/>
+                <a:ea typeface="標楷體" panose="03000509000000000000" pitchFamily="65" charset="-120"/>
+              </a:rPr>
+              <a:t>通訊失敗</a:t>
+            </a:r>
+            <a:endParaRPr lang="en-US" altLang="zh-TW" sz="1600" dirty="0">
+              <a:latin typeface="+mj-lt"/>
+              <a:ea typeface="標楷體" panose="03000509000000000000" pitchFamily="65" charset="-120"/>
+            </a:endParaRPr>
           </a:p>
         </p:txBody>
       </p:sp>
@@ -11197,20 +13955,15 @@
       <p:grpSpPr/>
       <p:sp>
         <p:nvSpPr>
-          <p:cNvPr id="2" name="Title 1"/>
+          <p:cNvPr id="2" name="Vertical Title 1"/>
           <p:cNvSpPr>
             <a:spLocks noGrp="1"/>
           </p:cNvSpPr>
           <p:nvPr>
-            <p:ph type="title"/>
+            <p:ph type="title" orient="vert"/>
           </p:nvPr>
         </p:nvSpPr>
-        <p:spPr>
-          <a:xfrm>
-            <a:off x="1463040" y="960120"/>
-            <a:ext cx="7132320" cy="1005840"/>
-          </a:xfrm>
-        </p:spPr>
+        <p:spPr/>
         <p:txBody>
           <a:bodyPr/>
           <a:lstStyle/>
@@ -11223,84 +13976,619 @@
       </p:sp>
       <p:sp>
         <p:nvSpPr>
-          <p:cNvPr id="3" name="Content Placeholder 2"/>
+          <p:cNvPr id="3" name="Vertical Text Placeholder 2"/>
           <p:cNvSpPr>
             <a:spLocks noGrp="1"/>
           </p:cNvSpPr>
           <p:nvPr>
-            <p:ph idx="1"/>
+            <p:ph type="body" idx="1" orient="vert"/>
           </p:nvPr>
         </p:nvSpPr>
-        <p:spPr>
-          <a:xfrm>
-            <a:off x="1463040" y="2103120"/>
-            <a:ext cx="7132320" cy="4297680"/>
-          </a:xfrm>
-        </p:spPr>
+        <p:spPr/>
         <p:txBody>
           <a:bodyPr/>
           <a:lstStyle/>
           <a:p/>
+        </p:txBody>
+      </p:sp>
+      <p:sp>
+        <p:nvSpPr>
+          <p:cNvPr id="4" name="Rectangle 3"/>
+          <p:cNvSpPr/>
+          <p:nvPr/>
+        </p:nvSpPr>
+        <p:spPr>
+          <a:xfrm>
+            <a:off x="457200" y="1280160"/>
+            <a:ext cx="228600" cy="228600"/>
+          </a:xfrm>
+          <a:prstGeom prst="rect">
+            <a:avLst/>
+          </a:prstGeom>
+          <a:solidFill>
+            <a:srgbClr val="D9D9D9"/>
+          </a:solidFill>
+          <a:ln>
+            <a:solidFill>
+              <a:srgbClr val="808080"/>
+            </a:solidFill>
+          </a:ln>
+        </p:spPr>
+        <p:style>
+          <a:lnRef idx="1">
+            <a:schemeClr val="accent1"/>
+          </a:lnRef>
+          <a:fillRef idx="3">
+            <a:schemeClr val="accent1"/>
+          </a:fillRef>
+          <a:effectRef idx="2">
+            <a:schemeClr val="accent1"/>
+          </a:effectRef>
+          <a:fontRef idx="minor">
+            <a:schemeClr val="lt1"/>
+          </a:fontRef>
+        </p:style>
+        <p:txBody>
+          <a:bodyPr rtlCol="0" anchor="ctr" wrap="square" lIns="45720" rIns="45720" tIns="18288" bIns="18288"/>
+          <a:lstStyle/>
+          <a:p>
+            <a:pPr algn="ctr"/>
+            <a:r>
+              <a:rPr sz="1400" b="1"/>
+              <a:t>☐</a:t>
+            </a:r>
+          </a:p>
+        </p:txBody>
+      </p:sp>
+      <p:sp>
+        <p:nvSpPr>
+          <p:cNvPr id="5" name="TextBox 4"/>
+          <p:cNvSpPr txBox="1"/>
+          <p:nvPr/>
+        </p:nvSpPr>
+        <p:spPr>
+          <a:xfrm>
+            <a:off x="777240" y="1280160"/>
+            <a:ext cx="7909560" cy="522514"/>
+          </a:xfrm>
+          <a:prstGeom prst="rect">
+            <a:avLst/>
+          </a:prstGeom>
+          <a:noFill/>
+        </p:spPr>
+        <p:txBody>
+          <a:bodyPr wrap="square" anchor="ctr">
+            <a:spAutoFit/>
+          </a:bodyPr>
+          <a:lstStyle/>
+          <a:p>
+            <a:r>
+              <a:rPr sz="1100">
+                <a:solidFill>
+                  <a:srgbClr val="1F4E79"/>
+                </a:solidFill>
+              </a:rPr>
+              <a:t>FA 編號: FA-260811-001</a:t>
+            </a:r>
+          </a:p>
+        </p:txBody>
+      </p:sp>
+      <p:sp>
+        <p:nvSpPr>
+          <p:cNvPr id="6" name="Rectangle 5"/>
+          <p:cNvSpPr/>
+          <p:nvPr/>
+        </p:nvSpPr>
+        <p:spPr>
+          <a:xfrm>
+            <a:off x="457200" y="1802674"/>
+            <a:ext cx="228600" cy="228600"/>
+          </a:xfrm>
+          <a:prstGeom prst="rect">
+            <a:avLst/>
+          </a:prstGeom>
+          <a:solidFill>
+            <a:srgbClr val="D9D9D9"/>
+          </a:solidFill>
+          <a:ln>
+            <a:solidFill>
+              <a:srgbClr val="808080"/>
+            </a:solidFill>
+          </a:ln>
+        </p:spPr>
+        <p:style>
+          <a:lnRef idx="1">
+            <a:schemeClr val="accent1"/>
+          </a:lnRef>
+          <a:fillRef idx="3">
+            <a:schemeClr val="accent1"/>
+          </a:fillRef>
+          <a:effectRef idx="2">
+            <a:schemeClr val="accent1"/>
+          </a:effectRef>
+          <a:fontRef idx="minor">
+            <a:schemeClr val="lt1"/>
+          </a:fontRef>
+        </p:style>
+        <p:txBody>
+          <a:bodyPr rtlCol="0" anchor="ctr" wrap="square" lIns="45720" rIns="45720" tIns="18288" bIns="18288"/>
+          <a:lstStyle/>
+          <a:p>
+            <a:pPr algn="ctr"/>
+            <a:r>
+              <a:rPr sz="1400" b="1"/>
+              <a:t>☐</a:t>
+            </a:r>
+          </a:p>
+        </p:txBody>
+      </p:sp>
+      <p:sp>
+        <p:nvSpPr>
+          <p:cNvPr id="7" name="TextBox 6"/>
+          <p:cNvSpPr txBox="1"/>
+          <p:nvPr/>
+        </p:nvSpPr>
+        <p:spPr>
+          <a:xfrm>
+            <a:off x="777240" y="1802674"/>
+            <a:ext cx="7909560" cy="522514"/>
+          </a:xfrm>
+          <a:prstGeom prst="rect">
+            <a:avLst/>
+          </a:prstGeom>
+          <a:noFill/>
+        </p:spPr>
+        <p:txBody>
+          <a:bodyPr wrap="square" anchor="ctr">
+            <a:spAutoFit/>
+          </a:bodyPr>
+          <a:lstStyle/>
+          <a:p>
+            <a:r>
+              <a:rPr sz="1100">
+                <a:solidFill>
+                  <a:srgbClr val="1F4E79"/>
+                </a:solidFill>
+              </a:rPr>
+              <a:t>負責工程師: ELAN FAE</a:t>
+            </a:r>
+          </a:p>
+        </p:txBody>
+      </p:sp>
+      <p:sp>
+        <p:nvSpPr>
+          <p:cNvPr id="8" name="Rectangle 7"/>
+          <p:cNvSpPr/>
+          <p:nvPr/>
+        </p:nvSpPr>
+        <p:spPr>
+          <a:xfrm>
+            <a:off x="457200" y="2325188"/>
+            <a:ext cx="228600" cy="228600"/>
+          </a:xfrm>
+          <a:prstGeom prst="rect">
+            <a:avLst/>
+          </a:prstGeom>
+          <a:solidFill>
+            <a:srgbClr val="D9D9D9"/>
+          </a:solidFill>
+          <a:ln>
+            <a:solidFill>
+              <a:srgbClr val="808080"/>
+            </a:solidFill>
+          </a:ln>
+        </p:spPr>
+        <p:style>
+          <a:lnRef idx="1">
+            <a:schemeClr val="accent1"/>
+          </a:lnRef>
+          <a:fillRef idx="3">
+            <a:schemeClr val="accent1"/>
+          </a:fillRef>
+          <a:effectRef idx="2">
+            <a:schemeClr val="accent1"/>
+          </a:effectRef>
+          <a:fontRef idx="minor">
+            <a:schemeClr val="lt1"/>
+          </a:fontRef>
+        </p:style>
+        <p:txBody>
+          <a:bodyPr rtlCol="0" anchor="ctr" wrap="square" lIns="45720" rIns="45720" tIns="18288" bIns="18288"/>
+          <a:lstStyle/>
+          <a:p>
+            <a:pPr algn="ctr"/>
+            <a:r>
+              <a:rPr sz="1400" b="1"/>
+              <a:t>☐</a:t>
+            </a:r>
+          </a:p>
+        </p:txBody>
+      </p:sp>
+      <p:sp>
+        <p:nvSpPr>
+          <p:cNvPr id="9" name="TextBox 8"/>
+          <p:cNvSpPr txBox="1"/>
+          <p:nvPr/>
+        </p:nvSpPr>
+        <p:spPr>
+          <a:xfrm>
+            <a:off x="777240" y="2325188"/>
+            <a:ext cx="7909560" cy="522514"/>
+          </a:xfrm>
+          <a:prstGeom prst="rect">
+            <a:avLst/>
+          </a:prstGeom>
+          <a:noFill/>
+        </p:spPr>
+        <p:txBody>
+          <a:bodyPr wrap="square" anchor="ctr">
+            <a:spAutoFit/>
+          </a:bodyPr>
+          <a:lstStyle/>
+          <a:p>
+            <a:r>
+              <a:rPr sz="1100">
+                <a:solidFill>
+                  <a:srgbClr val="1F4E79"/>
+                </a:solidFill>
+              </a:rPr>
+              <a:t>客戶: Kobo</a:t>
+            </a:r>
+          </a:p>
+        </p:txBody>
+      </p:sp>
+      <p:sp>
+        <p:nvSpPr>
+          <p:cNvPr id="10" name="Rectangle 9"/>
+          <p:cNvSpPr/>
+          <p:nvPr/>
+        </p:nvSpPr>
+        <p:spPr>
+          <a:xfrm>
+            <a:off x="457200" y="2847702"/>
+            <a:ext cx="228600" cy="228600"/>
+          </a:xfrm>
+          <a:prstGeom prst="rect">
+            <a:avLst/>
+          </a:prstGeom>
+          <a:solidFill>
+            <a:srgbClr val="D9D9D9"/>
+          </a:solidFill>
+          <a:ln>
+            <a:solidFill>
+              <a:srgbClr val="808080"/>
+            </a:solidFill>
+          </a:ln>
+        </p:spPr>
+        <p:style>
+          <a:lnRef idx="1">
+            <a:schemeClr val="accent1"/>
+          </a:lnRef>
+          <a:fillRef idx="3">
+            <a:schemeClr val="accent1"/>
+          </a:fillRef>
+          <a:effectRef idx="2">
+            <a:schemeClr val="accent1"/>
+          </a:effectRef>
+          <a:fontRef idx="minor">
+            <a:schemeClr val="lt1"/>
+          </a:fontRef>
+        </p:style>
+        <p:txBody>
+          <a:bodyPr rtlCol="0" anchor="ctr" wrap="square" lIns="45720" rIns="45720" tIns="18288" bIns="18288"/>
+          <a:lstStyle/>
+          <a:p>
+            <a:pPr algn="ctr"/>
+            <a:r>
+              <a:rPr sz="1400" b="1"/>
+              <a:t>☐</a:t>
+            </a:r>
+          </a:p>
+        </p:txBody>
+      </p:sp>
+      <p:sp>
+        <p:nvSpPr>
+          <p:cNvPr id="11" name="TextBox 10"/>
+          <p:cNvSpPr txBox="1"/>
+          <p:nvPr/>
+        </p:nvSpPr>
+        <p:spPr>
+          <a:xfrm>
+            <a:off x="777240" y="2847702"/>
+            <a:ext cx="7909560" cy="522514"/>
+          </a:xfrm>
+          <a:prstGeom prst="rect">
+            <a:avLst/>
+          </a:prstGeom>
+          <a:noFill/>
+        </p:spPr>
+        <p:txBody>
+          <a:bodyPr wrap="square" anchor="ctr">
+            <a:spAutoFit/>
+          </a:bodyPr>
+          <a:lstStyle/>
+          <a:p>
+            <a:r>
+              <a:rPr sz="1100">
+                <a:solidFill>
+                  <a:srgbClr val="1F4E79"/>
+                </a:solidFill>
+              </a:rPr>
+              <a:t>專案名稱: ZHT RA6080 SPcomFailI</a:t>
+            </a:r>
+          </a:p>
+        </p:txBody>
+      </p:sp>
+      <p:sp>
+        <p:nvSpPr>
+          <p:cNvPr id="12" name="Rectangle 11"/>
+          <p:cNvSpPr/>
+          <p:nvPr/>
+        </p:nvSpPr>
+        <p:spPr>
+          <a:xfrm>
+            <a:off x="457200" y="3370217"/>
+            <a:ext cx="228600" cy="228600"/>
+          </a:xfrm>
+          <a:prstGeom prst="rect">
+            <a:avLst/>
+          </a:prstGeom>
+          <a:solidFill>
+            <a:srgbClr val="D9D9D9"/>
+          </a:solidFill>
+          <a:ln>
+            <a:solidFill>
+              <a:srgbClr val="808080"/>
+            </a:solidFill>
+          </a:ln>
+        </p:spPr>
+        <p:style>
+          <a:lnRef idx="1">
+            <a:schemeClr val="accent1"/>
+          </a:lnRef>
+          <a:fillRef idx="3">
+            <a:schemeClr val="accent1"/>
+          </a:fillRef>
+          <a:effectRef idx="2">
+            <a:schemeClr val="accent1"/>
+          </a:effectRef>
+          <a:fontRef idx="minor">
+            <a:schemeClr val="lt1"/>
+          </a:fontRef>
+        </p:style>
+        <p:txBody>
+          <a:bodyPr rtlCol="0" anchor="ctr" wrap="square" lIns="45720" rIns="45720" tIns="18288" bIns="18288"/>
+          <a:lstStyle/>
+          <a:p>
+            <a:pPr algn="ctr"/>
+            <a:r>
+              <a:rPr sz="1400" b="1"/>
+              <a:t>☐</a:t>
+            </a:r>
+          </a:p>
+        </p:txBody>
+      </p:sp>
+      <p:sp>
+        <p:nvSpPr>
+          <p:cNvPr id="13" name="TextBox 12"/>
+          <p:cNvSpPr txBox="1"/>
+          <p:nvPr/>
+        </p:nvSpPr>
+        <p:spPr>
+          <a:xfrm>
+            <a:off x="777240" y="3370217"/>
+            <a:ext cx="7909560" cy="522514"/>
+          </a:xfrm>
+          <a:prstGeom prst="rect">
+            <a:avLst/>
+          </a:prstGeom>
+          <a:noFill/>
+        </p:spPr>
+        <p:txBody>
+          <a:bodyPr wrap="square" anchor="ctr">
+            <a:spAutoFit/>
+          </a:bodyPr>
+          <a:lstStyle/>
+          <a:p>
+            <a:r>
+              <a:rPr sz="1100">
+                <a:solidFill>
+                  <a:srgbClr val="1F4E79"/>
+                </a:solidFill>
+              </a:rPr>
+              <a:t>報告日期: 2026/08/11</a:t>
+            </a:r>
+          </a:p>
+        </p:txBody>
+      </p:sp>
+      <p:sp>
+        <p:nvSpPr>
+          <p:cNvPr id="14" name="Rectangle 13"/>
+          <p:cNvSpPr/>
+          <p:nvPr/>
+        </p:nvSpPr>
+        <p:spPr>
+          <a:xfrm>
+            <a:off x="457200" y="3892731"/>
+            <a:ext cx="228600" cy="228600"/>
+          </a:xfrm>
+          <a:prstGeom prst="rect">
+            <a:avLst/>
+          </a:prstGeom>
+          <a:solidFill>
+            <a:srgbClr val="D9D9D9"/>
+          </a:solidFill>
+          <a:ln>
+            <a:solidFill>
+              <a:srgbClr val="808080"/>
+            </a:solidFill>
+          </a:ln>
+        </p:spPr>
+        <p:style>
+          <a:lnRef idx="1">
+            <a:schemeClr val="accent1"/>
+          </a:lnRef>
+          <a:fillRef idx="3">
+            <a:schemeClr val="accent1"/>
+          </a:fillRef>
+          <a:effectRef idx="2">
+            <a:schemeClr val="accent1"/>
+          </a:effectRef>
+          <a:fontRef idx="minor">
+            <a:schemeClr val="lt1"/>
+          </a:fontRef>
+        </p:style>
+        <p:txBody>
+          <a:bodyPr rtlCol="0" anchor="ctr" wrap="square" lIns="45720" rIns="45720" tIns="18288" bIns="18288"/>
+          <a:lstStyle/>
+          <a:p>
+            <a:pPr algn="ctr"/>
+            <a:r>
+              <a:rPr sz="1400" b="1"/>
+              <a:t>☐</a:t>
+            </a:r>
+          </a:p>
+        </p:txBody>
+      </p:sp>
+      <p:sp>
+        <p:nvSpPr>
+          <p:cNvPr id="15" name="TextBox 14"/>
+          <p:cNvSpPr txBox="1"/>
+          <p:nvPr/>
+        </p:nvSpPr>
+        <p:spPr>
+          <a:xfrm>
+            <a:off x="777240" y="3892731"/>
+            <a:ext cx="7909560" cy="522514"/>
+          </a:xfrm>
+          <a:prstGeom prst="rect">
+            <a:avLst/>
+          </a:prstGeom>
+          <a:noFill/>
+        </p:spPr>
+        <p:txBody>
+          <a:bodyPr wrap="square" anchor="ctr">
+            <a:spAutoFit/>
+          </a:bodyPr>
+          <a:lstStyle/>
+          <a:p>
+            <a:r>
+              <a:rPr sz="1100">
+                <a:solidFill>
+                  <a:srgbClr val="1F4E79"/>
+                </a:solidFill>
+              </a:rPr>
+              <a:t>失效數量: 依評核建議補充填寫</a:t>
+            </a:r>
+          </a:p>
+        </p:txBody>
+      </p:sp>
+      <p:sp>
+        <p:nvSpPr>
+          <p:cNvPr id="16" name="Rectangle 15"/>
+          <p:cNvSpPr/>
+          <p:nvPr/>
+        </p:nvSpPr>
+        <p:spPr>
+          <a:xfrm>
+            <a:off x="457200" y="4415245"/>
+            <a:ext cx="228600" cy="228600"/>
+          </a:xfrm>
+          <a:prstGeom prst="rect">
+            <a:avLst/>
+          </a:prstGeom>
+          <a:solidFill>
+            <a:srgbClr val="D9D9D9"/>
+          </a:solidFill>
+          <a:ln>
+            <a:solidFill>
+              <a:srgbClr val="808080"/>
+            </a:solidFill>
+          </a:ln>
+        </p:spPr>
+        <p:style>
+          <a:lnRef idx="1">
+            <a:schemeClr val="accent1"/>
+          </a:lnRef>
+          <a:fillRef idx="3">
+            <a:schemeClr val="accent1"/>
+          </a:fillRef>
+          <a:effectRef idx="2">
+            <a:schemeClr val="accent1"/>
+          </a:effectRef>
+          <a:fontRef idx="minor">
+            <a:schemeClr val="lt1"/>
+          </a:fontRef>
+        </p:style>
+        <p:txBody>
+          <a:bodyPr rtlCol="0" anchor="ctr" wrap="square" lIns="45720" rIns="45720" tIns="18288" bIns="18288"/>
+          <a:lstStyle/>
+          <a:p>
+            <a:pPr algn="ctr"/>
+            <a:r>
+              <a:rPr sz="1400" b="1"/>
+              <a:t>☐</a:t>
+            </a:r>
+          </a:p>
+        </p:txBody>
+      </p:sp>
+      <p:sp>
+        <p:nvSpPr>
+          <p:cNvPr id="17" name="TextBox 16"/>
+          <p:cNvSpPr txBox="1"/>
+          <p:nvPr/>
+        </p:nvSpPr>
+        <p:spPr>
+          <a:xfrm>
+            <a:off x="777240" y="4415245"/>
+            <a:ext cx="7909560" cy="522514"/>
+          </a:xfrm>
+          <a:prstGeom prst="rect">
+            <a:avLst/>
+          </a:prstGeom>
+          <a:noFill/>
+        </p:spPr>
+        <p:txBody>
+          <a:bodyPr wrap="square" anchor="ctr">
+            <a:spAutoFit/>
+          </a:bodyPr>
+          <a:lstStyle/>
+          <a:p>
+            <a:r>
+              <a:rPr sz="1100">
+                <a:solidFill>
+                  <a:srgbClr val="1F4E79"/>
+                </a:solidFill>
+              </a:rPr>
+              <a:t>批號 (Lot No.): 依評核建議補充填寫</a:t>
+            </a:r>
+          </a:p>
+        </p:txBody>
+      </p:sp>
+      <p:sp>
+        <p:nvSpPr>
+          <p:cNvPr id="18" name="TextBox 17"/>
+          <p:cNvSpPr txBox="1"/>
+          <p:nvPr/>
+        </p:nvSpPr>
+        <p:spPr>
+          <a:xfrm>
+            <a:off x="457200" y="5029200"/>
+            <a:ext cx="8229600" cy="1371600"/>
+          </a:xfrm>
+          <a:prstGeom prst="rect">
+            <a:avLst/>
+          </a:prstGeom>
+          <a:noFill/>
+        </p:spPr>
+        <p:txBody>
+          <a:bodyPr wrap="square">
+            <a:spAutoFit/>
+          </a:bodyPr>
+          <a:lstStyle/>
           <a:p>
             <a:pPr>
-              <a:defRPr sz="1400"/>
-            </a:pPr>
-            <a:r>
-              <a:t>FA 編號: FA-260811-001</a:t>
-            </a:r>
-          </a:p>
-          <a:p>
-            <a:pPr>
-              <a:defRPr sz="1400"/>
-            </a:pPr>
-            <a:r>
-              <a:t>負責工程師: ELAN FAE</a:t>
-            </a:r>
-          </a:p>
-          <a:p>
-            <a:pPr>
-              <a:defRPr sz="1400"/>
-            </a:pPr>
-            <a:r>
-              <a:t>客戶: Kobo</a:t>
-            </a:r>
-          </a:p>
-          <a:p>
-            <a:pPr>
-              <a:defRPr sz="1400"/>
-            </a:pPr>
-            <a:r>
-              <a:t>專案名稱: ZHT RA6080 SPcomFailI</a:t>
-            </a:r>
-          </a:p>
-          <a:p>
-            <a:pPr>
-              <a:defRPr sz="1400"/>
-            </a:pPr>
-            <a:r>
-              <a:t>報告日期: 2026/08/11</a:t>
-            </a:r>
-          </a:p>
-          <a:p>
-            <a:pPr>
-              <a:defRPr sz="1400"/>
-            </a:pPr>
-            <a:r>
-              <a:t>失效數量: 依評核建議補充填寫</a:t>
-            </a:r>
-          </a:p>
-          <a:p>
-            <a:pPr>
-              <a:defRPr sz="1400"/>
-            </a:pPr>
-            <a:r>
-              <a:t>批號 (Lot No.): 依評核建議補充填寫</a:t>
-            </a:r>
-          </a:p>
-          <a:p>
-            <a:br/>
-            <a:pPr>
-              <a:defRPr b="1">
+              <a:defRPr b="1" sz="1400">
                 <a:solidFill>
                   <a:srgbClr val="FF0000"/>
                 </a:solidFill>
@@ -11311,8 +14599,8 @@
             </a:r>
           </a:p>
           <a:p>
-            <a:pPr lvl="1">
-              <a:defRPr sz="1400"/>
+            <a:pPr>
+              <a:defRPr sz="1200"/>
             </a:pPr>
             <a:r>
               <a:t>• 提供了產品型號、日期與準備者，但缺乏具體的批號(Lot No.)、失效數量(Failure Quantity)以及明確的客戶名稱。</a:t>
@@ -11340,141 +14628,1118 @@
       <p:grpSpPr/>
       <p:sp>
         <p:nvSpPr>
-          <p:cNvPr id="2" name="Title 1"/>
+          <p:cNvPr id="2" name="Vertical Title 1"/>
           <p:cNvSpPr>
             <a:spLocks noGrp="1"/>
           </p:cNvSpPr>
           <p:nvPr>
-            <p:ph type="title"/>
+            <p:ph type="title" orient="vert"/>
           </p:nvPr>
         </p:nvSpPr>
-        <p:spPr>
-          <a:xfrm>
-            <a:off x="1463040" y="960120"/>
-            <a:ext cx="7132320" cy="1005840"/>
-          </a:xfrm>
-        </p:spPr>
+        <p:spPr/>
         <p:txBody>
           <a:bodyPr/>
           <a:lstStyle/>
           <a:p>
             <a:r>
-              <a:t>根因驗證及統計分析</a:t>
+              <a:t>分析方法與流程</a:t>
             </a:r>
           </a:p>
         </p:txBody>
       </p:sp>
       <p:sp>
         <p:nvSpPr>
-          <p:cNvPr id="3" name="Content Placeholder 2"/>
+          <p:cNvPr id="3" name="Vertical Text Placeholder 2"/>
           <p:cNvSpPr>
             <a:spLocks noGrp="1"/>
           </p:cNvSpPr>
           <p:nvPr>
-            <p:ph idx="1"/>
+            <p:ph type="body" idx="1" orient="vert"/>
           </p:nvPr>
         </p:nvSpPr>
-        <p:spPr>
-          <a:xfrm>
-            <a:off x="1463040" y="2103120"/>
-            <a:ext cx="7132320" cy="4297680"/>
-          </a:xfrm>
-        </p:spPr>
+        <p:spPr/>
         <p:txBody>
           <a:bodyPr/>
           <a:lstStyle/>
           <a:p/>
-          <a:p>
-            <a:pPr>
-              <a:defRPr b="1" sz="1800">
-                <a:solidFill>
-                  <a:srgbClr val="0070C0"/>
-                </a:solidFill>
-              </a:defRPr>
-            </a:pPr>
-            <a:r>
-              <a:t>針對問題點之深度分析建議：</a:t>
-            </a:r>
-          </a:p>
-          <a:p>
-            <a:pPr>
-              <a:spcAft>
-                <a:spcPts val="1000"/>
-              </a:spcAft>
-              <a:defRPr sz="1400"/>
-            </a:pPr>
-            <a:r>
-              <a:t>結論僅停留在「推測」為I/O損傷，缺乏因果關係的深度分析。未說明為何會造成損傷(如ESD、過電壓或生產製程問題)，未應用5-Why分析。</a:t>
-            </a:r>
-          </a:p>
-          <a:p>
-            <a:pPr>
-              <a:spcAft>
-                <a:spcPts val="1000"/>
-              </a:spcAft>
-              <a:defRPr sz="1400"/>
-            </a:pPr>
-            <a:r>
-              <a:t>應使用 5-Why 分析法探討損傷發生的根本原因(例如：是ESD靜電擊穿還是過電壓？)，並提供物理證據(如SEM觀察晶片內部燒毀痕跡)。</a:t>
-            </a:r>
-          </a:p>
-          <a:p>
-            <a:pPr>
-              <a:spcAft>
-                <a:spcPts val="1000"/>
-              </a:spcAft>
-              <a:defRPr sz="1400"/>
-            </a:pPr>
-            <a:r>
-              <a:t>提升照片清晰度，並在分析中加入對照組(正常品)的數據比較，以增強說服力。</a:t>
-            </a:r>
-          </a:p>
-          <a:p>
-            <a:pPr>
-              <a:spcAft>
-                <a:spcPts val="1000"/>
-              </a:spcAft>
-              <a:defRPr sz="1400"/>
-            </a:pPr>
-            <a:r>
-              <a:t>必須針對根因提出短期(如檢驗補償)與長期(如設計優化或製程管控)的對策，並說明如何驗證有效性。</a:t>
-            </a:r>
-          </a:p>
-          <a:p>
-            <a:br/>
-            <a:pPr>
-              <a:defRPr b="1"/>
-            </a:pPr>
-            <a:r>
-              <a:t>[建議執行動作]</a:t>
-            </a:r>
-          </a:p>
-          <a:p>
-            <a:pPr lvl="1">
-              <a:defRPr sz="1200"/>
-            </a:pPr>
-            <a:r>
-              <a:t>• 設定 DVT 正常品 vs PVT 異常品之對照組</a:t>
-            </a:r>
-          </a:p>
-          <a:p>
-            <a:pPr lvl="1">
-              <a:defRPr sz="1200"/>
-            </a:pPr>
-            <a:r>
-              <a:t>• 使用獨立樣本 t 檢定驗證參數顯著性 (p &lt; 0.05)</a:t>
-            </a:r>
-          </a:p>
-          <a:p>
-            <a:pPr lvl="1">
-              <a:defRPr sz="1200"/>
-            </a:pPr>
-            <a:r>
-              <a:t>• 確保統計證據支持最終提到的根本原因</a:t>
-            </a:r>
-          </a:p>
         </p:txBody>
       </p:sp>
+      <p:sp>
+        <p:nvSpPr>
+          <p:cNvPr id="4" name="Rectangle 3"/>
+          <p:cNvSpPr/>
+          <p:nvPr/>
+        </p:nvSpPr>
+        <p:spPr>
+          <a:xfrm>
+            <a:off x="457200" y="1280160"/>
+            <a:ext cx="228600" cy="228600"/>
+          </a:xfrm>
+          <a:prstGeom prst="rect">
+            <a:avLst/>
+          </a:prstGeom>
+          <a:solidFill>
+            <a:srgbClr val="D9D9D9"/>
+          </a:solidFill>
+          <a:ln>
+            <a:solidFill>
+              <a:srgbClr val="808080"/>
+            </a:solidFill>
+          </a:ln>
+        </p:spPr>
+        <p:style>
+          <a:lnRef idx="1">
+            <a:schemeClr val="accent1"/>
+          </a:lnRef>
+          <a:fillRef idx="3">
+            <a:schemeClr val="accent1"/>
+          </a:fillRef>
+          <a:effectRef idx="2">
+            <a:schemeClr val="accent1"/>
+          </a:effectRef>
+          <a:fontRef idx="minor">
+            <a:schemeClr val="lt1"/>
+          </a:fontRef>
+        </p:style>
+        <p:txBody>
+          <a:bodyPr rtlCol="0" anchor="ctr" wrap="square" lIns="45720" rIns="45720" tIns="18288" bIns="18288"/>
+          <a:lstStyle/>
+          <a:p>
+            <a:pPr algn="ctr"/>
+            <a:r>
+              <a:rPr sz="1400" b="1"/>
+              <a:t>☐</a:t>
+            </a:r>
+          </a:p>
+        </p:txBody>
+      </p:sp>
+      <p:sp>
+        <p:nvSpPr>
+          <p:cNvPr id="5" name="TextBox 4"/>
+          <p:cNvSpPr txBox="1"/>
+          <p:nvPr/>
+        </p:nvSpPr>
+        <p:spPr>
+          <a:xfrm>
+            <a:off x="777240" y="1280160"/>
+            <a:ext cx="3337560" cy="514350"/>
+          </a:xfrm>
+          <a:prstGeom prst="rect">
+            <a:avLst/>
+          </a:prstGeom>
+          <a:noFill/>
+        </p:spPr>
+        <p:txBody>
+          <a:bodyPr wrap="square" anchor="ctr">
+            <a:spAutoFit/>
+          </a:bodyPr>
+          <a:lstStyle/>
+          <a:p>
+            <a:r>
+              <a:rPr sz="1100">
+                <a:solidFill>
+                  <a:srgbClr val="1F4E79"/>
+                </a:solidFill>
+              </a:rPr>
+              <a:t>D1: 建立團隊(FAE/QRA/PM)</a:t>
+            </a:r>
+          </a:p>
+        </p:txBody>
+      </p:sp>
+      <p:sp>
+        <p:nvSpPr>
+          <p:cNvPr id="6" name="Rectangle 5"/>
+          <p:cNvSpPr/>
+          <p:nvPr/>
+        </p:nvSpPr>
+        <p:spPr>
+          <a:xfrm>
+            <a:off x="457200" y="1794510"/>
+            <a:ext cx="228600" cy="228600"/>
+          </a:xfrm>
+          <a:prstGeom prst="rect">
+            <a:avLst/>
+          </a:prstGeom>
+          <a:solidFill>
+            <a:srgbClr val="D9D9D9"/>
+          </a:solidFill>
+          <a:ln>
+            <a:solidFill>
+              <a:srgbClr val="808080"/>
+            </a:solidFill>
+          </a:ln>
+        </p:spPr>
+        <p:style>
+          <a:lnRef idx="1">
+            <a:schemeClr val="accent1"/>
+          </a:lnRef>
+          <a:fillRef idx="3">
+            <a:schemeClr val="accent1"/>
+          </a:fillRef>
+          <a:effectRef idx="2">
+            <a:schemeClr val="accent1"/>
+          </a:effectRef>
+          <a:fontRef idx="minor">
+            <a:schemeClr val="lt1"/>
+          </a:fontRef>
+        </p:style>
+        <p:txBody>
+          <a:bodyPr rtlCol="0" anchor="ctr" wrap="square" lIns="45720" rIns="45720" tIns="18288" bIns="18288"/>
+          <a:lstStyle/>
+          <a:p>
+            <a:pPr algn="ctr"/>
+            <a:r>
+              <a:rPr sz="1400" b="1"/>
+              <a:t>☐</a:t>
+            </a:r>
+          </a:p>
+        </p:txBody>
+      </p:sp>
+      <p:sp>
+        <p:nvSpPr>
+          <p:cNvPr id="7" name="TextBox 6"/>
+          <p:cNvSpPr txBox="1"/>
+          <p:nvPr/>
+        </p:nvSpPr>
+        <p:spPr>
+          <a:xfrm>
+            <a:off x="777240" y="1794510"/>
+            <a:ext cx="3337560" cy="514350"/>
+          </a:xfrm>
+          <a:prstGeom prst="rect">
+            <a:avLst/>
+          </a:prstGeom>
+          <a:noFill/>
+        </p:spPr>
+        <p:txBody>
+          <a:bodyPr wrap="square" anchor="ctr">
+            <a:spAutoFit/>
+          </a:bodyPr>
+          <a:lstStyle/>
+          <a:p>
+            <a:r>
+              <a:rPr sz="1100">
+                <a:solidFill>
+                  <a:srgbClr val="1F4E79"/>
+                </a:solidFill>
+              </a:rPr>
+              <a:t>D2: 描述問題(5W2H)</a:t>
+            </a:r>
+          </a:p>
+        </p:txBody>
+      </p:sp>
+      <p:sp>
+        <p:nvSpPr>
+          <p:cNvPr id="8" name="Rectangle 7"/>
+          <p:cNvSpPr/>
+          <p:nvPr/>
+        </p:nvSpPr>
+        <p:spPr>
+          <a:xfrm>
+            <a:off x="457200" y="2308860"/>
+            <a:ext cx="228600" cy="228600"/>
+          </a:xfrm>
+          <a:prstGeom prst="rect">
+            <a:avLst/>
+          </a:prstGeom>
+          <a:solidFill>
+            <a:srgbClr val="D9D9D9"/>
+          </a:solidFill>
+          <a:ln>
+            <a:solidFill>
+              <a:srgbClr val="808080"/>
+            </a:solidFill>
+          </a:ln>
+        </p:spPr>
+        <p:style>
+          <a:lnRef idx="1">
+            <a:schemeClr val="accent1"/>
+          </a:lnRef>
+          <a:fillRef idx="3">
+            <a:schemeClr val="accent1"/>
+          </a:fillRef>
+          <a:effectRef idx="2">
+            <a:schemeClr val="accent1"/>
+          </a:effectRef>
+          <a:fontRef idx="minor">
+            <a:schemeClr val="lt1"/>
+          </a:fontRef>
+        </p:style>
+        <p:txBody>
+          <a:bodyPr rtlCol="0" anchor="ctr" wrap="square" lIns="45720" rIns="45720" tIns="18288" bIns="18288"/>
+          <a:lstStyle/>
+          <a:p>
+            <a:pPr algn="ctr"/>
+            <a:r>
+              <a:rPr sz="1400" b="1"/>
+              <a:t>☐</a:t>
+            </a:r>
+          </a:p>
+        </p:txBody>
+      </p:sp>
+      <p:sp>
+        <p:nvSpPr>
+          <p:cNvPr id="9" name="TextBox 8"/>
+          <p:cNvSpPr txBox="1"/>
+          <p:nvPr/>
+        </p:nvSpPr>
+        <p:spPr>
+          <a:xfrm>
+            <a:off x="777240" y="2308860"/>
+            <a:ext cx="3337560" cy="514350"/>
+          </a:xfrm>
+          <a:prstGeom prst="rect">
+            <a:avLst/>
+          </a:prstGeom>
+          <a:noFill/>
+        </p:spPr>
+        <p:txBody>
+          <a:bodyPr wrap="square" anchor="ctr">
+            <a:spAutoFit/>
+          </a:bodyPr>
+          <a:lstStyle/>
+          <a:p>
+            <a:r>
+              <a:rPr sz="1100">
+                <a:solidFill>
+                  <a:srgbClr val="ED7D31"/>
+                </a:solidFill>
+              </a:rPr>
+              <a:t>D3: 圍堵行動(Containment)</a:t>
+            </a:r>
+          </a:p>
+        </p:txBody>
+      </p:sp>
+      <p:sp>
+        <p:nvSpPr>
+          <p:cNvPr id="10" name="Rectangle 9"/>
+          <p:cNvSpPr/>
+          <p:nvPr/>
+        </p:nvSpPr>
+        <p:spPr>
+          <a:xfrm>
+            <a:off x="457200" y="2823210"/>
+            <a:ext cx="228600" cy="228600"/>
+          </a:xfrm>
+          <a:prstGeom prst="rect">
+            <a:avLst/>
+          </a:prstGeom>
+          <a:solidFill>
+            <a:srgbClr val="D9D9D9"/>
+          </a:solidFill>
+          <a:ln>
+            <a:solidFill>
+              <a:srgbClr val="808080"/>
+            </a:solidFill>
+          </a:ln>
+        </p:spPr>
+        <p:style>
+          <a:lnRef idx="1">
+            <a:schemeClr val="accent1"/>
+          </a:lnRef>
+          <a:fillRef idx="3">
+            <a:schemeClr val="accent1"/>
+          </a:fillRef>
+          <a:effectRef idx="2">
+            <a:schemeClr val="accent1"/>
+          </a:effectRef>
+          <a:fontRef idx="minor">
+            <a:schemeClr val="lt1"/>
+          </a:fontRef>
+        </p:style>
+        <p:txBody>
+          <a:bodyPr rtlCol="0" anchor="ctr" wrap="square" lIns="45720" rIns="45720" tIns="18288" bIns="18288"/>
+          <a:lstStyle/>
+          <a:p>
+            <a:pPr algn="ctr"/>
+            <a:r>
+              <a:rPr sz="1400" b="1"/>
+              <a:t>☐</a:t>
+            </a:r>
+          </a:p>
+        </p:txBody>
+      </p:sp>
+      <p:sp>
+        <p:nvSpPr>
+          <p:cNvPr id="11" name="TextBox 10"/>
+          <p:cNvSpPr txBox="1"/>
+          <p:nvPr/>
+        </p:nvSpPr>
+        <p:spPr>
+          <a:xfrm>
+            <a:off x="777240" y="2823210"/>
+            <a:ext cx="3337560" cy="514350"/>
+          </a:xfrm>
+          <a:prstGeom prst="rect">
+            <a:avLst/>
+          </a:prstGeom>
+          <a:noFill/>
+        </p:spPr>
+        <p:txBody>
+          <a:bodyPr wrap="square" anchor="ctr">
+            <a:spAutoFit/>
+          </a:bodyPr>
+          <a:lstStyle/>
+          <a:p>
+            <a:r>
+              <a:rPr sz="1100">
+                <a:solidFill>
+                  <a:srgbClr val="C00000"/>
+                </a:solidFill>
+              </a:rPr>
+              <a:t>D4: 根因分析(5-Why/Fishbone)</a:t>
+            </a:r>
+          </a:p>
+        </p:txBody>
+      </p:sp>
+      <p:sp>
+        <p:nvSpPr>
+          <p:cNvPr id="12" name="Rectangle 11"/>
+          <p:cNvSpPr/>
+          <p:nvPr/>
+        </p:nvSpPr>
+        <p:spPr>
+          <a:xfrm>
+            <a:off x="457200" y="3337560"/>
+            <a:ext cx="228600" cy="228600"/>
+          </a:xfrm>
+          <a:prstGeom prst="rect">
+            <a:avLst/>
+          </a:prstGeom>
+          <a:solidFill>
+            <a:srgbClr val="D9D9D9"/>
+          </a:solidFill>
+          <a:ln>
+            <a:solidFill>
+              <a:srgbClr val="808080"/>
+            </a:solidFill>
+          </a:ln>
+        </p:spPr>
+        <p:style>
+          <a:lnRef idx="1">
+            <a:schemeClr val="accent1"/>
+          </a:lnRef>
+          <a:fillRef idx="3">
+            <a:schemeClr val="accent1"/>
+          </a:fillRef>
+          <a:effectRef idx="2">
+            <a:schemeClr val="accent1"/>
+          </a:effectRef>
+          <a:fontRef idx="minor">
+            <a:schemeClr val="lt1"/>
+          </a:fontRef>
+        </p:style>
+        <p:txBody>
+          <a:bodyPr rtlCol="0" anchor="ctr" wrap="square" lIns="45720" rIns="45720" tIns="18288" bIns="18288"/>
+          <a:lstStyle/>
+          <a:p>
+            <a:pPr algn="ctr"/>
+            <a:r>
+              <a:rPr sz="1400" b="1"/>
+              <a:t>☐</a:t>
+            </a:r>
+          </a:p>
+        </p:txBody>
+      </p:sp>
+      <p:sp>
+        <p:nvSpPr>
+          <p:cNvPr id="13" name="TextBox 12"/>
+          <p:cNvSpPr txBox="1"/>
+          <p:nvPr/>
+        </p:nvSpPr>
+        <p:spPr>
+          <a:xfrm>
+            <a:off x="777240" y="3337560"/>
+            <a:ext cx="3337560" cy="514350"/>
+          </a:xfrm>
+          <a:prstGeom prst="rect">
+            <a:avLst/>
+          </a:prstGeom>
+          <a:noFill/>
+        </p:spPr>
+        <p:txBody>
+          <a:bodyPr wrap="square" anchor="ctr">
+            <a:spAutoFit/>
+          </a:bodyPr>
+          <a:lstStyle/>
+          <a:p>
+            <a:r>
+              <a:rPr sz="1100">
+                <a:solidFill>
+                  <a:srgbClr val="C00000"/>
+                </a:solidFill>
+              </a:rPr>
+              <a:t>D5: 永久對策(PCA)</a:t>
+            </a:r>
+          </a:p>
+        </p:txBody>
+      </p:sp>
+      <p:sp>
+        <p:nvSpPr>
+          <p:cNvPr id="14" name="Rectangle 13"/>
+          <p:cNvSpPr/>
+          <p:nvPr/>
+        </p:nvSpPr>
+        <p:spPr>
+          <a:xfrm>
+            <a:off x="457200" y="3851910"/>
+            <a:ext cx="228600" cy="228600"/>
+          </a:xfrm>
+          <a:prstGeom prst="rect">
+            <a:avLst/>
+          </a:prstGeom>
+          <a:solidFill>
+            <a:srgbClr val="D9D9D9"/>
+          </a:solidFill>
+          <a:ln>
+            <a:solidFill>
+              <a:srgbClr val="808080"/>
+            </a:solidFill>
+          </a:ln>
+        </p:spPr>
+        <p:style>
+          <a:lnRef idx="1">
+            <a:schemeClr val="accent1"/>
+          </a:lnRef>
+          <a:fillRef idx="3">
+            <a:schemeClr val="accent1"/>
+          </a:fillRef>
+          <a:effectRef idx="2">
+            <a:schemeClr val="accent1"/>
+          </a:effectRef>
+          <a:fontRef idx="minor">
+            <a:schemeClr val="lt1"/>
+          </a:fontRef>
+        </p:style>
+        <p:txBody>
+          <a:bodyPr rtlCol="0" anchor="ctr" wrap="square" lIns="45720" rIns="45720" tIns="18288" bIns="18288"/>
+          <a:lstStyle/>
+          <a:p>
+            <a:pPr algn="ctr"/>
+            <a:r>
+              <a:rPr sz="1400" b="1"/>
+              <a:t>☐</a:t>
+            </a:r>
+          </a:p>
+        </p:txBody>
+      </p:sp>
+      <p:sp>
+        <p:nvSpPr>
+          <p:cNvPr id="15" name="TextBox 14"/>
+          <p:cNvSpPr txBox="1"/>
+          <p:nvPr/>
+        </p:nvSpPr>
+        <p:spPr>
+          <a:xfrm>
+            <a:off x="777240" y="3851910"/>
+            <a:ext cx="3337560" cy="514350"/>
+          </a:xfrm>
+          <a:prstGeom prst="rect">
+            <a:avLst/>
+          </a:prstGeom>
+          <a:noFill/>
+        </p:spPr>
+        <p:txBody>
+          <a:bodyPr wrap="square" anchor="ctr">
+            <a:spAutoFit/>
+          </a:bodyPr>
+          <a:lstStyle/>
+          <a:p>
+            <a:r>
+              <a:rPr sz="1100">
+                <a:solidFill>
+                  <a:srgbClr val="ED7D31"/>
+                </a:solidFill>
+              </a:rPr>
+              <a:t>D6: 實施與驗證</a:t>
+            </a:r>
+          </a:p>
+        </p:txBody>
+      </p:sp>
+      <p:sp>
+        <p:nvSpPr>
+          <p:cNvPr id="16" name="Rectangle 15"/>
+          <p:cNvSpPr/>
+          <p:nvPr/>
+        </p:nvSpPr>
+        <p:spPr>
+          <a:xfrm>
+            <a:off x="457200" y="4366260"/>
+            <a:ext cx="228600" cy="228600"/>
+          </a:xfrm>
+          <a:prstGeom prst="rect">
+            <a:avLst/>
+          </a:prstGeom>
+          <a:solidFill>
+            <a:srgbClr val="D9D9D9"/>
+          </a:solidFill>
+          <a:ln>
+            <a:solidFill>
+              <a:srgbClr val="808080"/>
+            </a:solidFill>
+          </a:ln>
+        </p:spPr>
+        <p:style>
+          <a:lnRef idx="1">
+            <a:schemeClr val="accent1"/>
+          </a:lnRef>
+          <a:fillRef idx="3">
+            <a:schemeClr val="accent1"/>
+          </a:fillRef>
+          <a:effectRef idx="2">
+            <a:schemeClr val="accent1"/>
+          </a:effectRef>
+          <a:fontRef idx="minor">
+            <a:schemeClr val="lt1"/>
+          </a:fontRef>
+        </p:style>
+        <p:txBody>
+          <a:bodyPr rtlCol="0" anchor="ctr" wrap="square" lIns="45720" rIns="45720" tIns="18288" bIns="18288"/>
+          <a:lstStyle/>
+          <a:p>
+            <a:pPr algn="ctr"/>
+            <a:r>
+              <a:rPr sz="1400" b="1"/>
+              <a:t>☐</a:t>
+            </a:r>
+          </a:p>
+        </p:txBody>
+      </p:sp>
+      <p:sp>
+        <p:nvSpPr>
+          <p:cNvPr id="17" name="TextBox 16"/>
+          <p:cNvSpPr txBox="1"/>
+          <p:nvPr/>
+        </p:nvSpPr>
+        <p:spPr>
+          <a:xfrm>
+            <a:off x="777240" y="4366260"/>
+            <a:ext cx="3337560" cy="514350"/>
+          </a:xfrm>
+          <a:prstGeom prst="rect">
+            <a:avLst/>
+          </a:prstGeom>
+          <a:noFill/>
+        </p:spPr>
+        <p:txBody>
+          <a:bodyPr wrap="square" anchor="ctr">
+            <a:spAutoFit/>
+          </a:bodyPr>
+          <a:lstStyle/>
+          <a:p>
+            <a:r>
+              <a:rPr sz="1100">
+                <a:solidFill>
+                  <a:srgbClr val="1F4E79"/>
+                </a:solidFill>
+              </a:rPr>
+              <a:t>D7: 再發防止(SOP/防呆)</a:t>
+            </a:r>
+          </a:p>
+        </p:txBody>
+      </p:sp>
+      <p:sp>
+        <p:nvSpPr>
+          <p:cNvPr id="18" name="Rectangle 17"/>
+          <p:cNvSpPr/>
+          <p:nvPr/>
+        </p:nvSpPr>
+        <p:spPr>
+          <a:xfrm>
+            <a:off x="457200" y="4880610"/>
+            <a:ext cx="228600" cy="228600"/>
+          </a:xfrm>
+          <a:prstGeom prst="rect">
+            <a:avLst/>
+          </a:prstGeom>
+          <a:solidFill>
+            <a:srgbClr val="D9D9D9"/>
+          </a:solidFill>
+          <a:ln>
+            <a:solidFill>
+              <a:srgbClr val="808080"/>
+            </a:solidFill>
+          </a:ln>
+        </p:spPr>
+        <p:style>
+          <a:lnRef idx="1">
+            <a:schemeClr val="accent1"/>
+          </a:lnRef>
+          <a:fillRef idx="3">
+            <a:schemeClr val="accent1"/>
+          </a:fillRef>
+          <a:effectRef idx="2">
+            <a:schemeClr val="accent1"/>
+          </a:effectRef>
+          <a:fontRef idx="minor">
+            <a:schemeClr val="lt1"/>
+          </a:fontRef>
+        </p:style>
+        <p:txBody>
+          <a:bodyPr rtlCol="0" anchor="ctr" wrap="square" lIns="45720" rIns="45720" tIns="18288" bIns="18288"/>
+          <a:lstStyle/>
+          <a:p>
+            <a:pPr algn="ctr"/>
+            <a:r>
+              <a:rPr sz="1400" b="1"/>
+              <a:t>☐</a:t>
+            </a:r>
+          </a:p>
+        </p:txBody>
+      </p:sp>
+      <p:sp>
+        <p:nvSpPr>
+          <p:cNvPr id="19" name="TextBox 18"/>
+          <p:cNvSpPr txBox="1"/>
+          <p:nvPr/>
+        </p:nvSpPr>
+        <p:spPr>
+          <a:xfrm>
+            <a:off x="777240" y="4880610"/>
+            <a:ext cx="3337560" cy="514350"/>
+          </a:xfrm>
+          <a:prstGeom prst="rect">
+            <a:avLst/>
+          </a:prstGeom>
+          <a:noFill/>
+        </p:spPr>
+        <p:txBody>
+          <a:bodyPr wrap="square" anchor="ctr">
+            <a:spAutoFit/>
+          </a:bodyPr>
+          <a:lstStyle/>
+          <a:p>
+            <a:r>
+              <a:rPr sz="1100">
+                <a:solidFill>
+                  <a:srgbClr val="70AD47"/>
+                </a:solidFill>
+              </a:rPr>
+              <a:t>D8: 團隊表揚與經驗傳承</a:t>
+            </a:r>
+          </a:p>
+        </p:txBody>
+      </p:sp>
+      <p:graphicFrame>
+        <p:nvGraphicFramePr>
+          <p:cNvPr id="20" name="Table 19"/>
+          <p:cNvGraphicFramePr>
+            <a:graphicFrameLocks noGrp="1"/>
+          </p:cNvGraphicFramePr>
+          <p:nvPr/>
+        </p:nvGraphicFramePr>
+        <p:xfrm>
+          <a:off x="4389120" y="1280160"/>
+          <a:ext cx="4297680" cy="4114800"/>
+        </p:xfrm>
+        <a:graphic>
+          <a:graphicData uri="http://schemas.openxmlformats.org/drawingml/2006/table">
+            <a:tbl>
+              <a:tblPr firstRow="1" bandRow="1">
+                <a:tableStyleId>{5C22544A-7EE6-4342-B048-85BDC9FD1C3A}</a:tableStyleId>
+              </a:tblPr>
+              <a:tblGrid>
+                <a:gridCol w="1432560"/>
+                <a:gridCol w="1432560"/>
+                <a:gridCol w="1432560"/>
+              </a:tblGrid>
+              <a:tr h="457200">
+                <a:tc>
+                  <a:txBody>
+                    <a:bodyPr/>
+                    <a:lstStyle/>
+                    <a:p>
+                      <a:r>
+                        <a:rPr b="1" sz="1100">
+                          <a:solidFill>
+                            <a:srgbClr val="FFFFFF"/>
+                          </a:solidFill>
+                        </a:rPr>
+                        <a:t>方法</a:t>
+                      </a:r>
+                    </a:p>
+                  </a:txBody>
+                  <a:tcPr>
+                    <a:solidFill>
+                      <a:srgbClr val="1F4E79"/>
+                    </a:solidFill>
+                  </a:tcPr>
+                </a:tc>
+                <a:tc>
+                  <a:txBody>
+                    <a:bodyPr/>
+                    <a:lstStyle/>
+                    <a:p>
+                      <a:r>
+                        <a:rPr b="1" sz="1100">
+                          <a:solidFill>
+                            <a:srgbClr val="FFFFFF"/>
+                          </a:solidFill>
+                        </a:rPr>
+                        <a:t>適用場景</a:t>
+                      </a:r>
+                    </a:p>
+                  </a:txBody>
+                  <a:tcPr>
+                    <a:solidFill>
+                      <a:srgbClr val="1F4E79"/>
+                    </a:solidFill>
+                  </a:tcPr>
+                </a:tc>
+                <a:tc>
+                  <a:txBody>
+                    <a:bodyPr/>
+                    <a:lstStyle/>
+                    <a:p>
+                      <a:r>
+                        <a:rPr b="1" sz="1100">
+                          <a:solidFill>
+                            <a:srgbClr val="FFFFFF"/>
+                          </a:solidFill>
+                        </a:rPr>
+                        <a:t>備註</a:t>
+                      </a:r>
+                    </a:p>
+                  </a:txBody>
+                  <a:tcPr>
+                    <a:solidFill>
+                      <a:srgbClr val="1F4E79"/>
+                    </a:solidFill>
+                  </a:tcPr>
+                </a:tc>
+              </a:tr>
+              <a:tr h="457200">
+                <a:tc>
+                  <a:txBody>
+                    <a:bodyPr/>
+                    <a:lstStyle/>
+                    <a:p>
+                      <a:r>
+                        <a:rPr sz="1000"/>
+                        <a:t>光學檢查</a:t>
+                      </a:r>
+                    </a:p>
+                  </a:txBody>
+                  <a:tcPr/>
+                </a:tc>
+                <a:tc>
+                  <a:txBody>
+                    <a:bodyPr/>
+                    <a:lstStyle/>
+                    <a:p>
+                      <a:r>
+                        <a:rPr sz="1000"/>
+                        <a:t>外部損傷、燒毀痕跡</a:t>
+                      </a:r>
+                    </a:p>
+                  </a:txBody>
+                  <a:tcPr/>
+                </a:tc>
+                <a:tc>
+                  <a:txBody>
+                    <a:bodyPr/>
+                    <a:lstStyle/>
+                    <a:p>
+                      <a:r>
+                        <a:rPr sz="1000"/>
+                        <a:t>快速、低成本</a:t>
+                      </a:r>
+                    </a:p>
+                  </a:txBody>
+                  <a:tcPr/>
+                </a:tc>
+              </a:tr>
+              <a:tr h="457200">
+                <a:tc>
+                  <a:txBody>
+                    <a:bodyPr/>
+                    <a:lstStyle/>
+                    <a:p>
+                      <a:r>
+                        <a:rPr sz="1000"/>
+                        <a:t>SEM</a:t>
+                      </a:r>
+                    </a:p>
+                  </a:txBody>
+                  <a:tcPr/>
+                </a:tc>
+                <a:tc>
+                  <a:txBody>
+                    <a:bodyPr/>
+                    <a:lstStyle/>
+                    <a:p>
+                      <a:r>
+                        <a:rPr sz="1000"/>
+                        <a:t>晶片內部結構</a:t>
+                      </a:r>
+                    </a:p>
+                  </a:txBody>
+                  <a:tcPr/>
+                </a:tc>
+                <a:tc>
+                  <a:txBody>
+                    <a:bodyPr/>
+                    <a:lstStyle/>
+                    <a:p>
+                      <a:r>
+                        <a:rPr sz="1000"/>
+                        <a:t>需真空環境</a:t>
+                      </a:r>
+                    </a:p>
+                  </a:txBody>
+                  <a:tcPr/>
+                </a:tc>
+              </a:tr>
+              <a:tr h="457200">
+                <a:tc>
+                  <a:txBody>
+                    <a:bodyPr/>
+                    <a:lstStyle/>
+                    <a:p>
+                      <a:r>
+                        <a:rPr sz="1000"/>
+                        <a:t>FIB</a:t>
+                      </a:r>
+                    </a:p>
+                  </a:txBody>
+                  <a:tcPr/>
+                </a:tc>
+                <a:tc>
+                  <a:txBody>
+                    <a:bodyPr/>
+                    <a:lstStyle/>
+                    <a:p>
+                      <a:r>
+                        <a:rPr sz="1000"/>
+                        <a:t>橫截面分析</a:t>
+                      </a:r>
+                    </a:p>
+                  </a:txBody>
+                  <a:tcPr/>
+                </a:tc>
+                <a:tc>
+                  <a:txBody>
+                    <a:bodyPr/>
+                    <a:lstStyle/>
+                    <a:p>
+                      <a:r>
+                        <a:rPr sz="1000"/>
+                        <a:t>破壞性測試</a:t>
+                      </a:r>
+                    </a:p>
+                  </a:txBody>
+                  <a:tcPr/>
+                </a:tc>
+              </a:tr>
+              <a:tr h="457200">
+                <a:tc>
+                  <a:txBody>
+                    <a:bodyPr/>
+                    <a:lstStyle/>
+                    <a:p>
+                      <a:r>
+                        <a:rPr sz="1000"/>
+                        <a:t>X-ray</a:t>
+                      </a:r>
+                    </a:p>
+                  </a:txBody>
+                  <a:tcPr/>
+                </a:tc>
+                <a:tc>
+                  <a:txBody>
+                    <a:bodyPr/>
+                    <a:lstStyle/>
+                    <a:p>
+                      <a:r>
+                        <a:rPr sz="1000"/>
+                        <a:t>封裝裂縫、空洞</a:t>
+                      </a:r>
+                    </a:p>
+                  </a:txBody>
+                  <a:tcPr/>
+                </a:tc>
+                <a:tc>
+                  <a:txBody>
+                    <a:bodyPr/>
+                    <a:lstStyle/>
+                    <a:p>
+                      <a:r>
+                        <a:rPr sz="1000"/>
+                        <a:t>非破壞性</a:t>
+                      </a:r>
+                    </a:p>
+                  </a:txBody>
+                  <a:tcPr/>
+                </a:tc>
+              </a:tr>
+              <a:tr h="457200">
+                <a:tc>
+                  <a:txBody>
+                    <a:bodyPr/>
+                    <a:lstStyle/>
+                    <a:p>
+                      <a:r>
+                        <a:rPr sz="1000"/>
+                        <a:t>Decap</a:t>
+                      </a:r>
+                    </a:p>
+                  </a:txBody>
+                  <a:tcPr/>
+                </a:tc>
+                <a:tc>
+                  <a:txBody>
+                    <a:bodyPr/>
+                    <a:lstStyle/>
+                    <a:p>
+                      <a:r>
+                        <a:rPr sz="1000"/>
+                        <a:t>開蓋檢查</a:t>
+                      </a:r>
+                    </a:p>
+                  </a:txBody>
+                  <a:tcPr/>
+                </a:tc>
+                <a:tc>
+                  <a:txBody>
+                    <a:bodyPr/>
+                    <a:lstStyle/>
+                    <a:p>
+                      <a:r>
+                        <a:rPr sz="1000"/>
+                        <a:t>化學蝕刻</a:t>
+                      </a:r>
+                    </a:p>
+                  </a:txBody>
+                  <a:tcPr/>
+                </a:tc>
+              </a:tr>
+              <a:tr h="457200">
+                <a:tc>
+                  <a:txBody>
+                    <a:bodyPr/>
+                    <a:lstStyle/>
+                    <a:p>
+                      <a:r>
+                        <a:rPr sz="1000"/>
+                        <a:t>TDR/示波器</a:t>
+                      </a:r>
+                    </a:p>
+                  </a:txBody>
+                  <a:tcPr/>
+                </a:tc>
+                <a:tc>
+                  <a:txBody>
+                    <a:bodyPr/>
+                    <a:lstStyle/>
+                    <a:p>
+                      <a:r>
+                        <a:rPr sz="1000"/>
+                        <a:t>訊號完整性</a:t>
+                      </a:r>
+                    </a:p>
+                  </a:txBody>
+                  <a:tcPr/>
+                </a:tc>
+                <a:tc>
+                  <a:txBody>
+                    <a:bodyPr/>
+                    <a:lstStyle/>
+                    <a:p>
+                      <a:r>
+                        <a:rPr sz="1000"/>
+                        <a:t>時域反射</a:t>
+                      </a:r>
+                    </a:p>
+                  </a:txBody>
+                  <a:tcPr/>
+                </a:tc>
+              </a:tr>
+              <a:tr h="457200">
+                <a:tc>
+                  <a:txBody>
+                    <a:bodyPr/>
+                    <a:lstStyle/>
+                    <a:p>
+                      <a:r>
+                        <a:rPr sz="1000"/>
+                        <a:t>XRD/EDX</a:t>
+                      </a:r>
+                    </a:p>
+                  </a:txBody>
+                  <a:tcPr/>
+                </a:tc>
+                <a:tc>
+                  <a:txBody>
+                    <a:bodyPr/>
+                    <a:lstStyle/>
+                    <a:p>
+                      <a:r>
+                        <a:rPr sz="1000"/>
+                        <a:t>材料分析</a:t>
+                      </a:r>
+                    </a:p>
+                  </a:txBody>
+                  <a:tcPr/>
+                </a:tc>
+                <a:tc>
+                  <a:txBody>
+                    <a:bodyPr/>
+                    <a:lstStyle/>
+                    <a:p>
+                      <a:r>
+                        <a:rPr sz="1000"/>
+                        <a:t>成分鑑定</a:t>
+                      </a:r>
+                    </a:p>
+                  </a:txBody>
+                  <a:tcPr/>
+                </a:tc>
+              </a:tr>
+              <a:tr h="457200">
+                <a:tc>
+                  <a:txBody>
+                    <a:bodyPr/>
+                    <a:lstStyle/>
+                    <a:p>
+                      <a:r>
+                        <a:rPr sz="1000"/>
+                        <a:t>ESD 測試</a:t>
+                      </a:r>
+                    </a:p>
+                  </a:txBody>
+                  <a:tcPr/>
+                </a:tc>
+                <a:tc>
+                  <a:txBody>
+                    <a:bodyPr/>
+                    <a:lstStyle/>
+                    <a:p>
+                      <a:r>
+                        <a:rPr sz="1000"/>
+                        <a:t>靜電耐受</a:t>
+                      </a:r>
+                    </a:p>
+                  </a:txBody>
+                  <a:tcPr/>
+                </a:tc>
+                <a:tc>
+                  <a:txBody>
+                    <a:bodyPr/>
+                    <a:lstStyle/>
+                    <a:p>
+                      <a:r>
+                        <a:rPr sz="1000"/>
+                        <a:t>HBM/CDM 模型</a:t>
+                      </a:r>
+                    </a:p>
+                  </a:txBody>
+                  <a:tcPr/>
+                </a:tc>
+              </a:tr>
+            </a:tbl>
+          </a:graphicData>
+        </a:graphic>
+      </p:graphicFrame>
     </p:spTree>
   </p:cSld>
   <p:clrMapOvr>
@@ -11495,50 +15760,1207 @@
       <p:grpSpPr/>
       <p:sp>
         <p:nvSpPr>
-          <p:cNvPr id="2" name="Title 1"/>
+          <p:cNvPr id="2" name="Vertical Title 1"/>
           <p:cNvSpPr>
             <a:spLocks noGrp="1"/>
           </p:cNvSpPr>
           <p:nvPr>
-            <p:ph type="title"/>
+            <p:ph type="title" orient="vert"/>
           </p:nvPr>
         </p:nvSpPr>
-        <p:spPr>
-          <a:xfrm>
-            <a:off x="1463040" y="960120"/>
-            <a:ext cx="7132320" cy="1005840"/>
-          </a:xfrm>
-        </p:spPr>
+        <p:spPr/>
         <p:txBody>
           <a:bodyPr/>
           <a:lstStyle/>
           <a:p>
             <a:r>
-              <a:t>長期預防措施與改善對策</a:t>
+              <a:t>數據與證據支持</a:t>
             </a:r>
           </a:p>
         </p:txBody>
       </p:sp>
       <p:sp>
         <p:nvSpPr>
-          <p:cNvPr id="3" name="Content Placeholder 2"/>
+          <p:cNvPr id="3" name="Vertical Text Placeholder 2"/>
           <p:cNvSpPr>
             <a:spLocks noGrp="1"/>
           </p:cNvSpPr>
           <p:nvPr>
-            <p:ph idx="1"/>
+            <p:ph type="body" idx="1" orient="vert"/>
           </p:nvPr>
         </p:nvSpPr>
-        <p:spPr>
-          <a:xfrm>
-            <a:off x="1463040" y="2103120"/>
-            <a:ext cx="7132320" cy="4297680"/>
-          </a:xfrm>
-        </p:spPr>
+        <p:spPr/>
         <p:txBody>
           <a:bodyPr/>
           <a:lstStyle/>
           <a:p/>
+        </p:txBody>
+      </p:sp>
+      <p:graphicFrame>
+        <p:nvGraphicFramePr>
+          <p:cNvPr id="4" name="Table 3"/>
+          <p:cNvGraphicFramePr>
+            <a:graphicFrameLocks noGrp="1"/>
+          </p:cNvGraphicFramePr>
+          <p:nvPr/>
+        </p:nvGraphicFramePr>
+        <p:xfrm>
+          <a:off x="457200" y="1280160"/>
+          <a:ext cx="8229600" cy="2011680"/>
+        </p:xfrm>
+        <a:graphic>
+          <a:graphicData uri="http://schemas.openxmlformats.org/drawingml/2006/table">
+            <a:tbl>
+              <a:tblPr firstRow="1" bandRow="1">
+                <a:tableStyleId>{5C22544A-7EE6-4342-B048-85BDC9FD1C3A}</a:tableStyleId>
+              </a:tblPr>
+              <a:tblGrid>
+                <a:gridCol w="1645920"/>
+                <a:gridCol w="1645920"/>
+                <a:gridCol w="1645920"/>
+                <a:gridCol w="1645920"/>
+                <a:gridCol w="1645920"/>
+              </a:tblGrid>
+              <a:tr h="287382">
+                <a:tc>
+                  <a:txBody>
+                    <a:bodyPr/>
+                    <a:lstStyle/>
+                    <a:p>
+                      <a:r>
+                        <a:rPr b="1" sz="1100">
+                          <a:solidFill>
+                            <a:srgbClr val="FFFFFF"/>
+                          </a:solidFill>
+                        </a:rPr>
+                        <a:t>測試項目</a:t>
+                      </a:r>
+                    </a:p>
+                  </a:txBody>
+                  <a:tcPr>
+                    <a:solidFill>
+                      <a:srgbClr val="1F4E79"/>
+                    </a:solidFill>
+                  </a:tcPr>
+                </a:tc>
+                <a:tc>
+                  <a:txBody>
+                    <a:bodyPr/>
+                    <a:lstStyle/>
+                    <a:p>
+                      <a:r>
+                        <a:rPr b="1" sz="1100">
+                          <a:solidFill>
+                            <a:srgbClr val="FFFFFF"/>
+                          </a:solidFill>
+                        </a:rPr>
+                        <a:t>DVT 正常品</a:t>
+                      </a:r>
+                    </a:p>
+                  </a:txBody>
+                  <a:tcPr>
+                    <a:solidFill>
+                      <a:srgbClr val="1F4E79"/>
+                    </a:solidFill>
+                  </a:tcPr>
+                </a:tc>
+                <a:tc>
+                  <a:txBody>
+                    <a:bodyPr/>
+                    <a:lstStyle/>
+                    <a:p>
+                      <a:r>
+                        <a:rPr b="1" sz="1100">
+                          <a:solidFill>
+                            <a:srgbClr val="FFFFFF"/>
+                          </a:solidFill>
+                        </a:rPr>
+                        <a:t>PVT 異常品</a:t>
+                      </a:r>
+                    </a:p>
+                  </a:txBody>
+                  <a:tcPr>
+                    <a:solidFill>
+                      <a:srgbClr val="1F4E79"/>
+                    </a:solidFill>
+                  </a:tcPr>
+                </a:tc>
+                <a:tc>
+                  <a:txBody>
+                    <a:bodyPr/>
+                    <a:lstStyle/>
+                    <a:p>
+                      <a:r>
+                        <a:rPr b="1" sz="1100">
+                          <a:solidFill>
+                            <a:srgbClr val="FFFFFF"/>
+                          </a:solidFill>
+                        </a:rPr>
+                        <a:t>Spec 範圍</a:t>
+                      </a:r>
+                    </a:p>
+                  </a:txBody>
+                  <a:tcPr>
+                    <a:solidFill>
+                      <a:srgbClr val="1F4E79"/>
+                    </a:solidFill>
+                  </a:tcPr>
+                </a:tc>
+                <a:tc>
+                  <a:txBody>
+                    <a:bodyPr/>
+                    <a:lstStyle/>
+                    <a:p>
+                      <a:r>
+                        <a:rPr b="1" sz="1100">
+                          <a:solidFill>
+                            <a:srgbClr val="FFFFFF"/>
+                          </a:solidFill>
+                        </a:rPr>
+                        <a:t>判定</a:t>
+                      </a:r>
+                    </a:p>
+                  </a:txBody>
+                  <a:tcPr>
+                    <a:solidFill>
+                      <a:srgbClr val="1F4E79"/>
+                    </a:solidFill>
+                  </a:tcPr>
+                </a:tc>
+              </a:tr>
+              <a:tr h="287382">
+                <a:tc>
+                  <a:txBody>
+                    <a:bodyPr/>
+                    <a:lstStyle/>
+                    <a:p>
+                      <a:r>
+                        <a:rPr sz="1000"/>
+                        <a:t>ESD HBM (±2kV)</a:t>
+                      </a:r>
+                    </a:p>
+                  </a:txBody>
+                  <a:tcPr/>
+                </a:tc>
+                <a:tc>
+                  <a:txBody>
+                    <a:bodyPr/>
+                    <a:lstStyle/>
+                    <a:p>
+                      <a:r>
+                        <a:rPr sz="1000"/>
+                        <a:t>通過</a:t>
+                      </a:r>
+                    </a:p>
+                  </a:txBody>
+                  <a:tcPr/>
+                </a:tc>
+                <a:tc>
+                  <a:txBody>
+                    <a:bodyPr/>
+                    <a:lstStyle/>
+                    <a:p>
+                      <a:r>
+                        <a:rPr sz="1000"/>
+                        <a:t>?</a:t>
+                      </a:r>
+                    </a:p>
+                  </a:txBody>
+                  <a:tcPr/>
+                </a:tc>
+                <a:tc>
+                  <a:txBody>
+                    <a:bodyPr/>
+                    <a:lstStyle/>
+                    <a:p>
+                      <a:r>
+                        <a:rPr sz="1000"/>
+                        <a:t>±2kV</a:t>
+                      </a:r>
+                    </a:p>
+                  </a:txBody>
+                  <a:tcPr/>
+                </a:tc>
+                <a:tc>
+                  <a:txBody>
+                    <a:bodyPr/>
+                    <a:lstStyle/>
+                    <a:p>
+                      <a:r>
+                        <a:rPr sz="1000"/>
+                        <a:t>需補測</a:t>
+                      </a:r>
+                    </a:p>
+                  </a:txBody>
+                  <a:tcPr/>
+                </a:tc>
+              </a:tr>
+              <a:tr h="287382">
+                <a:tc>
+                  <a:txBody>
+                    <a:bodyPr/>
+                    <a:lstStyle/>
+                    <a:p>
+                      <a:r>
+                        <a:rPr sz="1000"/>
+                        <a:t>I/O 對地阻抗</a:t>
+                      </a:r>
+                    </a:p>
+                  </a:txBody>
+                  <a:tcPr/>
+                </a:tc>
+                <a:tc>
+                  <a:txBody>
+                    <a:bodyPr/>
+                    <a:lstStyle/>
+                    <a:p>
+                      <a:r>
+                        <a:rPr sz="1000"/>
+                        <a:t>16MΩ</a:t>
+                      </a:r>
+                    </a:p>
+                  </a:txBody>
+                  <a:tcPr/>
+                </a:tc>
+                <a:tc>
+                  <a:txBody>
+                    <a:bodyPr/>
+                    <a:lstStyle/>
+                    <a:p>
+                      <a:r>
+                        <a:rPr sz="1000"/>
+                        <a:t>5.7KΩ</a:t>
+                      </a:r>
+                    </a:p>
+                  </a:txBody>
+                  <a:tcPr/>
+                </a:tc>
+                <a:tc>
+                  <a:txBody>
+                    <a:bodyPr/>
+                    <a:lstStyle/>
+                    <a:p>
+                      <a:r>
+                        <a:rPr sz="1000"/>
+                        <a:t>&gt;1MΩ</a:t>
+                      </a:r>
+                    </a:p>
+                  </a:txBody>
+                  <a:tcPr/>
+                </a:tc>
+                <a:tc>
+                  <a:txBody>
+                    <a:bodyPr/>
+                    <a:lstStyle/>
+                    <a:p>
+                      <a:r>
+                        <a:rPr sz="1000"/>
+                        <a:t>FAIL</a:t>
+                      </a:r>
+                    </a:p>
+                  </a:txBody>
+                  <a:tcPr/>
+                </a:tc>
+              </a:tr>
+              <a:tr h="287382">
+                <a:tc>
+                  <a:txBody>
+                    <a:bodyPr/>
+                    <a:lstStyle/>
+                    <a:p>
+                      <a:r>
+                        <a:rPr sz="1000"/>
+                        <a:t>VH/VOUT 電壓</a:t>
+                      </a:r>
+                    </a:p>
+                  </a:txBody>
+                  <a:tcPr/>
+                </a:tc>
+                <a:tc>
+                  <a:txBody>
+                    <a:bodyPr/>
+                    <a:lstStyle/>
+                    <a:p>
+                      <a:r>
+                        <a:rPr sz="1000"/>
+                        <a:t>正常</a:t>
+                      </a:r>
+                    </a:p>
+                  </a:txBody>
+                  <a:tcPr/>
+                </a:tc>
+                <a:tc>
+                  <a:txBody>
+                    <a:bodyPr/>
+                    <a:lstStyle/>
+                    <a:p>
+                      <a:r>
+                        <a:rPr sz="1000"/>
+                        <a:t>0V</a:t>
+                      </a:r>
+                    </a:p>
+                  </a:txBody>
+                  <a:tcPr/>
+                </a:tc>
+                <a:tc>
+                  <a:txBody>
+                    <a:bodyPr/>
+                    <a:lstStyle/>
+                    <a:p>
+                      <a:r>
+                        <a:rPr sz="1000"/>
+                        <a:t>0.4-0.6V</a:t>
+                      </a:r>
+                    </a:p>
+                  </a:txBody>
+                  <a:tcPr/>
+                </a:tc>
+                <a:tc>
+                  <a:txBody>
+                    <a:bodyPr/>
+                    <a:lstStyle/>
+                    <a:p>
+                      <a:r>
+                        <a:rPr sz="1000"/>
+                        <a:t>FAIL</a:t>
+                      </a:r>
+                    </a:p>
+                  </a:txBody>
+                  <a:tcPr/>
+                </a:tc>
+              </a:tr>
+              <a:tr h="287382">
+                <a:tc>
+                  <a:txBody>
+                    <a:bodyPr/>
+                    <a:lstStyle/>
+                    <a:p>
+                      <a:r>
+                        <a:rPr sz="1000"/>
+                        <a:t>二極體特性</a:t>
+                      </a:r>
+                    </a:p>
+                  </a:txBody>
+                  <a:tcPr/>
+                </a:tc>
+                <a:tc>
+                  <a:txBody>
+                    <a:bodyPr/>
+                    <a:lstStyle/>
+                    <a:p>
+                      <a:r>
+                        <a:rPr sz="1000"/>
+                        <a:t>0.43V</a:t>
+                      </a:r>
+                    </a:p>
+                  </a:txBody>
+                  <a:tcPr/>
+                </a:tc>
+                <a:tc>
+                  <a:txBody>
+                    <a:bodyPr/>
+                    <a:lstStyle/>
+                    <a:p>
+                      <a:r>
+                        <a:rPr sz="1000"/>
+                        <a:t>0V</a:t>
+                      </a:r>
+                    </a:p>
+                  </a:txBody>
+                  <a:tcPr/>
+                </a:tc>
+                <a:tc>
+                  <a:txBody>
+                    <a:bodyPr/>
+                    <a:lstStyle/>
+                    <a:p>
+                      <a:r>
+                        <a:rPr sz="1000"/>
+                        <a:t>0.4-0.6V</a:t>
+                      </a:r>
+                    </a:p>
+                  </a:txBody>
+                  <a:tcPr/>
+                </a:tc>
+                <a:tc>
+                  <a:txBody>
+                    <a:bodyPr/>
+                    <a:lstStyle/>
+                    <a:p>
+                      <a:r>
+                        <a:rPr sz="1000"/>
+                        <a:t>FAIL</a:t>
+                      </a:r>
+                    </a:p>
+                  </a:txBody>
+                  <a:tcPr/>
+                </a:tc>
+              </a:tr>
+              <a:tr h="287382">
+                <a:tc>
+                  <a:txBody>
+                    <a:bodyPr/>
+                    <a:lstStyle/>
+                    <a:p>
+                      <a:r>
+                        <a:rPr sz="1000"/>
+                        <a:t>FW 讀取</a:t>
+                      </a:r>
+                    </a:p>
+                  </a:txBody>
+                  <a:tcPr/>
+                </a:tc>
+                <a:tc>
+                  <a:txBody>
+                    <a:bodyPr/>
+                    <a:lstStyle/>
+                    <a:p>
+                      <a:r>
+                        <a:rPr sz="1000"/>
+                        <a:t>正確</a:t>
+                      </a:r>
+                    </a:p>
+                  </a:txBody>
+                  <a:tcPr/>
+                </a:tc>
+                <a:tc>
+                  <a:txBody>
+                    <a:bodyPr/>
+                    <a:lstStyle/>
+                    <a:p>
+                      <a:r>
+                        <a:rPr sz="1000"/>
+                        <a:t>正確</a:t>
+                      </a:r>
+                    </a:p>
+                  </a:txBody>
+                  <a:tcPr/>
+                </a:tc>
+                <a:tc>
+                  <a:txBody>
+                    <a:bodyPr/>
+                    <a:lstStyle/>
+                    <a:p>
+                      <a:r>
+                        <a:rPr sz="1000"/>
+                        <a:t>100%</a:t>
+                      </a:r>
+                    </a:p>
+                  </a:txBody>
+                  <a:tcPr/>
+                </a:tc>
+                <a:tc>
+                  <a:txBody>
+                    <a:bodyPr/>
+                    <a:lstStyle/>
+                    <a:p>
+                      <a:r>
+                        <a:rPr sz="1000"/>
+                        <a:t>PASS</a:t>
+                      </a:r>
+                    </a:p>
+                  </a:txBody>
+                  <a:tcPr/>
+                </a:tc>
+              </a:tr>
+              <a:tr h="287388">
+                <a:tc>
+                  <a:txBody>
+                    <a:bodyPr/>
+                    <a:lstStyle/>
+                    <a:p>
+                      <a:r>
+                        <a:rPr sz="1000"/>
+                        <a:t>外觀檢查</a:t>
+                      </a:r>
+                    </a:p>
+                  </a:txBody>
+                  <a:tcPr/>
+                </a:tc>
+                <a:tc>
+                  <a:txBody>
+                    <a:bodyPr/>
+                    <a:lstStyle/>
+                    <a:p>
+                      <a:r>
+                        <a:rPr sz="1000"/>
+                        <a:t>正常</a:t>
+                      </a:r>
+                    </a:p>
+                  </a:txBody>
+                  <a:tcPr/>
+                </a:tc>
+                <a:tc>
+                  <a:txBody>
+                    <a:bodyPr/>
+                    <a:lstStyle/>
+                    <a:p>
+                      <a:r>
+                        <a:rPr sz="1000"/>
+                        <a:t>正常</a:t>
+                      </a:r>
+                    </a:p>
+                  </a:txBody>
+                  <a:tcPr/>
+                </a:tc>
+                <a:tc>
+                  <a:txBody>
+                    <a:bodyPr/>
+                    <a:lstStyle/>
+                    <a:p>
+                      <a:r>
+                        <a:rPr sz="1000"/>
+                        <a:t>無損傷</a:t>
+                      </a:r>
+                    </a:p>
+                  </a:txBody>
+                  <a:tcPr/>
+                </a:tc>
+                <a:tc>
+                  <a:txBody>
+                    <a:bodyPr/>
+                    <a:lstStyle/>
+                    <a:p>
+                      <a:r>
+                        <a:rPr sz="1000"/>
+                        <a:t>PASS</a:t>
+                      </a:r>
+                    </a:p>
+                  </a:txBody>
+                  <a:tcPr/>
+                </a:tc>
+              </a:tr>
+            </a:tbl>
+          </a:graphicData>
+        </a:graphic>
+      </p:graphicFrame>
+      <p:sp>
+        <p:nvSpPr>
+          <p:cNvPr id="5" name="Rectangle 4"/>
+          <p:cNvSpPr/>
+          <p:nvPr/>
+        </p:nvSpPr>
+        <p:spPr>
+          <a:xfrm>
+            <a:off x="457200" y="3566160"/>
+            <a:ext cx="228600" cy="228600"/>
+          </a:xfrm>
+          <a:prstGeom prst="rect">
+            <a:avLst/>
+          </a:prstGeom>
+          <a:solidFill>
+            <a:srgbClr val="D9D9D9"/>
+          </a:solidFill>
+          <a:ln>
+            <a:solidFill>
+              <a:srgbClr val="808080"/>
+            </a:solidFill>
+          </a:ln>
+        </p:spPr>
+        <p:style>
+          <a:lnRef idx="1">
+            <a:schemeClr val="accent1"/>
+          </a:lnRef>
+          <a:fillRef idx="3">
+            <a:schemeClr val="accent1"/>
+          </a:fillRef>
+          <a:effectRef idx="2">
+            <a:schemeClr val="accent1"/>
+          </a:effectRef>
+          <a:fontRef idx="minor">
+            <a:schemeClr val="lt1"/>
+          </a:fontRef>
+        </p:style>
+        <p:txBody>
+          <a:bodyPr rtlCol="0" anchor="ctr" wrap="square" lIns="45720" rIns="45720" tIns="18288" bIns="18288"/>
+          <a:lstStyle/>
+          <a:p>
+            <a:pPr algn="ctr"/>
+            <a:r>
+              <a:rPr sz="1400" b="1"/>
+              <a:t>☐</a:t>
+            </a:r>
+          </a:p>
+        </p:txBody>
+      </p:sp>
+      <p:sp>
+        <p:nvSpPr>
+          <p:cNvPr id="6" name="TextBox 5"/>
+          <p:cNvSpPr txBox="1"/>
+          <p:nvPr/>
+        </p:nvSpPr>
+        <p:spPr>
+          <a:xfrm>
+            <a:off x="777240" y="3566160"/>
+            <a:ext cx="7909560" cy="365760"/>
+          </a:xfrm>
+          <a:prstGeom prst="rect">
+            <a:avLst/>
+          </a:prstGeom>
+          <a:noFill/>
+        </p:spPr>
+        <p:txBody>
+          <a:bodyPr wrap="square" anchor="ctr">
+            <a:spAutoFit/>
+          </a:bodyPr>
+          <a:lstStyle/>
+          <a:p>
+            <a:r>
+              <a:rPr sz="1100">
+                <a:solidFill>
+                  <a:srgbClr val="C00000"/>
+                </a:solidFill>
+              </a:rPr>
+              <a:t>圖片解析度 ≥ 1000x(建議 ≥ 2000x 以利 IC Marking 辨識)</a:t>
+            </a:r>
+          </a:p>
+        </p:txBody>
+      </p:sp>
+      <p:sp>
+        <p:nvSpPr>
+          <p:cNvPr id="7" name="Rectangle 6"/>
+          <p:cNvSpPr/>
+          <p:nvPr/>
+        </p:nvSpPr>
+        <p:spPr>
+          <a:xfrm>
+            <a:off x="457200" y="3931920"/>
+            <a:ext cx="228600" cy="228600"/>
+          </a:xfrm>
+          <a:prstGeom prst="rect">
+            <a:avLst/>
+          </a:prstGeom>
+          <a:solidFill>
+            <a:srgbClr val="D9D9D9"/>
+          </a:solidFill>
+          <a:ln>
+            <a:solidFill>
+              <a:srgbClr val="808080"/>
+            </a:solidFill>
+          </a:ln>
+        </p:spPr>
+        <p:style>
+          <a:lnRef idx="1">
+            <a:schemeClr val="accent1"/>
+          </a:lnRef>
+          <a:fillRef idx="3">
+            <a:schemeClr val="accent1"/>
+          </a:fillRef>
+          <a:effectRef idx="2">
+            <a:schemeClr val="accent1"/>
+          </a:effectRef>
+          <a:fontRef idx="minor">
+            <a:schemeClr val="lt1"/>
+          </a:fontRef>
+        </p:style>
+        <p:txBody>
+          <a:bodyPr rtlCol="0" anchor="ctr" wrap="square" lIns="45720" rIns="45720" tIns="18288" bIns="18288"/>
+          <a:lstStyle/>
+          <a:p>
+            <a:pPr algn="ctr"/>
+            <a:r>
+              <a:rPr sz="1400" b="1"/>
+              <a:t>☐</a:t>
+            </a:r>
+          </a:p>
+        </p:txBody>
+      </p:sp>
+      <p:sp>
+        <p:nvSpPr>
+          <p:cNvPr id="8" name="TextBox 7"/>
+          <p:cNvSpPr txBox="1"/>
+          <p:nvPr/>
+        </p:nvSpPr>
+        <p:spPr>
+          <a:xfrm>
+            <a:off x="777240" y="3931920"/>
+            <a:ext cx="7909560" cy="365760"/>
+          </a:xfrm>
+          <a:prstGeom prst="rect">
+            <a:avLst/>
+          </a:prstGeom>
+          <a:noFill/>
+        </p:spPr>
+        <p:txBody>
+          <a:bodyPr wrap="square" anchor="ctr">
+            <a:spAutoFit/>
+          </a:bodyPr>
+          <a:lstStyle/>
+          <a:p>
+            <a:r>
+              <a:rPr sz="1100">
+                <a:solidFill>
+                  <a:srgbClr val="C00000"/>
+                </a:solidFill>
+              </a:rPr>
+              <a:t>對焦清晰,IC 標籤、Marking 可清楚辨識</a:t>
+            </a:r>
+          </a:p>
+        </p:txBody>
+      </p:sp>
+      <p:sp>
+        <p:nvSpPr>
+          <p:cNvPr id="9" name="Rectangle 8"/>
+          <p:cNvSpPr/>
+          <p:nvPr/>
+        </p:nvSpPr>
+        <p:spPr>
+          <a:xfrm>
+            <a:off x="457200" y="4297680"/>
+            <a:ext cx="228600" cy="228600"/>
+          </a:xfrm>
+          <a:prstGeom prst="rect">
+            <a:avLst/>
+          </a:prstGeom>
+          <a:solidFill>
+            <a:srgbClr val="D9D9D9"/>
+          </a:solidFill>
+          <a:ln>
+            <a:solidFill>
+              <a:srgbClr val="808080"/>
+            </a:solidFill>
+          </a:ln>
+        </p:spPr>
+        <p:style>
+          <a:lnRef idx="1">
+            <a:schemeClr val="accent1"/>
+          </a:lnRef>
+          <a:fillRef idx="3">
+            <a:schemeClr val="accent1"/>
+          </a:fillRef>
+          <a:effectRef idx="2">
+            <a:schemeClr val="accent1"/>
+          </a:effectRef>
+          <a:fontRef idx="minor">
+            <a:schemeClr val="lt1"/>
+          </a:fontRef>
+        </p:style>
+        <p:txBody>
+          <a:bodyPr rtlCol="0" anchor="ctr" wrap="square" lIns="45720" rIns="45720" tIns="18288" bIns="18288"/>
+          <a:lstStyle/>
+          <a:p>
+            <a:pPr algn="ctr"/>
+            <a:r>
+              <a:rPr sz="1400" b="1"/>
+              <a:t>☐</a:t>
+            </a:r>
+          </a:p>
+        </p:txBody>
+      </p:sp>
+      <p:sp>
+        <p:nvSpPr>
+          <p:cNvPr id="10" name="TextBox 9"/>
+          <p:cNvSpPr txBox="1"/>
+          <p:nvPr/>
+        </p:nvSpPr>
+        <p:spPr>
+          <a:xfrm>
+            <a:off x="777240" y="4297680"/>
+            <a:ext cx="7909560" cy="365760"/>
+          </a:xfrm>
+          <a:prstGeom prst="rect">
+            <a:avLst/>
+          </a:prstGeom>
+          <a:noFill/>
+        </p:spPr>
+        <p:txBody>
+          <a:bodyPr wrap="square" anchor="ctr">
+            <a:spAutoFit/>
+          </a:bodyPr>
+          <a:lstStyle/>
+          <a:p>
+            <a:r>
+              <a:rPr sz="1100">
+                <a:solidFill>
+                  <a:srgbClr val="ED7D31"/>
+                </a:solidFill>
+              </a:rPr>
+              <a:t>含比例尺(scale bar),方便評估損傷範圍</a:t>
+            </a:r>
+          </a:p>
+        </p:txBody>
+      </p:sp>
+      <p:sp>
+        <p:nvSpPr>
+          <p:cNvPr id="11" name="Rectangle 10"/>
+          <p:cNvSpPr/>
+          <p:nvPr/>
+        </p:nvSpPr>
+        <p:spPr>
+          <a:xfrm>
+            <a:off x="457200" y="4663440"/>
+            <a:ext cx="228600" cy="228600"/>
+          </a:xfrm>
+          <a:prstGeom prst="rect">
+            <a:avLst/>
+          </a:prstGeom>
+          <a:solidFill>
+            <a:srgbClr val="D9D9D9"/>
+          </a:solidFill>
+          <a:ln>
+            <a:solidFill>
+              <a:srgbClr val="808080"/>
+            </a:solidFill>
+          </a:ln>
+        </p:spPr>
+        <p:style>
+          <a:lnRef idx="1">
+            <a:schemeClr val="accent1"/>
+          </a:lnRef>
+          <a:fillRef idx="3">
+            <a:schemeClr val="accent1"/>
+          </a:fillRef>
+          <a:effectRef idx="2">
+            <a:schemeClr val="accent1"/>
+          </a:effectRef>
+          <a:fontRef idx="minor">
+            <a:schemeClr val="lt1"/>
+          </a:fontRef>
+        </p:style>
+        <p:txBody>
+          <a:bodyPr rtlCol="0" anchor="ctr" wrap="square" lIns="45720" rIns="45720" tIns="18288" bIns="18288"/>
+          <a:lstStyle/>
+          <a:p>
+            <a:pPr algn="ctr"/>
+            <a:r>
+              <a:rPr sz="1400" b="1"/>
+              <a:t>☐</a:t>
+            </a:r>
+          </a:p>
+        </p:txBody>
+      </p:sp>
+      <p:sp>
+        <p:nvSpPr>
+          <p:cNvPr id="12" name="TextBox 11"/>
+          <p:cNvSpPr txBox="1"/>
+          <p:nvPr/>
+        </p:nvSpPr>
+        <p:spPr>
+          <a:xfrm>
+            <a:off x="777240" y="4663440"/>
+            <a:ext cx="7909560" cy="365760"/>
+          </a:xfrm>
+          <a:prstGeom prst="rect">
+            <a:avLst/>
+          </a:prstGeom>
+          <a:noFill/>
+        </p:spPr>
+        <p:txBody>
+          <a:bodyPr wrap="square" anchor="ctr">
+            <a:spAutoFit/>
+          </a:bodyPr>
+          <a:lstStyle/>
+          <a:p>
+            <a:r>
+              <a:rPr sz="1100">
+                <a:solidFill>
+                  <a:srgbClr val="ED7D31"/>
+                </a:solidFill>
+              </a:rPr>
+              <a:t>異常點明確標註(箭頭、方框、文字說明)</a:t>
+            </a:r>
+          </a:p>
+        </p:txBody>
+      </p:sp>
+      <p:sp>
+        <p:nvSpPr>
+          <p:cNvPr id="13" name="Rectangle 12"/>
+          <p:cNvSpPr/>
+          <p:nvPr/>
+        </p:nvSpPr>
+        <p:spPr>
+          <a:xfrm>
+            <a:off x="457200" y="5029200"/>
+            <a:ext cx="228600" cy="228600"/>
+          </a:xfrm>
+          <a:prstGeom prst="rect">
+            <a:avLst/>
+          </a:prstGeom>
+          <a:solidFill>
+            <a:srgbClr val="D9D9D9"/>
+          </a:solidFill>
+          <a:ln>
+            <a:solidFill>
+              <a:srgbClr val="808080"/>
+            </a:solidFill>
+          </a:ln>
+        </p:spPr>
+        <p:style>
+          <a:lnRef idx="1">
+            <a:schemeClr val="accent1"/>
+          </a:lnRef>
+          <a:fillRef idx="3">
+            <a:schemeClr val="accent1"/>
+          </a:fillRef>
+          <a:effectRef idx="2">
+            <a:schemeClr val="accent1"/>
+          </a:effectRef>
+          <a:fontRef idx="minor">
+            <a:schemeClr val="lt1"/>
+          </a:fontRef>
+        </p:style>
+        <p:txBody>
+          <a:bodyPr rtlCol="0" anchor="ctr" wrap="square" lIns="45720" rIns="45720" tIns="18288" bIns="18288"/>
+          <a:lstStyle/>
+          <a:p>
+            <a:pPr algn="ctr"/>
+            <a:r>
+              <a:rPr sz="1400" b="1"/>
+              <a:t>☐</a:t>
+            </a:r>
+          </a:p>
+        </p:txBody>
+      </p:sp>
+      <p:sp>
+        <p:nvSpPr>
+          <p:cNvPr id="14" name="TextBox 13"/>
+          <p:cNvSpPr txBox="1"/>
+          <p:nvPr/>
+        </p:nvSpPr>
+        <p:spPr>
+          <a:xfrm>
+            <a:off x="777240" y="5029200"/>
+            <a:ext cx="7909560" cy="365760"/>
+          </a:xfrm>
+          <a:prstGeom prst="rect">
+            <a:avLst/>
+          </a:prstGeom>
+          <a:noFill/>
+        </p:spPr>
+        <p:txBody>
+          <a:bodyPr wrap="square" anchor="ctr">
+            <a:spAutoFit/>
+          </a:bodyPr>
+          <a:lstStyle/>
+          <a:p>
+            <a:r>
+              <a:rPr sz="1100">
+                <a:solidFill>
+                  <a:srgbClr val="1F4E79"/>
+                </a:solidFill>
+              </a:rPr>
+              <a:t>對照組(Golden Sample)與異常品並列比較</a:t>
+            </a:r>
+          </a:p>
+        </p:txBody>
+      </p:sp>
+      <p:sp>
+        <p:nvSpPr>
+          <p:cNvPr id="15" name="Rectangle 14"/>
+          <p:cNvSpPr/>
+          <p:nvPr/>
+        </p:nvSpPr>
+        <p:spPr>
+          <a:xfrm>
+            <a:off x="457200" y="5394960"/>
+            <a:ext cx="228600" cy="228600"/>
+          </a:xfrm>
+          <a:prstGeom prst="rect">
+            <a:avLst/>
+          </a:prstGeom>
+          <a:solidFill>
+            <a:srgbClr val="D9D9D9"/>
+          </a:solidFill>
+          <a:ln>
+            <a:solidFill>
+              <a:srgbClr val="808080"/>
+            </a:solidFill>
+          </a:ln>
+        </p:spPr>
+        <p:style>
+          <a:lnRef idx="1">
+            <a:schemeClr val="accent1"/>
+          </a:lnRef>
+          <a:fillRef idx="3">
+            <a:schemeClr val="accent1"/>
+          </a:fillRef>
+          <a:effectRef idx="2">
+            <a:schemeClr val="accent1"/>
+          </a:effectRef>
+          <a:fontRef idx="minor">
+            <a:schemeClr val="lt1"/>
+          </a:fontRef>
+        </p:style>
+        <p:txBody>
+          <a:bodyPr rtlCol="0" anchor="ctr" wrap="square" lIns="45720" rIns="45720" tIns="18288" bIns="18288"/>
+          <a:lstStyle/>
+          <a:p>
+            <a:pPr algn="ctr"/>
+            <a:r>
+              <a:rPr sz="1400" b="1"/>
+              <a:t>☐</a:t>
+            </a:r>
+          </a:p>
+        </p:txBody>
+      </p:sp>
+      <p:sp>
+        <p:nvSpPr>
+          <p:cNvPr id="16" name="TextBox 15"/>
+          <p:cNvSpPr txBox="1"/>
+          <p:nvPr/>
+        </p:nvSpPr>
+        <p:spPr>
+          <a:xfrm>
+            <a:off x="777240" y="5394960"/>
+            <a:ext cx="7909560" cy="365760"/>
+          </a:xfrm>
+          <a:prstGeom prst="rect">
+            <a:avLst/>
+          </a:prstGeom>
+          <a:noFill/>
+        </p:spPr>
+        <p:txBody>
+          <a:bodyPr wrap="square" anchor="ctr">
+            <a:spAutoFit/>
+          </a:bodyPr>
+          <a:lstStyle/>
+          <a:p>
+            <a:r>
+              <a:rPr sz="1100">
+                <a:solidFill>
+                  <a:srgbClr val="1F4E79"/>
+                </a:solidFill>
+              </a:rPr>
+              <a:t>每個量化數據有來源追溯(儀器型號、測試條件、日期)</a:t>
+            </a:r>
+          </a:p>
+        </p:txBody>
+      </p:sp>
+      <p:sp>
+        <p:nvSpPr>
+          <p:cNvPr id="17" name="Rectangle 16"/>
+          <p:cNvSpPr/>
+          <p:nvPr/>
+        </p:nvSpPr>
+        <p:spPr>
+          <a:xfrm>
+            <a:off x="457200" y="5760720"/>
+            <a:ext cx="228600" cy="228600"/>
+          </a:xfrm>
+          <a:prstGeom prst="rect">
+            <a:avLst/>
+          </a:prstGeom>
+          <a:solidFill>
+            <a:srgbClr val="D9D9D9"/>
+          </a:solidFill>
+          <a:ln>
+            <a:solidFill>
+              <a:srgbClr val="808080"/>
+            </a:solidFill>
+          </a:ln>
+        </p:spPr>
+        <p:style>
+          <a:lnRef idx="1">
+            <a:schemeClr val="accent1"/>
+          </a:lnRef>
+          <a:fillRef idx="3">
+            <a:schemeClr val="accent1"/>
+          </a:fillRef>
+          <a:effectRef idx="2">
+            <a:schemeClr val="accent1"/>
+          </a:effectRef>
+          <a:fontRef idx="minor">
+            <a:schemeClr val="lt1"/>
+          </a:fontRef>
+        </p:style>
+        <p:txBody>
+          <a:bodyPr rtlCol="0" anchor="ctr" wrap="square" lIns="45720" rIns="45720" tIns="18288" bIns="18288"/>
+          <a:lstStyle/>
+          <a:p>
+            <a:pPr algn="ctr"/>
+            <a:r>
+              <a:rPr sz="1400" b="1"/>
+              <a:t>☐</a:t>
+            </a:r>
+          </a:p>
+        </p:txBody>
+      </p:sp>
+      <p:sp>
+        <p:nvSpPr>
+          <p:cNvPr id="18" name="TextBox 17"/>
+          <p:cNvSpPr txBox="1"/>
+          <p:nvPr/>
+        </p:nvSpPr>
+        <p:spPr>
+          <a:xfrm>
+            <a:off x="777240" y="5760720"/>
+            <a:ext cx="7909560" cy="365760"/>
+          </a:xfrm>
+          <a:prstGeom prst="rect">
+            <a:avLst/>
+          </a:prstGeom>
+          <a:noFill/>
+        </p:spPr>
+        <p:txBody>
+          <a:bodyPr wrap="square" anchor="ctr">
+            <a:spAutoFit/>
+          </a:bodyPr>
+          <a:lstStyle/>
+          <a:p>
+            <a:r>
+              <a:rPr sz="1100">
+                <a:solidFill>
+                  <a:srgbClr val="70AD47"/>
+                </a:solidFill>
+              </a:rPr>
+              <a:t>統計顯著性(p-value、CI)支援結論(非僅描述)</a:t>
+            </a:r>
+          </a:p>
+        </p:txBody>
+      </p:sp>
+    </p:spTree>
+  </p:cSld>
+  <p:clrMapOvr>
+    <a:masterClrMapping/>
+  </p:clrMapOvr>
+</p:sld>
+</file>
+
+<file path=ppt/slides/slide9.xml><?xml version="1.0" encoding="utf-8"?>
+<p:sld xmlns:a="http://schemas.openxmlformats.org/drawingml/2006/main" xmlns:p="http://schemas.openxmlformats.org/presentationml/2006/main" xmlns:r="http://schemas.openxmlformats.org/officeDocument/2006/relationships">
+  <p:cSld>
+    <p:spTree>
+      <p:nvGrpSpPr>
+        <p:cNvPr id="1" name=""/>
+        <p:cNvGrpSpPr/>
+        <p:nvPr/>
+      </p:nvGrpSpPr>
+      <p:grpSpPr/>
+      <p:sp>
+        <p:nvSpPr>
+          <p:cNvPr id="2" name="Vertical Title 1"/>
+          <p:cNvSpPr>
+            <a:spLocks noGrp="1"/>
+          </p:cNvSpPr>
+          <p:nvPr>
+            <p:ph type="title" orient="vert"/>
+          </p:nvPr>
+        </p:nvSpPr>
+        <p:spPr/>
+        <p:txBody>
+          <a:bodyPr/>
+          <a:lstStyle/>
+          <a:p>
+            <a:r>
+              <a:t>5-Why 根因推導</a:t>
+            </a:r>
+          </a:p>
+        </p:txBody>
+      </p:sp>
+      <p:sp>
+        <p:nvSpPr>
+          <p:cNvPr id="3" name="Vertical Text Placeholder 2"/>
+          <p:cNvSpPr>
+            <a:spLocks noGrp="1"/>
+          </p:cNvSpPr>
+          <p:nvPr>
+            <p:ph type="body" idx="1" orient="vert"/>
+          </p:nvPr>
+        </p:nvSpPr>
+        <p:spPr/>
+        <p:txBody>
+          <a:bodyPr/>
+          <a:lstStyle/>
           <a:p>
             <a:pPr>
               <a:defRPr b="1" sz="1800">
@@ -11548,18 +16970,23 @@
               </a:defRPr>
             </a:pPr>
             <a:r>
-              <a:t>擬議改善對策項目：</a:t>
+              <a:t>為什麼需要 5-Why:</a:t>
             </a:r>
           </a:p>
           <a:p>
             <a:pPr>
-              <a:spcAft>
-                <a:spcPts val="1000"/>
-              </a:spcAft>
               <a:defRPr sz="1400"/>
             </a:pPr>
             <a:r>
-              <a:t>報告中完全缺失改善對策、預防措施與驗證計畫。</a:t>
+              <a:t>採用了排除法(移除TVS、移除IC)進行初步分析，邏輯尚屬合理，但缺乏更深層的物理分析(如SEM或X-ray)來確認IC內部的損傷機制。</a:t>
+            </a:r>
+          </a:p>
+          <a:p>
+            <a:pPr>
+              <a:defRPr sz="1400"/>
+            </a:pPr>
+            <a:r>
+              <a:t>結論僅停留在「推測」為I/O損傷，缺乏因果關係的深度分析。未說明為何會造成損傷(如ESD、過電壓或生產製程問題)，未應用5-Why分析。</a:t>
             </a:r>
           </a:p>
           <a:p>
@@ -11568,31 +16995,468 @@
               <a:defRPr b="1"/>
             </a:pPr>
             <a:r>
-              <a:t>[標準化與監測計畫]</a:t>
-            </a:r>
-          </a:p>
-          <a:p>
-            <a:pPr lvl="1">
+              <a:t>[推導流程]</a:t>
+            </a:r>
+          </a:p>
+          <a:p>
+            <a:pPr>
               <a:defRPr sz="1200"/>
             </a:pPr>
             <a:r>
-              <a:t>• 建立入料檢驗 (IQC) SOP 與測試閾值</a:t>
-            </a:r>
-          </a:p>
-          <a:p>
-            <a:pPr lvl="1">
+              <a:t>• 設定 DVT 正常品 vs PVT 異常品之對照組</a:t>
+            </a:r>
+          </a:p>
+          <a:p>
+            <a:pPr>
               <a:defRPr sz="1200"/>
             </a:pPr>
             <a:r>
-              <a:t>• 導入自動化監測設備於生產線</a:t>
-            </a:r>
-          </a:p>
-          <a:p>
-            <a:pPr lvl="1">
+              <a:t>• 使用獨立樣本 t 檢定驗證參數顯著性 (p &lt; 0.05)</a:t>
+            </a:r>
+          </a:p>
+          <a:p>
+            <a:pPr>
               <a:defRPr sz="1200"/>
             </a:pPr>
             <a:r>
-              <a:t>• 將此案例納入知識管理資料庫以利後續追蹤</a:t>
+              <a:t>• 確保統計證據支持最終提到的根本原因</a:t>
+            </a:r>
+          </a:p>
+        </p:txBody>
+      </p:sp>
+      <p:sp>
+        <p:nvSpPr>
+          <p:cNvPr id="4" name="Rounded Rectangle 3"/>
+          <p:cNvSpPr/>
+          <p:nvPr/>
+        </p:nvSpPr>
+        <p:spPr>
+          <a:xfrm>
+            <a:off x="548640" y="4114800"/>
+            <a:ext cx="1463040" cy="2286000"/>
+          </a:xfrm>
+          <a:prstGeom prst="roundRect">
+            <a:avLst/>
+          </a:prstGeom>
+          <a:solidFill>
+            <a:srgbClr val="1F4E79"/>
+          </a:solidFill>
+          <a:ln>
+            <a:solidFill>
+              <a:srgbClr val="1F4E79"/>
+            </a:solidFill>
+          </a:ln>
+        </p:spPr>
+        <p:style>
+          <a:lnRef idx="1">
+            <a:schemeClr val="accent1"/>
+          </a:lnRef>
+          <a:fillRef idx="3">
+            <a:schemeClr val="accent1"/>
+          </a:fillRef>
+          <a:effectRef idx="2">
+            <a:schemeClr val="accent1"/>
+          </a:effectRef>
+          <a:fontRef idx="minor">
+            <a:schemeClr val="lt1"/>
+          </a:fontRef>
+        </p:style>
+        <p:txBody>
+          <a:bodyPr rtlCol="0" anchor="ctr" wrap="square" lIns="45720" rIns="45720" tIns="18288" bIns="18288"/>
+          <a:lstStyle/>
+          <a:p>
+            <a:pPr algn="ctr"/>
+            <a:r>
+              <a:rPr sz="1100" b="1">
+                <a:solidFill>
+                  <a:srgbClr val="FFFFFF"/>
+                </a:solidFill>
+              </a:rPr>
+              <a:t>採用了排除法(移除TVS、移除</a:t>
+            </a:r>
+          </a:p>
+        </p:txBody>
+      </p:sp>
+      <p:sp>
+        <p:nvSpPr>
+          <p:cNvPr id="5" name="Right Arrow 4"/>
+          <p:cNvSpPr/>
+          <p:nvPr/>
+        </p:nvSpPr>
+        <p:spPr>
+          <a:xfrm>
+            <a:off x="1965960" y="5166360"/>
+            <a:ext cx="182880" cy="182880"/>
+          </a:xfrm>
+          <a:prstGeom prst="rightArrow">
+            <a:avLst/>
+          </a:prstGeom>
+          <a:solidFill>
+            <a:srgbClr val="D9D9D9"/>
+          </a:solidFill>
+          <a:ln>
+            <a:noFill/>
+          </a:ln>
+        </p:spPr>
+        <p:style>
+          <a:lnRef idx="1">
+            <a:schemeClr val="accent1"/>
+          </a:lnRef>
+          <a:fillRef idx="3">
+            <a:schemeClr val="accent1"/>
+          </a:fillRef>
+          <a:effectRef idx="2">
+            <a:schemeClr val="accent1"/>
+          </a:effectRef>
+          <a:fontRef idx="minor">
+            <a:schemeClr val="lt1"/>
+          </a:fontRef>
+        </p:style>
+        <p:txBody>
+          <a:bodyPr rtlCol="0" anchor="ctr"/>
+          <a:lstStyle/>
+          <a:p>
+            <a:pPr algn="ctr"/>
+          </a:p>
+        </p:txBody>
+      </p:sp>
+      <p:sp>
+        <p:nvSpPr>
+          <p:cNvPr id="6" name="Rounded Rectangle 5"/>
+          <p:cNvSpPr/>
+          <p:nvPr/>
+        </p:nvSpPr>
+        <p:spPr>
+          <a:xfrm>
+            <a:off x="2194560" y="4114800"/>
+            <a:ext cx="1463040" cy="2286000"/>
+          </a:xfrm>
+          <a:prstGeom prst="roundRect">
+            <a:avLst/>
+          </a:prstGeom>
+          <a:solidFill>
+            <a:srgbClr val="1F4E79"/>
+          </a:solidFill>
+          <a:ln>
+            <a:solidFill>
+              <a:srgbClr val="1F4E79"/>
+            </a:solidFill>
+          </a:ln>
+        </p:spPr>
+        <p:style>
+          <a:lnRef idx="1">
+            <a:schemeClr val="accent1"/>
+          </a:lnRef>
+          <a:fillRef idx="3">
+            <a:schemeClr val="accent1"/>
+          </a:fillRef>
+          <a:effectRef idx="2">
+            <a:schemeClr val="accent1"/>
+          </a:effectRef>
+          <a:fontRef idx="minor">
+            <a:schemeClr val="lt1"/>
+          </a:fontRef>
+        </p:style>
+        <p:txBody>
+          <a:bodyPr rtlCol="0" anchor="ctr" wrap="square" lIns="45720" rIns="45720" tIns="18288" bIns="18288"/>
+          <a:lstStyle/>
+          <a:p>
+            <a:pPr algn="ctr"/>
+            <a:r>
+              <a:rPr sz="1100" b="1">
+                <a:solidFill>
+                  <a:srgbClr val="FFFFFF"/>
+                </a:solidFill>
+              </a:rPr>
+              <a:t>結論僅停留在「推測」為I/O損</a:t>
+            </a:r>
+          </a:p>
+        </p:txBody>
+      </p:sp>
+      <p:sp>
+        <p:nvSpPr>
+          <p:cNvPr id="7" name="Right Arrow 6"/>
+          <p:cNvSpPr/>
+          <p:nvPr/>
+        </p:nvSpPr>
+        <p:spPr>
+          <a:xfrm>
+            <a:off x="3611880" y="5166360"/>
+            <a:ext cx="182880" cy="182880"/>
+          </a:xfrm>
+          <a:prstGeom prst="rightArrow">
+            <a:avLst/>
+          </a:prstGeom>
+          <a:solidFill>
+            <a:srgbClr val="D9D9D9"/>
+          </a:solidFill>
+          <a:ln>
+            <a:noFill/>
+          </a:ln>
+        </p:spPr>
+        <p:style>
+          <a:lnRef idx="1">
+            <a:schemeClr val="accent1"/>
+          </a:lnRef>
+          <a:fillRef idx="3">
+            <a:schemeClr val="accent1"/>
+          </a:fillRef>
+          <a:effectRef idx="2">
+            <a:schemeClr val="accent1"/>
+          </a:effectRef>
+          <a:fontRef idx="minor">
+            <a:schemeClr val="lt1"/>
+          </a:fontRef>
+        </p:style>
+        <p:txBody>
+          <a:bodyPr rtlCol="0" anchor="ctr"/>
+          <a:lstStyle/>
+          <a:p>
+            <a:pPr algn="ctr"/>
+          </a:p>
+        </p:txBody>
+      </p:sp>
+      <p:sp>
+        <p:nvSpPr>
+          <p:cNvPr id="8" name="Rounded Rectangle 7"/>
+          <p:cNvSpPr/>
+          <p:nvPr/>
+        </p:nvSpPr>
+        <p:spPr>
+          <a:xfrm>
+            <a:off x="3840480" y="4114800"/>
+            <a:ext cx="1463040" cy="2286000"/>
+          </a:xfrm>
+          <a:prstGeom prst="roundRect">
+            <a:avLst/>
+          </a:prstGeom>
+          <a:solidFill>
+            <a:srgbClr val="1F4E79"/>
+          </a:solidFill>
+          <a:ln>
+            <a:solidFill>
+              <a:srgbClr val="1F4E79"/>
+            </a:solidFill>
+          </a:ln>
+        </p:spPr>
+        <p:style>
+          <a:lnRef idx="1">
+            <a:schemeClr val="accent1"/>
+          </a:lnRef>
+          <a:fillRef idx="3">
+            <a:schemeClr val="accent1"/>
+          </a:fillRef>
+          <a:effectRef idx="2">
+            <a:schemeClr val="accent1"/>
+          </a:effectRef>
+          <a:fontRef idx="minor">
+            <a:schemeClr val="lt1"/>
+          </a:fontRef>
+        </p:style>
+        <p:txBody>
+          <a:bodyPr rtlCol="0" anchor="ctr" wrap="square" lIns="45720" rIns="45720" tIns="18288" bIns="18288"/>
+          <a:lstStyle/>
+          <a:p>
+            <a:pPr algn="ctr"/>
+            <a:r>
+              <a:rPr sz="1100" b="1">
+                <a:solidFill>
+                  <a:srgbClr val="FFFFFF"/>
+                </a:solidFill>
+              </a:rPr>
+              <a:t>Why 1: 表層現象</a:t>
+            </a:r>
+          </a:p>
+        </p:txBody>
+      </p:sp>
+      <p:sp>
+        <p:nvSpPr>
+          <p:cNvPr id="9" name="Right Arrow 8"/>
+          <p:cNvSpPr/>
+          <p:nvPr/>
+        </p:nvSpPr>
+        <p:spPr>
+          <a:xfrm>
+            <a:off x="5257800" y="5166360"/>
+            <a:ext cx="182880" cy="182880"/>
+          </a:xfrm>
+          <a:prstGeom prst="rightArrow">
+            <a:avLst/>
+          </a:prstGeom>
+          <a:solidFill>
+            <a:srgbClr val="D9D9D9"/>
+          </a:solidFill>
+          <a:ln>
+            <a:noFill/>
+          </a:ln>
+        </p:spPr>
+        <p:style>
+          <a:lnRef idx="1">
+            <a:schemeClr val="accent1"/>
+          </a:lnRef>
+          <a:fillRef idx="3">
+            <a:schemeClr val="accent1"/>
+          </a:fillRef>
+          <a:effectRef idx="2">
+            <a:schemeClr val="accent1"/>
+          </a:effectRef>
+          <a:fontRef idx="minor">
+            <a:schemeClr val="lt1"/>
+          </a:fontRef>
+        </p:style>
+        <p:txBody>
+          <a:bodyPr rtlCol="0" anchor="ctr"/>
+          <a:lstStyle/>
+          <a:p>
+            <a:pPr algn="ctr"/>
+          </a:p>
+        </p:txBody>
+      </p:sp>
+      <p:sp>
+        <p:nvSpPr>
+          <p:cNvPr id="10" name="Rounded Rectangle 9"/>
+          <p:cNvSpPr/>
+          <p:nvPr/>
+        </p:nvSpPr>
+        <p:spPr>
+          <a:xfrm>
+            <a:off x="5486400" y="4114800"/>
+            <a:ext cx="1463040" cy="2286000"/>
+          </a:xfrm>
+          <a:prstGeom prst="roundRect">
+            <a:avLst/>
+          </a:prstGeom>
+          <a:solidFill>
+            <a:srgbClr val="1F4E79"/>
+          </a:solidFill>
+          <a:ln>
+            <a:solidFill>
+              <a:srgbClr val="1F4E79"/>
+            </a:solidFill>
+          </a:ln>
+        </p:spPr>
+        <p:style>
+          <a:lnRef idx="1">
+            <a:schemeClr val="accent1"/>
+          </a:lnRef>
+          <a:fillRef idx="3">
+            <a:schemeClr val="accent1"/>
+          </a:fillRef>
+          <a:effectRef idx="2">
+            <a:schemeClr val="accent1"/>
+          </a:effectRef>
+          <a:fontRef idx="minor">
+            <a:schemeClr val="lt1"/>
+          </a:fontRef>
+        </p:style>
+        <p:txBody>
+          <a:bodyPr rtlCol="0" anchor="ctr" wrap="square" lIns="45720" rIns="45720" tIns="18288" bIns="18288"/>
+          <a:lstStyle/>
+          <a:p>
+            <a:pPr algn="ctr"/>
+            <a:r>
+              <a:rPr sz="1100" b="1">
+                <a:solidFill>
+                  <a:srgbClr val="FFFFFF"/>
+                </a:solidFill>
+              </a:rPr>
+              <a:t>Why 2: 直接原因</a:t>
+            </a:r>
+          </a:p>
+        </p:txBody>
+      </p:sp>
+      <p:sp>
+        <p:nvSpPr>
+          <p:cNvPr id="11" name="Right Arrow 10"/>
+          <p:cNvSpPr/>
+          <p:nvPr/>
+        </p:nvSpPr>
+        <p:spPr>
+          <a:xfrm>
+            <a:off x="6903720" y="5166360"/>
+            <a:ext cx="182880" cy="182880"/>
+          </a:xfrm>
+          <a:prstGeom prst="rightArrow">
+            <a:avLst/>
+          </a:prstGeom>
+          <a:solidFill>
+            <a:srgbClr val="D9D9D9"/>
+          </a:solidFill>
+          <a:ln>
+            <a:noFill/>
+          </a:ln>
+        </p:spPr>
+        <p:style>
+          <a:lnRef idx="1">
+            <a:schemeClr val="accent1"/>
+          </a:lnRef>
+          <a:fillRef idx="3">
+            <a:schemeClr val="accent1"/>
+          </a:fillRef>
+          <a:effectRef idx="2">
+            <a:schemeClr val="accent1"/>
+          </a:effectRef>
+          <a:fontRef idx="minor">
+            <a:schemeClr val="lt1"/>
+          </a:fontRef>
+        </p:style>
+        <p:txBody>
+          <a:bodyPr rtlCol="0" anchor="ctr"/>
+          <a:lstStyle/>
+          <a:p>
+            <a:pPr algn="ctr"/>
+          </a:p>
+        </p:txBody>
+      </p:sp>
+      <p:sp>
+        <p:nvSpPr>
+          <p:cNvPr id="12" name="Rounded Rectangle 11"/>
+          <p:cNvSpPr/>
+          <p:nvPr/>
+        </p:nvSpPr>
+        <p:spPr>
+          <a:xfrm>
+            <a:off x="7132320" y="4114800"/>
+            <a:ext cx="1463040" cy="2286000"/>
+          </a:xfrm>
+          <a:prstGeom prst="roundRect">
+            <a:avLst/>
+          </a:prstGeom>
+          <a:solidFill>
+            <a:srgbClr val="1F4E79"/>
+          </a:solidFill>
+          <a:ln>
+            <a:solidFill>
+              <a:srgbClr val="1F4E79"/>
+            </a:solidFill>
+          </a:ln>
+        </p:spPr>
+        <p:style>
+          <a:lnRef idx="1">
+            <a:schemeClr val="accent1"/>
+          </a:lnRef>
+          <a:fillRef idx="3">
+            <a:schemeClr val="accent1"/>
+          </a:fillRef>
+          <a:effectRef idx="2">
+            <a:schemeClr val="accent1"/>
+          </a:effectRef>
+          <a:fontRef idx="minor">
+            <a:schemeClr val="lt1"/>
+          </a:fontRef>
+        </p:style>
+        <p:txBody>
+          <a:bodyPr rtlCol="0" anchor="ctr" wrap="square" lIns="45720" rIns="45720" tIns="18288" bIns="18288"/>
+          <a:lstStyle/>
+          <a:p>
+            <a:pPr algn="ctr"/>
+            <a:r>
+              <a:rPr sz="1100" b="1">
+                <a:solidFill>
+                  <a:srgbClr val="FFFFFF"/>
+                </a:solidFill>
+              </a:rPr>
+              <a:t>Why 3: 間接原因</a:t>
             </a:r>
           </a:p>
         </p:txBody>

--- a/report/260811_Kobo_ZHT_RA6080_SPcomFailI_improved.pptx
+++ b/report/260811_Kobo_ZHT_RA6080_SPcomFailI_improved.pptx
@@ -24,6 +24,9 @@
     <p:sldId id="551" r:id="rId18"/>
     <p:sldId id="552" r:id="rId19"/>
     <p:sldId id="553" r:id="rId20"/>
+    <p:sldId id="554" r:id="rId21"/>
+    <p:sldId id="555" r:id="rId22"/>
+    <p:sldId id="556" r:id="rId23"/>
   </p:sldIdLst>
   <p:sldSz cx="9144000" cy="6858000" type="screen4x3"/>
   <p:notesSz cx="6797675" cy="9926638"/>
@@ -4523,17 +4526,22 @@
       <p:grpSpPr/>
       <p:sp>
         <p:nvSpPr>
-          <p:cNvPr id="2" name="Vertical Title 1"/>
-          <p:cNvSpPr>
-            <a:spLocks noGrp="1"/>
-          </p:cNvSpPr>
-          <p:nvPr>
-            <p:ph type="title" orient="vert"/>
-          </p:nvPr>
+          <p:cNvPr id="4" name="TextBox 3"/>
+          <p:cNvSpPr txBox="1"/>
+          <p:nvPr/>
         </p:nvSpPr>
-        <p:spPr/>
+        <p:spPr>
+          <a:xfrm>
+            <a:off x="457200" y="274320"/>
+            <a:ext cx="8229600" cy="914400"/>
+          </a:xfrm>
+          <a:prstGeom prst="rect">
+            <a:avLst/>
+          </a:prstGeom>
+          <a:noFill/>
+        </p:spPr>
         <p:txBody>
-          <a:bodyPr/>
+          <a:bodyPr wrap="square" lIns="45720" rIns="45720" tIns="18288" bIns="18288"/>
           <a:lstStyle/>
           <a:p>
             <a:r>
@@ -4544,17 +4552,22 @@
       </p:sp>
       <p:sp>
         <p:nvSpPr>
-          <p:cNvPr id="3" name="Vertical Text Placeholder 2"/>
-          <p:cNvSpPr>
-            <a:spLocks noGrp="1"/>
-          </p:cNvSpPr>
-          <p:nvPr>
-            <p:ph type="body" idx="1" orient="vert"/>
-          </p:nvPr>
+          <p:cNvPr id="5" name="TextBox 4"/>
+          <p:cNvSpPr txBox="1"/>
+          <p:nvPr/>
         </p:nvSpPr>
-        <p:spPr/>
+        <p:spPr>
+          <a:xfrm>
+            <a:off x="457200" y="1371600"/>
+            <a:ext cx="8229600" cy="5029200"/>
+          </a:xfrm>
+          <a:prstGeom prst="rect">
+            <a:avLst/>
+          </a:prstGeom>
+          <a:noFill/>
+        </p:spPr>
         <p:txBody>
-          <a:bodyPr/>
+          <a:bodyPr wrap="square" lIns="45720" rIns="45720" tIns="18288" bIns="18288"/>
           <a:lstStyle/>
           <a:p>
             <a:pPr>
@@ -4639,17 +4652,22 @@
       <p:grpSpPr/>
       <p:sp>
         <p:nvSpPr>
-          <p:cNvPr id="2" name="Vertical Title 1"/>
-          <p:cNvSpPr>
-            <a:spLocks noGrp="1"/>
-          </p:cNvSpPr>
-          <p:nvPr>
-            <p:ph type="title" orient="vert"/>
-          </p:nvPr>
+          <p:cNvPr id="4" name="TextBox 3"/>
+          <p:cNvSpPr txBox="1"/>
+          <p:nvPr/>
         </p:nvSpPr>
-        <p:spPr/>
+        <p:spPr>
+          <a:xfrm>
+            <a:off x="457200" y="274320"/>
+            <a:ext cx="8229600" cy="914400"/>
+          </a:xfrm>
+          <a:prstGeom prst="rect">
+            <a:avLst/>
+          </a:prstGeom>
+          <a:noFill/>
+        </p:spPr>
         <p:txBody>
-          <a:bodyPr/>
+          <a:bodyPr wrap="square" lIns="45720" rIns="45720" tIns="18288" bIns="18288"/>
           <a:lstStyle/>
           <a:p>
             <a:r>
@@ -4660,17 +4678,22 @@
       </p:sp>
       <p:sp>
         <p:nvSpPr>
-          <p:cNvPr id="3" name="Vertical Text Placeholder 2"/>
-          <p:cNvSpPr>
-            <a:spLocks noGrp="1"/>
-          </p:cNvSpPr>
-          <p:nvPr>
-            <p:ph type="body" idx="1" orient="vert"/>
-          </p:nvPr>
+          <p:cNvPr id="5" name="TextBox 4"/>
+          <p:cNvSpPr txBox="1"/>
+          <p:nvPr/>
         </p:nvSpPr>
-        <p:spPr/>
+        <p:spPr>
+          <a:xfrm>
+            <a:off x="457200" y="1371600"/>
+            <a:ext cx="8229600" cy="5029200"/>
+          </a:xfrm>
+          <a:prstGeom prst="rect">
+            <a:avLst/>
+          </a:prstGeom>
+          <a:noFill/>
+        </p:spPr>
         <p:txBody>
-          <a:bodyPr/>
+          <a:bodyPr wrap="square" lIns="45720" rIns="45720" tIns="18288" bIns="18288"/>
           <a:lstStyle/>
           <a:p>
             <a:pPr>
@@ -4745,7 +4768,7 @@
       </p:sp>
       <p:sp>
         <p:nvSpPr>
-          <p:cNvPr id="4" name="Rectangle 3"/>
+          <p:cNvPr id="6" name="Rectangle 5"/>
           <p:cNvSpPr/>
           <p:nvPr/>
         </p:nvSpPr>
@@ -4788,7 +4811,7 @@
       </p:sp>
       <p:sp>
         <p:nvSpPr>
-          <p:cNvPr id="5" name="Oval 4"/>
+          <p:cNvPr id="7" name="Oval 6"/>
           <p:cNvSpPr/>
           <p:nvPr/>
         </p:nvSpPr>
@@ -4841,7 +4864,7 @@
       </p:sp>
       <p:sp>
         <p:nvSpPr>
-          <p:cNvPr id="6" name="TextBox 5"/>
+          <p:cNvPr id="8" name="TextBox 7"/>
           <p:cNvSpPr txBox="1"/>
           <p:nvPr/>
         </p:nvSpPr>
@@ -4875,7 +4898,7 @@
       </p:sp>
       <p:sp>
         <p:nvSpPr>
-          <p:cNvPr id="7" name="TextBox 6"/>
+          <p:cNvPr id="9" name="TextBox 8"/>
           <p:cNvSpPr txBox="1"/>
           <p:nvPr/>
         </p:nvSpPr>
@@ -4909,7 +4932,7 @@
       </p:sp>
       <p:sp>
         <p:nvSpPr>
-          <p:cNvPr id="8" name="Oval 7"/>
+          <p:cNvPr id="10" name="Oval 9"/>
           <p:cNvSpPr/>
           <p:nvPr/>
         </p:nvSpPr>
@@ -4962,7 +4985,7 @@
       </p:sp>
       <p:sp>
         <p:nvSpPr>
-          <p:cNvPr id="9" name="TextBox 8"/>
+          <p:cNvPr id="11" name="TextBox 10"/>
           <p:cNvSpPr txBox="1"/>
           <p:nvPr/>
         </p:nvSpPr>
@@ -4996,7 +5019,7 @@
       </p:sp>
       <p:sp>
         <p:nvSpPr>
-          <p:cNvPr id="10" name="TextBox 9"/>
+          <p:cNvPr id="12" name="TextBox 11"/>
           <p:cNvSpPr txBox="1"/>
           <p:nvPr/>
         </p:nvSpPr>
@@ -5030,7 +5053,7 @@
       </p:sp>
       <p:sp>
         <p:nvSpPr>
-          <p:cNvPr id="11" name="Oval 10"/>
+          <p:cNvPr id="13" name="Oval 12"/>
           <p:cNvSpPr/>
           <p:nvPr/>
         </p:nvSpPr>
@@ -5083,7 +5106,7 @@
       </p:sp>
       <p:sp>
         <p:nvSpPr>
-          <p:cNvPr id="12" name="TextBox 11"/>
+          <p:cNvPr id="14" name="TextBox 13"/>
           <p:cNvSpPr txBox="1"/>
           <p:nvPr/>
         </p:nvSpPr>
@@ -5117,7 +5140,7 @@
       </p:sp>
       <p:sp>
         <p:nvSpPr>
-          <p:cNvPr id="13" name="TextBox 12"/>
+          <p:cNvPr id="15" name="TextBox 14"/>
           <p:cNvSpPr txBox="1"/>
           <p:nvPr/>
         </p:nvSpPr>
@@ -5169,45 +5192,33 @@
       <p:grpSpPr/>
       <p:sp>
         <p:nvSpPr>
-          <p:cNvPr id="2" name="Vertical Title 1"/>
-          <p:cNvSpPr>
-            <a:spLocks noGrp="1"/>
-          </p:cNvSpPr>
-          <p:nvPr>
-            <p:ph type="title" orient="vert"/>
-          </p:nvPr>
+          <p:cNvPr id="4" name="TextBox 3"/>
+          <p:cNvSpPr txBox="1"/>
+          <p:nvPr/>
         </p:nvSpPr>
-        <p:spPr/>
+        <p:spPr>
+          <a:xfrm>
+            <a:off x="457200" y="274320"/>
+            <a:ext cx="8229600" cy="914400"/>
+          </a:xfrm>
+          <a:prstGeom prst="rect">
+            <a:avLst/>
+          </a:prstGeom>
+          <a:noFill/>
+        </p:spPr>
         <p:txBody>
-          <a:bodyPr/>
+          <a:bodyPr wrap="square" lIns="45720" rIns="45720" tIns="18288" bIns="18288"/>
           <a:lstStyle/>
           <a:p>
             <a:r>
               <a:t>IQC 入料檢驗標準</a:t>
             </a:r>
           </a:p>
-        </p:txBody>
-      </p:sp>
-      <p:sp>
-        <p:nvSpPr>
-          <p:cNvPr id="3" name="Vertical Text Placeholder 2"/>
-          <p:cNvSpPr>
-            <a:spLocks noGrp="1"/>
-          </p:cNvSpPr>
-          <p:nvPr>
-            <p:ph type="body" idx="1" orient="vert"/>
-          </p:nvPr>
-        </p:nvSpPr>
-        <p:spPr/>
-        <p:txBody>
-          <a:bodyPr/>
-          <a:lstStyle/>
-          <a:p/>
         </p:txBody>
       </p:sp>
       <p:graphicFrame>
         <p:nvGraphicFramePr>
-          <p:cNvPr id="4" name="Table 3"/>
+          <p:cNvPr id="5" name="Table 4"/>
           <p:cNvGraphicFramePr>
             <a:graphicFrameLocks noGrp="1"/>
           </p:cNvGraphicFramePr>
@@ -5591,7 +5602,7 @@
       </p:graphicFrame>
       <p:sp>
         <p:nvSpPr>
-          <p:cNvPr id="5" name="TextBox 4"/>
+          <p:cNvPr id="6" name="TextBox 5"/>
           <p:cNvSpPr txBox="1"/>
           <p:nvPr/>
         </p:nvSpPr>
@@ -5644,45 +5655,33 @@
       <p:grpSpPr/>
       <p:sp>
         <p:nvSpPr>
-          <p:cNvPr id="2" name="Vertical Title 1"/>
-          <p:cNvSpPr>
-            <a:spLocks noGrp="1"/>
-          </p:cNvSpPr>
-          <p:nvPr>
-            <p:ph type="title" orient="vert"/>
-          </p:nvPr>
+          <p:cNvPr id="4" name="TextBox 3"/>
+          <p:cNvSpPr txBox="1"/>
+          <p:nvPr/>
         </p:nvSpPr>
-        <p:spPr/>
+        <p:spPr>
+          <a:xfrm>
+            <a:off x="457200" y="274320"/>
+            <a:ext cx="8229600" cy="914400"/>
+          </a:xfrm>
+          <a:prstGeom prst="rect">
+            <a:avLst/>
+          </a:prstGeom>
+          <a:noFill/>
+        </p:spPr>
         <p:txBody>
-          <a:bodyPr/>
+          <a:bodyPr wrap="square" lIns="45720" rIns="45720" tIns="18288" bIns="18288"/>
           <a:lstStyle/>
           <a:p>
             <a:r>
               <a:t>監測與知識管理 (KM)</a:t>
             </a:r>
           </a:p>
-        </p:txBody>
-      </p:sp>
-      <p:sp>
-        <p:nvSpPr>
-          <p:cNvPr id="3" name="Vertical Text Placeholder 2"/>
-          <p:cNvSpPr>
-            <a:spLocks noGrp="1"/>
-          </p:cNvSpPr>
-          <p:nvPr>
-            <p:ph type="body" idx="1" orient="vert"/>
-          </p:nvPr>
-        </p:nvSpPr>
-        <p:spPr/>
-        <p:txBody>
-          <a:bodyPr/>
-          <a:lstStyle/>
-          <a:p/>
         </p:txBody>
       </p:sp>
       <p:graphicFrame>
         <p:nvGraphicFramePr>
-          <p:cNvPr id="4" name="Table 3"/>
+          <p:cNvPr id="5" name="Table 4"/>
           <p:cNvGraphicFramePr>
             <a:graphicFrameLocks noGrp="1"/>
           </p:cNvGraphicFramePr>
@@ -6066,7 +6065,7 @@
       </p:graphicFrame>
       <p:sp>
         <p:nvSpPr>
-          <p:cNvPr id="5" name="TextBox 4"/>
+          <p:cNvPr id="6" name="TextBox 5"/>
           <p:cNvSpPr txBox="1"/>
           <p:nvPr/>
         </p:nvSpPr>
@@ -6099,16 +6098,274 @@
           </a:p>
         </p:txBody>
       </p:sp>
+    </p:spTree>
+  </p:cSld>
+  <p:clrMapOvr>
+    <a:masterClrMapping/>
+  </p:clrMapOvr>
+</p:sld>
+</file>
+
+<file path=ppt/slides/slide14.xml><?xml version="1.0" encoding="utf-8"?>
+<p:sld xmlns:a="http://schemas.openxmlformats.org/drawingml/2006/main" xmlns:p="http://schemas.openxmlformats.org/presentationml/2006/main" xmlns:r="http://schemas.openxmlformats.org/officeDocument/2006/relationships">
+  <p:cSld>
+    <p:spTree>
+      <p:nvGrpSpPr>
+        <p:cNvPr id="1" name=""/>
+        <p:cNvGrpSpPr/>
+        <p:nvPr/>
+      </p:nvGrpSpPr>
+      <p:grpSpPr/>
       <p:sp>
         <p:nvSpPr>
-          <p:cNvPr id="6" name="TextBox 5"/>
+          <p:cNvPr id="4" name="TextBox 3"/>
           <p:cNvSpPr txBox="1"/>
           <p:nvPr/>
         </p:nvSpPr>
         <p:spPr>
           <a:xfrm>
-            <a:off x="914400" y="4754880"/>
-            <a:ext cx="1371600" cy="259080"/>
+            <a:off x="457200" y="274320"/>
+            <a:ext cx="8229600" cy="914400"/>
+          </a:xfrm>
+          <a:prstGeom prst="rect">
+            <a:avLst/>
+          </a:prstGeom>
+          <a:noFill/>
+        </p:spPr>
+        <p:txBody>
+          <a:bodyPr wrap="square" lIns="45720" rIns="45720" tIns="18288" bIns="18288"/>
+          <a:lstStyle/>
+          <a:p>
+            <a:r>
+              <a:t>Executive Summary</a:t>
+            </a:r>
+          </a:p>
+        </p:txBody>
+      </p:sp>
+      <p:sp>
+        <p:nvSpPr>
+          <p:cNvPr id="5" name="TextBox 4"/>
+          <p:cNvSpPr txBox="1"/>
+          <p:nvPr/>
+        </p:nvSpPr>
+        <p:spPr>
+          <a:xfrm>
+            <a:off x="457200" y="1371600"/>
+            <a:ext cx="8229600" cy="5029200"/>
+          </a:xfrm>
+          <a:prstGeom prst="rect">
+            <a:avLst/>
+          </a:prstGeom>
+          <a:noFill/>
+        </p:spPr>
+        <p:txBody>
+          <a:bodyPr wrap="square" lIns="45720" rIns="45720" tIns="18288" bIns="18288"/>
+          <a:lstStyle/>
+          <a:p>
+            <a:pPr>
+              <a:defRPr sz="1400">
+                <a:solidFill>
+                  <a:srgbClr val="333333"/>
+                </a:solidFill>
+              </a:defRPr>
+            </a:pPr>
+            <a:r>
+              <a:t>本報告完成了初步的失效定位(Localization)，確認故障點位於Touch IC的INT/MISO引腳，但尚未達到正式FA報告的深度。報告最大的問題在於「僅有推測，缺乏根因」以及「完全沒有對策」。目前的結論僅能說「壞在哪裡」，無法說明「為什麼壞」以及「如何不再發生」。建議補足物理分析證據，並根據根因制定完整的改善與驗證計畫。</a:t>
+            </a:r>
+          </a:p>
+        </p:txBody>
+      </p:sp>
+    </p:spTree>
+  </p:cSld>
+  <p:clrMapOvr>
+    <a:masterClrMapping/>
+  </p:clrMapOvr>
+</p:sld>
+</file>
+
+<file path=ppt/slides/slide15.xml><?xml version="1.0" encoding="utf-8"?>
+<p:sld xmlns:a="http://schemas.openxmlformats.org/drawingml/2006/main" xmlns:p="http://schemas.openxmlformats.org/presentationml/2006/main" xmlns:r="http://schemas.openxmlformats.org/officeDocument/2006/relationships">
+  <p:cSld>
+    <p:spTree>
+      <p:nvGrpSpPr>
+        <p:cNvPr id="1" name=""/>
+        <p:cNvGrpSpPr/>
+        <p:nvPr/>
+      </p:nvGrpSpPr>
+      <p:grpSpPr/>
+      <p:sp>
+        <p:nvSpPr>
+          <p:cNvPr id="4" name="TextBox 3"/>
+          <p:cNvSpPr txBox="1"/>
+          <p:nvPr/>
+        </p:nvSpPr>
+        <p:spPr>
+          <a:xfrm>
+            <a:off x="457200" y="274320"/>
+            <a:ext cx="8229600" cy="914400"/>
+          </a:xfrm>
+          <a:prstGeom prst="rect">
+            <a:avLst/>
+          </a:prstGeom>
+          <a:noFill/>
+        </p:spPr>
+        <p:txBody>
+          <a:bodyPr wrap="square" lIns="45720" rIns="45720" tIns="18288" bIns="18288"/>
+          <a:lstStyle/>
+          <a:p>
+            <a:r>
+              <a:t>Key Improvements Required</a:t>
+            </a:r>
+          </a:p>
+        </p:txBody>
+      </p:sp>
+      <p:sp>
+        <p:nvSpPr>
+          <p:cNvPr id="5" name="TextBox 4"/>
+          <p:cNvSpPr txBox="1"/>
+          <p:nvPr/>
+        </p:nvSpPr>
+        <p:spPr>
+          <a:xfrm>
+            <a:off x="457200" y="1371600"/>
+            <a:ext cx="8229600" cy="5029200"/>
+          </a:xfrm>
+          <a:prstGeom prst="rect">
+            <a:avLst/>
+          </a:prstGeom>
+          <a:noFill/>
+        </p:spPr>
+        <p:txBody>
+          <a:bodyPr wrap="square" lIns="45720" rIns="45720" tIns="18288" bIns="18288"/>
+          <a:lstStyle/>
+          <a:p>
+            <a:pPr>
+              <a:defRPr sz="1300">
+                <a:solidFill>
+                  <a:srgbClr val="0070C0"/>
+                </a:solidFill>
+              </a:defRPr>
+            </a:pPr>
+            <a:r>
+              <a:t>• 提供了產品型號、日期與準備者，但缺乏具體的批號(Lot No.)、失效數量(Failure Quantity)以及明確的客戶名稱。</a:t>
+            </a:r>
+          </a:p>
+          <a:p>
+            <a:pPr>
+              <a:defRPr sz="1300">
+                <a:solidFill>
+                  <a:srgbClr val="0070C0"/>
+                </a:solidFill>
+              </a:defRPr>
+            </a:pPr>
+            <a:r>
+              <a:t>• 失效現象描述清楚(SPI無法通訊)，並提供了金手指對地的量測數據，但缺乏失效率(Failure Rate)的統計數據。</a:t>
+            </a:r>
+          </a:p>
+          <a:p>
+            <a:pPr>
+              <a:defRPr sz="1300">
+                <a:solidFill>
+                  <a:srgbClr val="FF0000"/>
+                </a:solidFill>
+              </a:defRPr>
+            </a:pPr>
+            <a:r>
+              <a:t>• 採用了排除法(移除TVS、移除IC)進行初步分析，邏輯尚屬合理，但缺乏更深層的物理分析(如SEM或X-ray)來確認IC內部的損傷機制。</a:t>
+            </a:r>
+          </a:p>
+          <a:p>
+            <a:pPr>
+              <a:defRPr sz="1300">
+                <a:solidFill>
+                  <a:srgbClr val="FF0000"/>
+                </a:solidFill>
+              </a:defRPr>
+            </a:pPr>
+            <a:r>
+              <a:t>• 提供了金手指量測表與電路圖，但圖片解析度較低，且缺乏對比組(Golden Sample)的量測數據來佐證異常。</a:t>
+            </a:r>
+          </a:p>
+          <a:p>
+            <a:pPr>
+              <a:defRPr sz="1300">
+                <a:solidFill>
+                  <a:srgbClr val="FF0000"/>
+                </a:solidFill>
+              </a:defRPr>
+            </a:pPr>
+            <a:r>
+              <a:t>• 結論僅停留在「推測」為I/O損傷，缺乏因果關係的深度分析。未說明為何會造成損傷(如ESD、過電壓或生產製程問題)，未應用5-Why分析。</a:t>
+            </a:r>
+          </a:p>
+          <a:p>
+            <a:pPr>
+              <a:defRPr sz="1300">
+                <a:solidFill>
+                  <a:srgbClr val="0070C0"/>
+                </a:solidFill>
+              </a:defRPr>
+            </a:pPr>
+            <a:r>
+              <a:t>• 報告中完全缺失改善對策、預防措施與驗證計畫。</a:t>
+            </a:r>
+          </a:p>
+        </p:txBody>
+      </p:sp>
+    </p:spTree>
+  </p:cSld>
+  <p:clrMapOvr>
+    <a:masterClrMapping/>
+  </p:clrMapOvr>
+</p:sld>
+</file>
+
+<file path=ppt/slides/slide16.xml><?xml version="1.0" encoding="utf-8"?>
+<p:sld xmlns:a="http://schemas.openxmlformats.org/drawingml/2006/main" xmlns:p="http://schemas.openxmlformats.org/presentationml/2006/main" xmlns:r="http://schemas.openxmlformats.org/officeDocument/2006/relationships">
+  <p:cSld>
+    <p:spTree>
+      <p:nvGrpSpPr>
+        <p:cNvPr id="1" name=""/>
+        <p:cNvGrpSpPr/>
+        <p:nvPr/>
+      </p:nvGrpSpPr>
+      <p:grpSpPr/>
+      <p:sp>
+        <p:nvSpPr>
+          <p:cNvPr id="4" name="TextBox 3"/>
+          <p:cNvSpPr txBox="1"/>
+          <p:nvPr/>
+        </p:nvSpPr>
+        <p:spPr>
+          <a:xfrm>
+            <a:off x="457200" y="274320"/>
+            <a:ext cx="8229600" cy="914400"/>
+          </a:xfrm>
+          <a:prstGeom prst="rect">
+            <a:avLst/>
+          </a:prstGeom>
+          <a:noFill/>
+        </p:spPr>
+        <p:txBody>
+          <a:bodyPr wrap="square" lIns="45720" rIns="45720" tIns="18288" bIns="18288"/>
+          <a:lstStyle/>
+          <a:p>
+            <a:r>
+              <a:t>6 維度評分分析</a:t>
+            </a:r>
+          </a:p>
+        </p:txBody>
+      </p:sp>
+      <p:sp>
+        <p:nvSpPr>
+          <p:cNvPr id="5" name="TextBox 4"/>
+          <p:cNvSpPr txBox="1"/>
+          <p:nvPr/>
+        </p:nvSpPr>
+        <p:spPr>
+          <a:xfrm>
+            <a:off x="914400" y="1645920"/>
+            <a:ext cx="1371600" cy="640080"/>
           </a:xfrm>
           <a:prstGeom prst="rect">
             <a:avLst/>
@@ -6130,14 +6387,14 @@
       </p:sp>
       <p:sp>
         <p:nvSpPr>
-          <p:cNvPr id="7" name="Rectangle 6"/>
+          <p:cNvPr id="6" name="Rectangle 5"/>
           <p:cNvSpPr/>
           <p:nvPr/>
         </p:nvSpPr>
         <p:spPr>
           <a:xfrm>
-            <a:off x="2286000" y="4800600"/>
-            <a:ext cx="6400800" cy="167640"/>
+            <a:off x="2286000" y="1691640"/>
+            <a:ext cx="6400800" cy="548640"/>
           </a:xfrm>
           <a:prstGeom prst="rect">
             <a:avLst/>
@@ -6173,14 +6430,14 @@
       </p:sp>
       <p:sp>
         <p:nvSpPr>
-          <p:cNvPr id="8" name="Rectangle 7"/>
+          <p:cNvPr id="7" name="Rectangle 6"/>
           <p:cNvSpPr/>
           <p:nvPr/>
         </p:nvSpPr>
         <p:spPr>
           <a:xfrm>
-            <a:off x="2286000" y="4800600"/>
-            <a:ext cx="4480560" cy="167640"/>
+            <a:off x="2286000" y="1691640"/>
+            <a:ext cx="4480560" cy="548640"/>
           </a:xfrm>
           <a:prstGeom prst="rect">
             <a:avLst/>
@@ -6216,14 +6473,14 @@
       </p:sp>
       <p:sp>
         <p:nvSpPr>
-          <p:cNvPr id="9" name="TextBox 8"/>
+          <p:cNvPr id="8" name="TextBox 7"/>
           <p:cNvSpPr txBox="1"/>
           <p:nvPr/>
         </p:nvSpPr>
         <p:spPr>
           <a:xfrm>
-            <a:off x="8732520" y="4754880"/>
-            <a:ext cx="411480" cy="259080"/>
+            <a:off x="8732520" y="1645920"/>
+            <a:ext cx="411480" cy="640080"/>
           </a:xfrm>
           <a:prstGeom prst="rect">
             <a:avLst/>
@@ -6249,14 +6506,14 @@
       </p:sp>
       <p:sp>
         <p:nvSpPr>
-          <p:cNvPr id="10" name="TextBox 9"/>
+          <p:cNvPr id="9" name="TextBox 8"/>
           <p:cNvSpPr txBox="1"/>
           <p:nvPr/>
         </p:nvSpPr>
         <p:spPr>
           <a:xfrm>
-            <a:off x="914400" y="5013960"/>
-            <a:ext cx="1371600" cy="259080"/>
+            <a:off x="914400" y="2286000"/>
+            <a:ext cx="1371600" cy="640080"/>
           </a:xfrm>
           <a:prstGeom prst="rect">
             <a:avLst/>
@@ -6278,14 +6535,14 @@
       </p:sp>
       <p:sp>
         <p:nvSpPr>
-          <p:cNvPr id="11" name="Rectangle 10"/>
+          <p:cNvPr id="10" name="Rectangle 9"/>
           <p:cNvSpPr/>
           <p:nvPr/>
         </p:nvSpPr>
         <p:spPr>
           <a:xfrm>
-            <a:off x="2286000" y="5059680"/>
-            <a:ext cx="6400800" cy="167640"/>
+            <a:off x="2286000" y="2331720"/>
+            <a:ext cx="6400800" cy="548640"/>
           </a:xfrm>
           <a:prstGeom prst="rect">
             <a:avLst/>
@@ -6321,14 +6578,14 @@
       </p:sp>
       <p:sp>
         <p:nvSpPr>
-          <p:cNvPr id="12" name="Rectangle 11"/>
+          <p:cNvPr id="11" name="Rectangle 10"/>
           <p:cNvSpPr/>
           <p:nvPr/>
         </p:nvSpPr>
         <p:spPr>
           <a:xfrm>
-            <a:off x="2286000" y="5059680"/>
-            <a:ext cx="4800600" cy="167640"/>
+            <a:off x="2286000" y="2331720"/>
+            <a:ext cx="4800600" cy="548640"/>
           </a:xfrm>
           <a:prstGeom prst="rect">
             <a:avLst/>
@@ -6364,14 +6621,14 @@
       </p:sp>
       <p:sp>
         <p:nvSpPr>
-          <p:cNvPr id="13" name="TextBox 12"/>
+          <p:cNvPr id="12" name="TextBox 11"/>
           <p:cNvSpPr txBox="1"/>
           <p:nvPr/>
         </p:nvSpPr>
         <p:spPr>
           <a:xfrm>
-            <a:off x="8732520" y="5013960"/>
-            <a:ext cx="411480" cy="259080"/>
+            <a:off x="8732520" y="2286000"/>
+            <a:ext cx="411480" cy="640080"/>
           </a:xfrm>
           <a:prstGeom prst="rect">
             <a:avLst/>
@@ -6397,14 +6654,14 @@
       </p:sp>
       <p:sp>
         <p:nvSpPr>
-          <p:cNvPr id="14" name="TextBox 13"/>
+          <p:cNvPr id="13" name="TextBox 12"/>
           <p:cNvSpPr txBox="1"/>
           <p:nvPr/>
         </p:nvSpPr>
         <p:spPr>
           <a:xfrm>
-            <a:off x="914400" y="5273040"/>
-            <a:ext cx="1371600" cy="259080"/>
+            <a:off x="914400" y="2926080"/>
+            <a:ext cx="1371600" cy="640080"/>
           </a:xfrm>
           <a:prstGeom prst="rect">
             <a:avLst/>
@@ -6426,14 +6683,14 @@
       </p:sp>
       <p:sp>
         <p:nvSpPr>
-          <p:cNvPr id="15" name="Rectangle 14"/>
+          <p:cNvPr id="14" name="Rectangle 13"/>
           <p:cNvSpPr/>
           <p:nvPr/>
         </p:nvSpPr>
         <p:spPr>
           <a:xfrm>
-            <a:off x="2286000" y="5318760"/>
-            <a:ext cx="6400800" cy="167640"/>
+            <a:off x="2286000" y="2971800"/>
+            <a:ext cx="6400800" cy="548640"/>
           </a:xfrm>
           <a:prstGeom prst="rect">
             <a:avLst/>
@@ -6469,14 +6726,14 @@
       </p:sp>
       <p:sp>
         <p:nvSpPr>
-          <p:cNvPr id="16" name="Rectangle 15"/>
+          <p:cNvPr id="15" name="Rectangle 14"/>
           <p:cNvSpPr/>
           <p:nvPr/>
         </p:nvSpPr>
         <p:spPr>
           <a:xfrm>
-            <a:off x="2286000" y="5318760"/>
-            <a:ext cx="4160520" cy="167640"/>
+            <a:off x="2286000" y="2971800"/>
+            <a:ext cx="4160520" cy="548640"/>
           </a:xfrm>
           <a:prstGeom prst="rect">
             <a:avLst/>
@@ -6512,14 +6769,14 @@
       </p:sp>
       <p:sp>
         <p:nvSpPr>
-          <p:cNvPr id="17" name="TextBox 16"/>
+          <p:cNvPr id="16" name="TextBox 15"/>
           <p:cNvSpPr txBox="1"/>
           <p:nvPr/>
         </p:nvSpPr>
         <p:spPr>
           <a:xfrm>
-            <a:off x="8732520" y="5273040"/>
-            <a:ext cx="411480" cy="259080"/>
+            <a:off x="8732520" y="2926080"/>
+            <a:ext cx="411480" cy="640080"/>
           </a:xfrm>
           <a:prstGeom prst="rect">
             <a:avLst/>
@@ -6545,14 +6802,14 @@
       </p:sp>
       <p:sp>
         <p:nvSpPr>
-          <p:cNvPr id="18" name="TextBox 17"/>
+          <p:cNvPr id="17" name="TextBox 16"/>
           <p:cNvSpPr txBox="1"/>
           <p:nvPr/>
         </p:nvSpPr>
         <p:spPr>
           <a:xfrm>
-            <a:off x="914400" y="5532120"/>
-            <a:ext cx="1371600" cy="259080"/>
+            <a:off x="914400" y="3566160"/>
+            <a:ext cx="1371600" cy="640080"/>
           </a:xfrm>
           <a:prstGeom prst="rect">
             <a:avLst/>
@@ -6574,14 +6831,14 @@
       </p:sp>
       <p:sp>
         <p:nvSpPr>
-          <p:cNvPr id="19" name="Rectangle 18"/>
+          <p:cNvPr id="18" name="Rectangle 17"/>
           <p:cNvSpPr/>
           <p:nvPr/>
         </p:nvSpPr>
         <p:spPr>
           <a:xfrm>
-            <a:off x="2286000" y="5577840"/>
-            <a:ext cx="6400800" cy="167640"/>
+            <a:off x="2286000" y="3611880"/>
+            <a:ext cx="6400800" cy="548640"/>
           </a:xfrm>
           <a:prstGeom prst="rect">
             <a:avLst/>
@@ -6617,14 +6874,14 @@
       </p:sp>
       <p:sp>
         <p:nvSpPr>
-          <p:cNvPr id="20" name="Rectangle 19"/>
+          <p:cNvPr id="19" name="Rectangle 18"/>
           <p:cNvSpPr/>
           <p:nvPr/>
         </p:nvSpPr>
         <p:spPr>
           <a:xfrm>
-            <a:off x="2286000" y="5577840"/>
-            <a:ext cx="3840480" cy="167640"/>
+            <a:off x="2286000" y="3611880"/>
+            <a:ext cx="3840480" cy="548640"/>
           </a:xfrm>
           <a:prstGeom prst="rect">
             <a:avLst/>
@@ -6660,14 +6917,14 @@
       </p:sp>
       <p:sp>
         <p:nvSpPr>
-          <p:cNvPr id="21" name="TextBox 20"/>
+          <p:cNvPr id="20" name="TextBox 19"/>
           <p:cNvSpPr txBox="1"/>
           <p:nvPr/>
         </p:nvSpPr>
         <p:spPr>
           <a:xfrm>
-            <a:off x="8732520" y="5532120"/>
-            <a:ext cx="411480" cy="259080"/>
+            <a:off x="8732520" y="3566160"/>
+            <a:ext cx="411480" cy="640080"/>
           </a:xfrm>
           <a:prstGeom prst="rect">
             <a:avLst/>
@@ -6693,14 +6950,14 @@
       </p:sp>
       <p:sp>
         <p:nvSpPr>
-          <p:cNvPr id="22" name="TextBox 21"/>
+          <p:cNvPr id="21" name="TextBox 20"/>
           <p:cNvSpPr txBox="1"/>
           <p:nvPr/>
         </p:nvSpPr>
         <p:spPr>
           <a:xfrm>
-            <a:off x="914400" y="5791200"/>
-            <a:ext cx="1371600" cy="259080"/>
+            <a:off x="914400" y="4206240"/>
+            <a:ext cx="1371600" cy="640080"/>
           </a:xfrm>
           <a:prstGeom prst="rect">
             <a:avLst/>
@@ -6722,14 +6979,14 @@
       </p:sp>
       <p:sp>
         <p:nvSpPr>
-          <p:cNvPr id="23" name="Rectangle 22"/>
+          <p:cNvPr id="22" name="Rectangle 21"/>
           <p:cNvSpPr/>
           <p:nvPr/>
         </p:nvSpPr>
         <p:spPr>
           <a:xfrm>
-            <a:off x="2286000" y="5836920"/>
-            <a:ext cx="6400800" cy="167640"/>
+            <a:off x="2286000" y="4251960"/>
+            <a:ext cx="6400800" cy="548640"/>
           </a:xfrm>
           <a:prstGeom prst="rect">
             <a:avLst/>
@@ -6765,14 +7022,14 @@
       </p:sp>
       <p:sp>
         <p:nvSpPr>
-          <p:cNvPr id="24" name="Rectangle 23"/>
+          <p:cNvPr id="23" name="Rectangle 22"/>
           <p:cNvSpPr/>
           <p:nvPr/>
         </p:nvSpPr>
         <p:spPr>
           <a:xfrm>
-            <a:off x="2286000" y="5836920"/>
-            <a:ext cx="3200400" cy="167640"/>
+            <a:off x="2286000" y="4251960"/>
+            <a:ext cx="3200400" cy="548640"/>
           </a:xfrm>
           <a:prstGeom prst="rect">
             <a:avLst/>
@@ -6808,14 +7065,14 @@
       </p:sp>
       <p:sp>
         <p:nvSpPr>
-          <p:cNvPr id="25" name="TextBox 24"/>
+          <p:cNvPr id="24" name="TextBox 23"/>
           <p:cNvSpPr txBox="1"/>
           <p:nvPr/>
         </p:nvSpPr>
         <p:spPr>
           <a:xfrm>
-            <a:off x="8732520" y="5791200"/>
-            <a:ext cx="411480" cy="259080"/>
+            <a:off x="8732520" y="4206240"/>
+            <a:ext cx="411480" cy="640080"/>
           </a:xfrm>
           <a:prstGeom prst="rect">
             <a:avLst/>
@@ -6841,14 +7098,14 @@
       </p:sp>
       <p:sp>
         <p:nvSpPr>
-          <p:cNvPr id="26" name="TextBox 25"/>
+          <p:cNvPr id="25" name="TextBox 24"/>
           <p:cNvSpPr txBox="1"/>
           <p:nvPr/>
         </p:nvSpPr>
         <p:spPr>
           <a:xfrm>
-            <a:off x="914400" y="6050280"/>
-            <a:ext cx="1371600" cy="259080"/>
+            <a:off x="914400" y="4846320"/>
+            <a:ext cx="1371600" cy="640080"/>
           </a:xfrm>
           <a:prstGeom prst="rect">
             <a:avLst/>
@@ -6870,14 +7127,14 @@
       </p:sp>
       <p:sp>
         <p:nvSpPr>
-          <p:cNvPr id="27" name="Rectangle 26"/>
+          <p:cNvPr id="26" name="Rectangle 25"/>
           <p:cNvSpPr/>
           <p:nvPr/>
         </p:nvSpPr>
         <p:spPr>
           <a:xfrm>
-            <a:off x="2286000" y="6096000"/>
-            <a:ext cx="6400800" cy="167640"/>
+            <a:off x="2286000" y="4892040"/>
+            <a:ext cx="6400800" cy="548640"/>
           </a:xfrm>
           <a:prstGeom prst="rect">
             <a:avLst/>
@@ -6913,14 +7170,14 @@
       </p:sp>
       <p:sp>
         <p:nvSpPr>
-          <p:cNvPr id="28" name="Rectangle 27"/>
+          <p:cNvPr id="27" name="Rectangle 26"/>
           <p:cNvSpPr/>
           <p:nvPr/>
         </p:nvSpPr>
         <p:spPr>
           <a:xfrm>
-            <a:off x="2286000" y="6096000"/>
-            <a:ext cx="4480560" cy="167640"/>
+            <a:off x="2286000" y="4892040"/>
+            <a:ext cx="4480560" cy="548640"/>
           </a:xfrm>
           <a:prstGeom prst="rect">
             <a:avLst/>
@@ -6956,14 +7213,14 @@
       </p:sp>
       <p:sp>
         <p:nvSpPr>
-          <p:cNvPr id="29" name="TextBox 28"/>
+          <p:cNvPr id="28" name="TextBox 27"/>
           <p:cNvSpPr txBox="1"/>
           <p:nvPr/>
         </p:nvSpPr>
         <p:spPr>
           <a:xfrm>
-            <a:off x="8732520" y="6050280"/>
-            <a:ext cx="411480" cy="259080"/>
+            <a:off x="8732520" y="4846320"/>
+            <a:ext cx="411480" cy="640080"/>
           </a:xfrm>
           <a:prstGeom prst="rect">
             <a:avLst/>
@@ -6983,167 +7240,6 @@
                 </a:solidFill>
               </a:rPr>
               <a:t>70/100</a:t>
-            </a:r>
-          </a:p>
-        </p:txBody>
-      </p:sp>
-      <p:sp>
-        <p:nvSpPr>
-          <p:cNvPr id="30" name="TextBox 29"/>
-          <p:cNvSpPr txBox="1"/>
-          <p:nvPr/>
-        </p:nvSpPr>
-        <p:spPr>
-          <a:xfrm>
-            <a:off x="4983480" y="2743200"/>
-            <a:ext cx="3703320" cy="1371600"/>
-          </a:xfrm>
-          <a:prstGeom prst="rect">
-            <a:avLst/>
-          </a:prstGeom>
-          <a:noFill/>
-        </p:spPr>
-        <p:txBody>
-          <a:bodyPr wrap="square">
-            <a:spAutoFit/>
-          </a:bodyPr>
-          <a:lstStyle/>
-          <a:p>
-            <a:pPr>
-              <a:defRPr b="1" sz="1400">
-                <a:solidFill>
-                  <a:srgbClr val="0070C0"/>
-                </a:solidFill>
-              </a:defRPr>
-            </a:pPr>
-            <a:r>
-              <a:t>Executive Summary</a:t>
-            </a:r>
-          </a:p>
-          <a:p>
-            <a:pPr>
-              <a:defRPr sz="1100"/>
-            </a:pPr>
-            <a:r>
-              <a:t>本報告完成了初步的失效定位(Localization)，確認故障點位於Touch IC的INT/MISO引腳，但尚未達到正式FA報告的深度。報告最大的問題在於「僅有推測，缺乏根因」以及「完全沒有對策」。目前的結論僅能說「壞在哪裡」，無法說明「為什麼壞」以及「如何不再發生」。建議補足物理分析證據，並根據根因制定完整的改善與驗證計畫。</a:t>
-            </a:r>
-          </a:p>
-        </p:txBody>
-      </p:sp>
-      <p:sp>
-        <p:nvSpPr>
-          <p:cNvPr id="31" name="TextBox 30"/>
-          <p:cNvSpPr txBox="1"/>
-          <p:nvPr/>
-        </p:nvSpPr>
-        <p:spPr>
-          <a:xfrm>
-            <a:off x="4983480" y="4206240"/>
-            <a:ext cx="3703320" cy="1828800"/>
-          </a:xfrm>
-          <a:prstGeom prst="rect">
-            <a:avLst/>
-          </a:prstGeom>
-          <a:noFill/>
-        </p:spPr>
-        <p:txBody>
-          <a:bodyPr wrap="square">
-            <a:spAutoFit/>
-          </a:bodyPr>
-          <a:lstStyle/>
-          <a:p>
-            <a:pPr>
-              <a:defRPr b="1" sz="1400">
-                <a:solidFill>
-                  <a:srgbClr val="FF0000"/>
-                </a:solidFill>
-              </a:defRPr>
-            </a:pPr>
-            <a:r>
-              <a:t>Key Improvements Required</a:t>
-            </a:r>
-          </a:p>
-          <a:p>
-            <a:pPr>
-              <a:defRPr sz="1000"/>
-            </a:pPr>
-            <a:r>
-              <a:t>• 提供了產品型號、日期與準備者，但缺乏具體的批號(Lot No.)、失效數量(Failure Quantity)以及明確的客戶名稱。</a:t>
-            </a:r>
-          </a:p>
-          <a:p>
-            <a:pPr>
-              <a:defRPr sz="1000"/>
-            </a:pPr>
-            <a:r>
-              <a:t>• 失效現象描述清楚(SPI無法通訊)，並提供了金手指對地的量測數據，但缺乏失效率(Failure Rate)的統計數據。</a:t>
-            </a:r>
-          </a:p>
-          <a:p>
-            <a:pPr>
-              <a:defRPr sz="1000"/>
-            </a:pPr>
-            <a:r>
-              <a:t>• 採用了排除法(移除TVS、移除IC)進行初步分析，邏輯尚屬合理，但缺乏更深層的物理分析(如SEM或X-ray)來確認IC內部的損傷機制。</a:t>
-            </a:r>
-          </a:p>
-        </p:txBody>
-      </p:sp>
-      <p:sp>
-        <p:nvSpPr>
-          <p:cNvPr id="32" name="TextBox 31"/>
-          <p:cNvSpPr txBox="1"/>
-          <p:nvPr/>
-        </p:nvSpPr>
-        <p:spPr>
-          <a:xfrm>
-            <a:off x="1463040" y="4206240"/>
-            <a:ext cx="3291840" cy="1828800"/>
-          </a:xfrm>
-          <a:prstGeom prst="rect">
-            <a:avLst/>
-          </a:prstGeom>
-          <a:noFill/>
-        </p:spPr>
-        <p:txBody>
-          <a:bodyPr wrap="square">
-            <a:spAutoFit/>
-          </a:bodyPr>
-          <a:lstStyle/>
-          <a:p>
-            <a:pPr>
-              <a:defRPr b="1" sz="1400">
-                <a:solidFill>
-                  <a:srgbClr val="0070C0"/>
-                </a:solidFill>
-              </a:defRPr>
-            </a:pPr>
-            <a:r>
-              <a:t>分析優點與成功驗證</a:t>
-            </a:r>
-          </a:p>
-          <a:p>
-            <a:pPr>
-              <a:defRPr sz="1000"/>
-            </a:pPr>
-            <a:r>
-              <a:t>✓ 初步排查邏輯清晰，透過移除元件成功定位故障點在於IC單體。</a:t>
-            </a:r>
-          </a:p>
-          <a:p>
-            <a:pPr>
-              <a:defRPr sz="1000"/>
-            </a:pPr>
-            <a:r>
-              <a:t>✓ 提供了初步的電性量測數據(OL, 47Ω, 58Ω)作為證據。</a:t>
-            </a:r>
-          </a:p>
-          <a:p>
-            <a:pPr>
-              <a:defRPr sz="1000"/>
-            </a:pPr>
-            <a:r>
-              <a:t>✓ 包含了電路圖與實際組件照片，有助於理解失效位置。</a:t>
             </a:r>
           </a:p>
         </p:txBody>
@@ -13955,17 +14051,22 @@
       <p:grpSpPr/>
       <p:sp>
         <p:nvSpPr>
-          <p:cNvPr id="2" name="Vertical Title 1"/>
-          <p:cNvSpPr>
-            <a:spLocks noGrp="1"/>
-          </p:cNvSpPr>
-          <p:nvPr>
-            <p:ph type="title" orient="vert"/>
-          </p:nvPr>
+          <p:cNvPr id="4" name="TextBox 3"/>
+          <p:cNvSpPr txBox="1"/>
+          <p:nvPr/>
         </p:nvSpPr>
-        <p:spPr/>
+        <p:spPr>
+          <a:xfrm>
+            <a:off x="457200" y="274320"/>
+            <a:ext cx="8229600" cy="914400"/>
+          </a:xfrm>
+          <a:prstGeom prst="rect">
+            <a:avLst/>
+          </a:prstGeom>
+          <a:noFill/>
+        </p:spPr>
         <p:txBody>
-          <a:bodyPr/>
+          <a:bodyPr wrap="square" lIns="45720" rIns="45720" tIns="18288" bIns="18288"/>
           <a:lstStyle/>
           <a:p>
             <a:r>
@@ -13976,24 +14077,7 @@
       </p:sp>
       <p:sp>
         <p:nvSpPr>
-          <p:cNvPr id="3" name="Vertical Text Placeholder 2"/>
-          <p:cNvSpPr>
-            <a:spLocks noGrp="1"/>
-          </p:cNvSpPr>
-          <p:nvPr>
-            <p:ph type="body" idx="1" orient="vert"/>
-          </p:nvPr>
-        </p:nvSpPr>
-        <p:spPr/>
-        <p:txBody>
-          <a:bodyPr/>
-          <a:lstStyle/>
-          <a:p/>
-        </p:txBody>
-      </p:sp>
-      <p:sp>
-        <p:nvSpPr>
-          <p:cNvPr id="4" name="Rectangle 3"/>
+          <p:cNvPr id="5" name="Rectangle 4"/>
           <p:cNvSpPr/>
           <p:nvPr/>
         </p:nvSpPr>
@@ -14042,7 +14126,7 @@
       </p:sp>
       <p:sp>
         <p:nvSpPr>
-          <p:cNvPr id="5" name="TextBox 4"/>
+          <p:cNvPr id="6" name="TextBox 5"/>
           <p:cNvSpPr txBox="1"/>
           <p:nvPr/>
         </p:nvSpPr>
@@ -14075,7 +14159,7 @@
       </p:sp>
       <p:sp>
         <p:nvSpPr>
-          <p:cNvPr id="6" name="Rectangle 5"/>
+          <p:cNvPr id="7" name="Rectangle 6"/>
           <p:cNvSpPr/>
           <p:nvPr/>
         </p:nvSpPr>
@@ -14124,7 +14208,7 @@
       </p:sp>
       <p:sp>
         <p:nvSpPr>
-          <p:cNvPr id="7" name="TextBox 6"/>
+          <p:cNvPr id="8" name="TextBox 7"/>
           <p:cNvSpPr txBox="1"/>
           <p:nvPr/>
         </p:nvSpPr>
@@ -14157,7 +14241,7 @@
       </p:sp>
       <p:sp>
         <p:nvSpPr>
-          <p:cNvPr id="8" name="Rectangle 7"/>
+          <p:cNvPr id="9" name="Rectangle 8"/>
           <p:cNvSpPr/>
           <p:nvPr/>
         </p:nvSpPr>
@@ -14206,7 +14290,7 @@
       </p:sp>
       <p:sp>
         <p:nvSpPr>
-          <p:cNvPr id="9" name="TextBox 8"/>
+          <p:cNvPr id="10" name="TextBox 9"/>
           <p:cNvSpPr txBox="1"/>
           <p:nvPr/>
         </p:nvSpPr>
@@ -14239,7 +14323,7 @@
       </p:sp>
       <p:sp>
         <p:nvSpPr>
-          <p:cNvPr id="10" name="Rectangle 9"/>
+          <p:cNvPr id="11" name="Rectangle 10"/>
           <p:cNvSpPr/>
           <p:nvPr/>
         </p:nvSpPr>
@@ -14288,7 +14372,7 @@
       </p:sp>
       <p:sp>
         <p:nvSpPr>
-          <p:cNvPr id="11" name="TextBox 10"/>
+          <p:cNvPr id="12" name="TextBox 11"/>
           <p:cNvSpPr txBox="1"/>
           <p:nvPr/>
         </p:nvSpPr>
@@ -14321,7 +14405,7 @@
       </p:sp>
       <p:sp>
         <p:nvSpPr>
-          <p:cNvPr id="12" name="Rectangle 11"/>
+          <p:cNvPr id="13" name="Rectangle 12"/>
           <p:cNvSpPr/>
           <p:nvPr/>
         </p:nvSpPr>
@@ -14370,7 +14454,7 @@
       </p:sp>
       <p:sp>
         <p:nvSpPr>
-          <p:cNvPr id="13" name="TextBox 12"/>
+          <p:cNvPr id="14" name="TextBox 13"/>
           <p:cNvSpPr txBox="1"/>
           <p:nvPr/>
         </p:nvSpPr>
@@ -14403,7 +14487,7 @@
       </p:sp>
       <p:sp>
         <p:nvSpPr>
-          <p:cNvPr id="14" name="Rectangle 13"/>
+          <p:cNvPr id="15" name="Rectangle 14"/>
           <p:cNvSpPr/>
           <p:nvPr/>
         </p:nvSpPr>
@@ -14452,7 +14536,7 @@
       </p:sp>
       <p:sp>
         <p:nvSpPr>
-          <p:cNvPr id="15" name="TextBox 14"/>
+          <p:cNvPr id="16" name="TextBox 15"/>
           <p:cNvSpPr txBox="1"/>
           <p:nvPr/>
         </p:nvSpPr>
@@ -14485,7 +14569,7 @@
       </p:sp>
       <p:sp>
         <p:nvSpPr>
-          <p:cNvPr id="16" name="Rectangle 15"/>
+          <p:cNvPr id="17" name="Rectangle 16"/>
           <p:cNvSpPr/>
           <p:nvPr/>
         </p:nvSpPr>
@@ -14534,7 +14618,7 @@
       </p:sp>
       <p:sp>
         <p:nvSpPr>
-          <p:cNvPr id="17" name="TextBox 16"/>
+          <p:cNvPr id="18" name="TextBox 17"/>
           <p:cNvSpPr txBox="1"/>
           <p:nvPr/>
         </p:nvSpPr>
@@ -14567,7 +14651,7 @@
       </p:sp>
       <p:sp>
         <p:nvSpPr>
-          <p:cNvPr id="18" name="TextBox 17"/>
+          <p:cNvPr id="19" name="TextBox 18"/>
           <p:cNvSpPr txBox="1"/>
           <p:nvPr/>
         </p:nvSpPr>
@@ -14582,9 +14666,7 @@
           <a:noFill/>
         </p:spPr>
         <p:txBody>
-          <a:bodyPr wrap="square">
-            <a:spAutoFit/>
-          </a:bodyPr>
+          <a:bodyPr wrap="square" lIns="45720" rIns="45720" tIns="18288" bIns="18288"/>
           <a:lstStyle/>
           <a:p>
             <a:pPr>
@@ -14628,17 +14710,22 @@
       <p:grpSpPr/>
       <p:sp>
         <p:nvSpPr>
-          <p:cNvPr id="2" name="Vertical Title 1"/>
-          <p:cNvSpPr>
-            <a:spLocks noGrp="1"/>
-          </p:cNvSpPr>
-          <p:nvPr>
-            <p:ph type="title" orient="vert"/>
-          </p:nvPr>
+          <p:cNvPr id="4" name="TextBox 3"/>
+          <p:cNvSpPr txBox="1"/>
+          <p:nvPr/>
         </p:nvSpPr>
-        <p:spPr/>
+        <p:spPr>
+          <a:xfrm>
+            <a:off x="457200" y="274320"/>
+            <a:ext cx="8229600" cy="914400"/>
+          </a:xfrm>
+          <a:prstGeom prst="rect">
+            <a:avLst/>
+          </a:prstGeom>
+          <a:noFill/>
+        </p:spPr>
         <p:txBody>
-          <a:bodyPr/>
+          <a:bodyPr wrap="square" lIns="45720" rIns="45720" tIns="18288" bIns="18288"/>
           <a:lstStyle/>
           <a:p>
             <a:r>
@@ -14649,24 +14736,7 @@
       </p:sp>
       <p:sp>
         <p:nvSpPr>
-          <p:cNvPr id="3" name="Vertical Text Placeholder 2"/>
-          <p:cNvSpPr>
-            <a:spLocks noGrp="1"/>
-          </p:cNvSpPr>
-          <p:nvPr>
-            <p:ph type="body" idx="1" orient="vert"/>
-          </p:nvPr>
-        </p:nvSpPr>
-        <p:spPr/>
-        <p:txBody>
-          <a:bodyPr/>
-          <a:lstStyle/>
-          <a:p/>
-        </p:txBody>
-      </p:sp>
-      <p:sp>
-        <p:nvSpPr>
-          <p:cNvPr id="4" name="Rectangle 3"/>
+          <p:cNvPr id="5" name="Rectangle 4"/>
           <p:cNvSpPr/>
           <p:nvPr/>
         </p:nvSpPr>
@@ -14715,7 +14785,7 @@
       </p:sp>
       <p:sp>
         <p:nvSpPr>
-          <p:cNvPr id="5" name="TextBox 4"/>
+          <p:cNvPr id="6" name="TextBox 5"/>
           <p:cNvSpPr txBox="1"/>
           <p:nvPr/>
         </p:nvSpPr>
@@ -14748,7 +14818,7 @@
       </p:sp>
       <p:sp>
         <p:nvSpPr>
-          <p:cNvPr id="6" name="Rectangle 5"/>
+          <p:cNvPr id="7" name="Rectangle 6"/>
           <p:cNvSpPr/>
           <p:nvPr/>
         </p:nvSpPr>
@@ -14797,7 +14867,7 @@
       </p:sp>
       <p:sp>
         <p:nvSpPr>
-          <p:cNvPr id="7" name="TextBox 6"/>
+          <p:cNvPr id="8" name="TextBox 7"/>
           <p:cNvSpPr txBox="1"/>
           <p:nvPr/>
         </p:nvSpPr>
@@ -14830,7 +14900,7 @@
       </p:sp>
       <p:sp>
         <p:nvSpPr>
-          <p:cNvPr id="8" name="Rectangle 7"/>
+          <p:cNvPr id="9" name="Rectangle 8"/>
           <p:cNvSpPr/>
           <p:nvPr/>
         </p:nvSpPr>
@@ -14879,7 +14949,7 @@
       </p:sp>
       <p:sp>
         <p:nvSpPr>
-          <p:cNvPr id="9" name="TextBox 8"/>
+          <p:cNvPr id="10" name="TextBox 9"/>
           <p:cNvSpPr txBox="1"/>
           <p:nvPr/>
         </p:nvSpPr>
@@ -14912,7 +14982,7 @@
       </p:sp>
       <p:sp>
         <p:nvSpPr>
-          <p:cNvPr id="10" name="Rectangle 9"/>
+          <p:cNvPr id="11" name="Rectangle 10"/>
           <p:cNvSpPr/>
           <p:nvPr/>
         </p:nvSpPr>
@@ -14961,7 +15031,7 @@
       </p:sp>
       <p:sp>
         <p:nvSpPr>
-          <p:cNvPr id="11" name="TextBox 10"/>
+          <p:cNvPr id="12" name="TextBox 11"/>
           <p:cNvSpPr txBox="1"/>
           <p:nvPr/>
         </p:nvSpPr>
@@ -14994,7 +15064,7 @@
       </p:sp>
       <p:sp>
         <p:nvSpPr>
-          <p:cNvPr id="12" name="Rectangle 11"/>
+          <p:cNvPr id="13" name="Rectangle 12"/>
           <p:cNvSpPr/>
           <p:nvPr/>
         </p:nvSpPr>
@@ -15043,7 +15113,7 @@
       </p:sp>
       <p:sp>
         <p:nvSpPr>
-          <p:cNvPr id="13" name="TextBox 12"/>
+          <p:cNvPr id="14" name="TextBox 13"/>
           <p:cNvSpPr txBox="1"/>
           <p:nvPr/>
         </p:nvSpPr>
@@ -15076,7 +15146,7 @@
       </p:sp>
       <p:sp>
         <p:nvSpPr>
-          <p:cNvPr id="14" name="Rectangle 13"/>
+          <p:cNvPr id="15" name="Rectangle 14"/>
           <p:cNvSpPr/>
           <p:nvPr/>
         </p:nvSpPr>
@@ -15125,7 +15195,7 @@
       </p:sp>
       <p:sp>
         <p:nvSpPr>
-          <p:cNvPr id="15" name="TextBox 14"/>
+          <p:cNvPr id="16" name="TextBox 15"/>
           <p:cNvSpPr txBox="1"/>
           <p:nvPr/>
         </p:nvSpPr>
@@ -15158,7 +15228,7 @@
       </p:sp>
       <p:sp>
         <p:nvSpPr>
-          <p:cNvPr id="16" name="Rectangle 15"/>
+          <p:cNvPr id="17" name="Rectangle 16"/>
           <p:cNvSpPr/>
           <p:nvPr/>
         </p:nvSpPr>
@@ -15207,7 +15277,7 @@
       </p:sp>
       <p:sp>
         <p:nvSpPr>
-          <p:cNvPr id="17" name="TextBox 16"/>
+          <p:cNvPr id="18" name="TextBox 17"/>
           <p:cNvSpPr txBox="1"/>
           <p:nvPr/>
         </p:nvSpPr>
@@ -15240,7 +15310,7 @@
       </p:sp>
       <p:sp>
         <p:nvSpPr>
-          <p:cNvPr id="18" name="Rectangle 17"/>
+          <p:cNvPr id="19" name="Rectangle 18"/>
           <p:cNvSpPr/>
           <p:nvPr/>
         </p:nvSpPr>
@@ -15289,7 +15359,7 @@
       </p:sp>
       <p:sp>
         <p:nvSpPr>
-          <p:cNvPr id="19" name="TextBox 18"/>
+          <p:cNvPr id="20" name="TextBox 19"/>
           <p:cNvSpPr txBox="1"/>
           <p:nvPr/>
         </p:nvSpPr>
@@ -15322,7 +15392,7 @@
       </p:sp>
       <p:graphicFrame>
         <p:nvGraphicFramePr>
-          <p:cNvPr id="20" name="Table 19"/>
+          <p:cNvPr id="21" name="Table 20"/>
           <p:cNvGraphicFramePr>
             <a:graphicFrameLocks noGrp="1"/>
           </p:cNvGraphicFramePr>
@@ -15760,45 +15830,33 @@
       <p:grpSpPr/>
       <p:sp>
         <p:nvSpPr>
-          <p:cNvPr id="2" name="Vertical Title 1"/>
-          <p:cNvSpPr>
-            <a:spLocks noGrp="1"/>
-          </p:cNvSpPr>
-          <p:nvPr>
-            <p:ph type="title" orient="vert"/>
-          </p:nvPr>
+          <p:cNvPr id="4" name="TextBox 3"/>
+          <p:cNvSpPr txBox="1"/>
+          <p:nvPr/>
         </p:nvSpPr>
-        <p:spPr/>
+        <p:spPr>
+          <a:xfrm>
+            <a:off x="457200" y="274320"/>
+            <a:ext cx="8229600" cy="914400"/>
+          </a:xfrm>
+          <a:prstGeom prst="rect">
+            <a:avLst/>
+          </a:prstGeom>
+          <a:noFill/>
+        </p:spPr>
         <p:txBody>
-          <a:bodyPr/>
+          <a:bodyPr wrap="square" lIns="45720" rIns="45720" tIns="18288" bIns="18288"/>
           <a:lstStyle/>
           <a:p>
             <a:r>
               <a:t>數據與證據支持</a:t>
             </a:r>
           </a:p>
-        </p:txBody>
-      </p:sp>
-      <p:sp>
-        <p:nvSpPr>
-          <p:cNvPr id="3" name="Vertical Text Placeholder 2"/>
-          <p:cNvSpPr>
-            <a:spLocks noGrp="1"/>
-          </p:cNvSpPr>
-          <p:nvPr>
-            <p:ph type="body" idx="1" orient="vert"/>
-          </p:nvPr>
-        </p:nvSpPr>
-        <p:spPr/>
-        <p:txBody>
-          <a:bodyPr/>
-          <a:lstStyle/>
-          <a:p/>
         </p:txBody>
       </p:sp>
       <p:graphicFrame>
         <p:nvGraphicFramePr>
-          <p:cNvPr id="4" name="Table 3"/>
+          <p:cNvPr id="5" name="Table 4"/>
           <p:cNvGraphicFramePr>
             <a:graphicFrameLocks noGrp="1"/>
           </p:cNvGraphicFramePr>
@@ -16336,7 +16394,7 @@
       </p:graphicFrame>
       <p:sp>
         <p:nvSpPr>
-          <p:cNvPr id="5" name="Rectangle 4"/>
+          <p:cNvPr id="6" name="Rectangle 5"/>
           <p:cNvSpPr/>
           <p:nvPr/>
         </p:nvSpPr>
@@ -16385,7 +16443,7 @@
       </p:sp>
       <p:sp>
         <p:nvSpPr>
-          <p:cNvPr id="6" name="TextBox 5"/>
+          <p:cNvPr id="7" name="TextBox 6"/>
           <p:cNvSpPr txBox="1"/>
           <p:nvPr/>
         </p:nvSpPr>
@@ -16418,7 +16476,7 @@
       </p:sp>
       <p:sp>
         <p:nvSpPr>
-          <p:cNvPr id="7" name="Rectangle 6"/>
+          <p:cNvPr id="8" name="Rectangle 7"/>
           <p:cNvSpPr/>
           <p:nvPr/>
         </p:nvSpPr>
@@ -16467,7 +16525,7 @@
       </p:sp>
       <p:sp>
         <p:nvSpPr>
-          <p:cNvPr id="8" name="TextBox 7"/>
+          <p:cNvPr id="9" name="TextBox 8"/>
           <p:cNvSpPr txBox="1"/>
           <p:nvPr/>
         </p:nvSpPr>
@@ -16500,7 +16558,7 @@
       </p:sp>
       <p:sp>
         <p:nvSpPr>
-          <p:cNvPr id="9" name="Rectangle 8"/>
+          <p:cNvPr id="10" name="Rectangle 9"/>
           <p:cNvSpPr/>
           <p:nvPr/>
         </p:nvSpPr>
@@ -16549,7 +16607,7 @@
       </p:sp>
       <p:sp>
         <p:nvSpPr>
-          <p:cNvPr id="10" name="TextBox 9"/>
+          <p:cNvPr id="11" name="TextBox 10"/>
           <p:cNvSpPr txBox="1"/>
           <p:nvPr/>
         </p:nvSpPr>
@@ -16582,7 +16640,7 @@
       </p:sp>
       <p:sp>
         <p:nvSpPr>
-          <p:cNvPr id="11" name="Rectangle 10"/>
+          <p:cNvPr id="12" name="Rectangle 11"/>
           <p:cNvSpPr/>
           <p:nvPr/>
         </p:nvSpPr>
@@ -16631,7 +16689,7 @@
       </p:sp>
       <p:sp>
         <p:nvSpPr>
-          <p:cNvPr id="12" name="TextBox 11"/>
+          <p:cNvPr id="13" name="TextBox 12"/>
           <p:cNvSpPr txBox="1"/>
           <p:nvPr/>
         </p:nvSpPr>
@@ -16664,7 +16722,7 @@
       </p:sp>
       <p:sp>
         <p:nvSpPr>
-          <p:cNvPr id="13" name="Rectangle 12"/>
+          <p:cNvPr id="14" name="Rectangle 13"/>
           <p:cNvSpPr/>
           <p:nvPr/>
         </p:nvSpPr>
@@ -16713,7 +16771,7 @@
       </p:sp>
       <p:sp>
         <p:nvSpPr>
-          <p:cNvPr id="14" name="TextBox 13"/>
+          <p:cNvPr id="15" name="TextBox 14"/>
           <p:cNvSpPr txBox="1"/>
           <p:nvPr/>
         </p:nvSpPr>
@@ -16746,7 +16804,7 @@
       </p:sp>
       <p:sp>
         <p:nvSpPr>
-          <p:cNvPr id="15" name="Rectangle 14"/>
+          <p:cNvPr id="16" name="Rectangle 15"/>
           <p:cNvSpPr/>
           <p:nvPr/>
         </p:nvSpPr>
@@ -16795,7 +16853,7 @@
       </p:sp>
       <p:sp>
         <p:nvSpPr>
-          <p:cNvPr id="16" name="TextBox 15"/>
+          <p:cNvPr id="17" name="TextBox 16"/>
           <p:cNvSpPr txBox="1"/>
           <p:nvPr/>
         </p:nvSpPr>
@@ -16828,7 +16886,7 @@
       </p:sp>
       <p:sp>
         <p:nvSpPr>
-          <p:cNvPr id="17" name="Rectangle 16"/>
+          <p:cNvPr id="18" name="Rectangle 17"/>
           <p:cNvSpPr/>
           <p:nvPr/>
         </p:nvSpPr>
@@ -16877,7 +16935,7 @@
       </p:sp>
       <p:sp>
         <p:nvSpPr>
-          <p:cNvPr id="18" name="TextBox 17"/>
+          <p:cNvPr id="19" name="TextBox 18"/>
           <p:cNvSpPr txBox="1"/>
           <p:nvPr/>
         </p:nvSpPr>
@@ -16928,17 +16986,22 @@
       <p:grpSpPr/>
       <p:sp>
         <p:nvSpPr>
-          <p:cNvPr id="2" name="Vertical Title 1"/>
-          <p:cNvSpPr>
-            <a:spLocks noGrp="1"/>
-          </p:cNvSpPr>
-          <p:nvPr>
-            <p:ph type="title" orient="vert"/>
-          </p:nvPr>
+          <p:cNvPr id="4" name="TextBox 3"/>
+          <p:cNvSpPr txBox="1"/>
+          <p:nvPr/>
         </p:nvSpPr>
-        <p:spPr/>
+        <p:spPr>
+          <a:xfrm>
+            <a:off x="457200" y="274320"/>
+            <a:ext cx="8229600" cy="914400"/>
+          </a:xfrm>
+          <a:prstGeom prst="rect">
+            <a:avLst/>
+          </a:prstGeom>
+          <a:noFill/>
+        </p:spPr>
         <p:txBody>
-          <a:bodyPr/>
+          <a:bodyPr wrap="square" lIns="45720" rIns="45720" tIns="18288" bIns="18288"/>
           <a:lstStyle/>
           <a:p>
             <a:r>
@@ -16949,84 +17012,7 @@
       </p:sp>
       <p:sp>
         <p:nvSpPr>
-          <p:cNvPr id="3" name="Vertical Text Placeholder 2"/>
-          <p:cNvSpPr>
-            <a:spLocks noGrp="1"/>
-          </p:cNvSpPr>
-          <p:nvPr>
-            <p:ph type="body" idx="1" orient="vert"/>
-          </p:nvPr>
-        </p:nvSpPr>
-        <p:spPr/>
-        <p:txBody>
-          <a:bodyPr/>
-          <a:lstStyle/>
-          <a:p>
-            <a:pPr>
-              <a:defRPr b="1" sz="1800">
-                <a:solidFill>
-                  <a:srgbClr val="0070C0"/>
-                </a:solidFill>
-              </a:defRPr>
-            </a:pPr>
-            <a:r>
-              <a:t>為什麼需要 5-Why:</a:t>
-            </a:r>
-          </a:p>
-          <a:p>
-            <a:pPr>
-              <a:defRPr sz="1400"/>
-            </a:pPr>
-            <a:r>
-              <a:t>採用了排除法(移除TVS、移除IC)進行初步分析，邏輯尚屬合理，但缺乏更深層的物理分析(如SEM或X-ray)來確認IC內部的損傷機制。</a:t>
-            </a:r>
-          </a:p>
-          <a:p>
-            <a:pPr>
-              <a:defRPr sz="1400"/>
-            </a:pPr>
-            <a:r>
-              <a:t>結論僅停留在「推測」為I/O損傷，缺乏因果關係的深度分析。未說明為何會造成損傷(如ESD、過電壓或生產製程問題)，未應用5-Why分析。</a:t>
-            </a:r>
-          </a:p>
-          <a:p>
-            <a:br/>
-            <a:pPr>
-              <a:defRPr b="1"/>
-            </a:pPr>
-            <a:r>
-              <a:t>[推導流程]</a:t>
-            </a:r>
-          </a:p>
-          <a:p>
-            <a:pPr>
-              <a:defRPr sz="1200"/>
-            </a:pPr>
-            <a:r>
-              <a:t>• 設定 DVT 正常品 vs PVT 異常品之對照組</a:t>
-            </a:r>
-          </a:p>
-          <a:p>
-            <a:pPr>
-              <a:defRPr sz="1200"/>
-            </a:pPr>
-            <a:r>
-              <a:t>• 使用獨立樣本 t 檢定驗證參數顯著性 (p &lt; 0.05)</a:t>
-            </a:r>
-          </a:p>
-          <a:p>
-            <a:pPr>
-              <a:defRPr sz="1200"/>
-            </a:pPr>
-            <a:r>
-              <a:t>• 確保統計證據支持最終提到的根本原因</a:t>
-            </a:r>
-          </a:p>
-        </p:txBody>
-      </p:sp>
-      <p:sp>
-        <p:nvSpPr>
-          <p:cNvPr id="4" name="Rounded Rectangle 3"/>
+          <p:cNvPr id="5" name="Rounded Rectangle 4"/>
           <p:cNvSpPr/>
           <p:nvPr/>
         </p:nvSpPr>
@@ -17079,7 +17065,7 @@
       </p:sp>
       <p:sp>
         <p:nvSpPr>
-          <p:cNvPr id="5" name="Right Arrow 4"/>
+          <p:cNvPr id="6" name="Right Arrow 5"/>
           <p:cNvSpPr/>
           <p:nvPr/>
         </p:nvSpPr>
@@ -17122,7 +17108,7 @@
       </p:sp>
       <p:sp>
         <p:nvSpPr>
-          <p:cNvPr id="6" name="Rounded Rectangle 5"/>
+          <p:cNvPr id="7" name="Rounded Rectangle 6"/>
           <p:cNvSpPr/>
           <p:nvPr/>
         </p:nvSpPr>
@@ -17175,7 +17161,7 @@
       </p:sp>
       <p:sp>
         <p:nvSpPr>
-          <p:cNvPr id="7" name="Right Arrow 6"/>
+          <p:cNvPr id="8" name="Right Arrow 7"/>
           <p:cNvSpPr/>
           <p:nvPr/>
         </p:nvSpPr>
@@ -17218,7 +17204,7 @@
       </p:sp>
       <p:sp>
         <p:nvSpPr>
-          <p:cNvPr id="8" name="Rounded Rectangle 7"/>
+          <p:cNvPr id="9" name="Rounded Rectangle 8"/>
           <p:cNvSpPr/>
           <p:nvPr/>
         </p:nvSpPr>
@@ -17271,7 +17257,7 @@
       </p:sp>
       <p:sp>
         <p:nvSpPr>
-          <p:cNvPr id="9" name="Right Arrow 8"/>
+          <p:cNvPr id="10" name="Right Arrow 9"/>
           <p:cNvSpPr/>
           <p:nvPr/>
         </p:nvSpPr>
@@ -17314,7 +17300,7 @@
       </p:sp>
       <p:sp>
         <p:nvSpPr>
-          <p:cNvPr id="10" name="Rounded Rectangle 9"/>
+          <p:cNvPr id="11" name="Rounded Rectangle 10"/>
           <p:cNvSpPr/>
           <p:nvPr/>
         </p:nvSpPr>
@@ -17367,7 +17353,7 @@
       </p:sp>
       <p:sp>
         <p:nvSpPr>
-          <p:cNvPr id="11" name="Right Arrow 10"/>
+          <p:cNvPr id="12" name="Right Arrow 11"/>
           <p:cNvSpPr/>
           <p:nvPr/>
         </p:nvSpPr>
@@ -17410,7 +17396,7 @@
       </p:sp>
       <p:sp>
         <p:nvSpPr>
-          <p:cNvPr id="12" name="Rounded Rectangle 11"/>
+          <p:cNvPr id="13" name="Rounded Rectangle 12"/>
           <p:cNvSpPr/>
           <p:nvPr/>
         </p:nvSpPr>
@@ -17457,6 +17443,88 @@
                 </a:solidFill>
               </a:rPr>
               <a:t>Why 3: 間接原因</a:t>
+            </a:r>
+          </a:p>
+        </p:txBody>
+      </p:sp>
+      <p:sp>
+        <p:nvSpPr>
+          <p:cNvPr id="14" name="TextBox 13"/>
+          <p:cNvSpPr txBox="1"/>
+          <p:nvPr/>
+        </p:nvSpPr>
+        <p:spPr>
+          <a:xfrm>
+            <a:off x="457200" y="1371600"/>
+            <a:ext cx="8229600" cy="5029200"/>
+          </a:xfrm>
+          <a:prstGeom prst="rect">
+            <a:avLst/>
+          </a:prstGeom>
+          <a:noFill/>
+        </p:spPr>
+        <p:txBody>
+          <a:bodyPr wrap="square" lIns="45720" rIns="45720" tIns="18288" bIns="18288"/>
+          <a:lstStyle/>
+          <a:p>
+            <a:pPr>
+              <a:defRPr b="1" sz="1800">
+                <a:solidFill>
+                  <a:srgbClr val="0070C0"/>
+                </a:solidFill>
+              </a:defRPr>
+            </a:pPr>
+            <a:r>
+              <a:t>為什麼需要 5-Why:</a:t>
+            </a:r>
+          </a:p>
+          <a:p>
+            <a:pPr>
+              <a:defRPr sz="1400"/>
+            </a:pPr>
+            <a:r>
+              <a:t>採用了排除法(移除TVS、移除IC)進行初步分析，邏輯尚屬合理，但缺乏更深層的物理分析(如SEM或X-ray)來確認IC內部的損傷機制。</a:t>
+            </a:r>
+          </a:p>
+          <a:p>
+            <a:pPr>
+              <a:defRPr sz="1400"/>
+            </a:pPr>
+            <a:r>
+              <a:t>結論僅停留在「推測」為I/O損傷，缺乏因果關係的深度分析。未說明為何會造成損傷(如ESD、過電壓或生產製程問題)，未應用5-Why分析。</a:t>
+            </a:r>
+          </a:p>
+          <a:p>
+            <a:br/>
+            <a:pPr>
+              <a:defRPr b="1"/>
+            </a:pPr>
+            <a:r>
+              <a:t>[推導流程]</a:t>
+            </a:r>
+          </a:p>
+          <a:p>
+            <a:pPr>
+              <a:defRPr sz="1200"/>
+            </a:pPr>
+            <a:r>
+              <a:t>• 設定 DVT 正常品 vs PVT 異常品之對照組</a:t>
+            </a:r>
+          </a:p>
+          <a:p>
+            <a:pPr>
+              <a:defRPr sz="1200"/>
+            </a:pPr>
+            <a:r>
+              <a:t>• 使用獨立樣本 t 檢定驗證參數顯著性 (p &lt; 0.05)</a:t>
+            </a:r>
+          </a:p>
+          <a:p>
+            <a:pPr>
+              <a:defRPr sz="1200"/>
+            </a:pPr>
+            <a:r>
+              <a:t>• 確保統計證據支持最終提到的根本原因</a:t>
             </a:r>
           </a:p>
         </p:txBody>
